--- a/0. Priorización de vuelos con riesgo de retraso.pptx
+++ b/0. Priorización de vuelos con riesgo de retraso.pptx
@@ -8685,7 +8685,7 @@
                 <a:ea typeface="Arial" pitchFamily="34" charset="-122"/>
                 <a:cs typeface="Arial" pitchFamily="34" charset="-120"/>
               </a:rPr>
-              <a:t>1,3 GB</a:t>
+              <a:t>≈0,8 GB</a:t>
             </a:r>
             <a:endParaRPr lang="en-US" sz="3000" dirty="0"/>
           </a:p>
@@ -8729,7 +8729,7 @@
                 <a:ea typeface="Arial" pitchFamily="34" charset="-122"/>
                 <a:cs typeface="Arial" pitchFamily="34" charset="-120"/>
               </a:rPr>
-              <a:t>de RAM libre en un equipo de 8 GB</a:t>
+              <a:t>Parquet combinado (EDA*)</a:t>
             </a:r>
             <a:endParaRPr lang="en-US" sz="1300" dirty="0"/>
           </a:p>
@@ -9366,7 +9366,7 @@
               <a:buNone/>
             </a:pPr>
             <a:r>
-              <a:rPr lang="en-US" sz="1200" dirty="0">
+              <a:rPr lang="en-US" sz="900" dirty="0">
                 <a:solidFill>
                   <a:srgbClr val="55606B"/>
                 </a:solidFill>
@@ -9374,7 +9374,7 @@
                 <a:ea typeface="Arial" pitchFamily="34" charset="-122"/>
                 <a:cs typeface="Arial" pitchFamily="34" charset="-120"/>
               </a:rPr>
-              <a:t>Fuente: Flight Delay Dataset 2018–2022 (Kaggle) · Notebook integrado, secciones 1 y 2</a:t>
+              <a:t>Fuente: Kaggle y notebook integrado. *≈0,8 GB, ≈92 % menos que CSV. Cifra registrada en EDA previo, no revalidada en esta copia.</a:t>
             </a:r>
             <a:endParaRPr lang="en-US" sz="1200" dirty="0"/>
           </a:p>

--- a/0. Priorización de vuelos con riesgo de retraso.pptx
+++ b/0. Priorización de vuelos con riesgo de retraso.pptx
@@ -8490,7 +8490,7 @@
                 <a:ea typeface="Arial" pitchFamily="34" charset="-122"/>
                 <a:cs typeface="Arial" pitchFamily="34" charset="-120"/>
               </a:rPr>
-              <a:t>vuelos y 61 columnas (29.193.782 registros)</a:t>
+              <a:t>vuelos y 61 columnas (Pendiente registros)</a:t>
             </a:r>
             <a:endParaRPr lang="en-US" sz="1300" dirty="0"/>
           </a:p>
@@ -10103,1060 +10103,1426 @@
 </file>
 
 <file path=ppt/slides/slide5.xml><?xml version="1.0" encoding="utf-8"?>
-<p:sld xmlns:a="http://schemas.openxmlformats.org/drawingml/2006/main" xmlns:r="http://schemas.openxmlformats.org/officeDocument/2006/relationships" xmlns:p="http://schemas.openxmlformats.org/presentationml/2006/main">
-  <p:cSld name="Slide 5">
-    <p:bg>
-      <p:bgPr>
-        <a:solidFill>
-          <a:srgbClr val="F5F3EC"/>
-        </a:solidFill>
-        <a:effectLst/>
-      </p:bgPr>
-    </p:bg>
-    <p:spTree>
-      <p:nvGrpSpPr>
-        <p:cNvPr id="1" name=""/>
-        <p:cNvGrpSpPr/>
-        <p:nvPr/>
-      </p:nvGrpSpPr>
-      <p:grpSpPr>
-        <a:xfrm>
-          <a:off x="0" y="0"/>
-          <a:ext cx="0" cy="0"/>
-          <a:chOff x="0" y="0"/>
-          <a:chExt cx="0" cy="0"/>
-        </a:xfrm>
-      </p:grpSpPr>
-      <p:sp>
-        <p:nvSpPr>
-          <p:cNvPr id="2" name="Text 0"/>
-          <p:cNvSpPr/>
-          <p:nvPr/>
-        </p:nvSpPr>
-        <p:spPr>
-          <a:xfrm>
-            <a:off x="812800" y="812800"/>
-            <a:ext cx="10883392" cy="268982"/>
-          </a:xfrm>
-          <a:prstGeom prst="rect">
-            <a:avLst/>
-          </a:prstGeom>
-          <a:noFill/>
-          <a:ln/>
-        </p:spPr>
-        <p:txBody>
-          <a:bodyPr wrap="square" lIns="0" tIns="0" rIns="0" bIns="0" rtlCol="0" anchor="t">
-            <a:normAutofit/>
-          </a:bodyPr>
-          <a:lstStyle/>
-          <a:p>
-            <a:pPr marL="0" indent="0" algn="l">
-              <a:lnSpc>
-                <a:spcPts val="1948"/>
-              </a:lnSpc>
-              <a:buNone/>
-            </a:pPr>
-            <a:r>
-              <a:rPr lang="en-US" sz="1391" b="1" kern="0" spc="100" dirty="0">
-                <a:solidFill>
-                  <a:srgbClr val="176B7B"/>
-                </a:solidFill>
-                <a:latin typeface="Arial" pitchFamily="34" charset="0"/>
-                <a:ea typeface="Arial" pitchFamily="34" charset="-122"/>
-                <a:cs typeface="Arial" pitchFamily="34" charset="-120"/>
-              </a:rPr>
-              <a:t>3 · LO QUE APRENDIMOS · HALLAZGO 2</a:t>
-            </a:r>
-            <a:endParaRPr lang="en-US" sz="1391" dirty="0"/>
-          </a:p>
-        </p:txBody>
-      </p:sp>
-      <p:sp>
-        <p:nvSpPr>
-          <p:cNvPr id="3" name="Text 1"/>
-          <p:cNvSpPr>
-            <a:spLocks noGrp="1"/>
-          </p:cNvSpPr>
-          <p:nvPr>
-            <p:ph type="title"/>
-          </p:nvPr>
-        </p:nvSpPr>
-        <p:spPr>
-          <a:xfrm>
-            <a:off x="812800" y="1259582"/>
-            <a:ext cx="10883392" cy="437654"/>
-          </a:xfrm>
-          <a:prstGeom prst="rect">
-            <a:avLst/>
-          </a:prstGeom>
-          <a:noFill/>
-          <a:ln/>
-        </p:spPr>
-        <p:txBody>
-          <a:bodyPr wrap="square" lIns="0" tIns="0" rIns="0" bIns="0" rtlCol="0" anchor="t">
-            <a:normAutofit/>
-          </a:bodyPr>
-          <a:lstStyle/>
-          <a:p>
-            <a:pPr marL="0" indent="0" algn="l">
-              <a:lnSpc>
-                <a:spcPts val="3290"/>
-              </a:lnSpc>
-              <a:buNone/>
-            </a:pPr>
-            <a:r>
-              <a:rPr lang="en-US" sz="2991" b="1" i="0" dirty="0">
-                <a:solidFill>
-                  <a:srgbClr val="16222F"/>
-                </a:solidFill>
-                <a:latin typeface="Arial" pitchFamily="34" charset="0"/>
-                <a:ea typeface="Arial" pitchFamily="34" charset="-122"/>
-                <a:cs typeface="Arial" pitchFamily="34" charset="-120"/>
-              </a:rPr>
-              <a:t>El pasado no se parece al presente</a:t>
-            </a:r>
-            <a:endParaRPr lang="en-US" sz="2991" dirty="0"/>
-          </a:p>
-        </p:txBody>
-      </p:sp>
-      <p:sp>
-        <p:nvSpPr>
-          <p:cNvPr id="4" name="Shape 2"/>
-          <p:cNvSpPr/>
-          <p:nvPr/>
-        </p:nvSpPr>
-        <p:spPr>
-          <a:xfrm>
-            <a:off x="815975" y="1878211"/>
-            <a:ext cx="5708650" cy="2417266"/>
-          </a:xfrm>
-          <a:prstGeom prst="roundRect">
-            <a:avLst>
-              <a:gd name="adj" fmla="val 4072"/>
-            </a:avLst>
-          </a:prstGeom>
-          <a:solidFill>
-            <a:srgbClr val="FBFAF6"/>
-          </a:solidFill>
-          <a:ln w="6350">
-            <a:solidFill>
-              <a:srgbClr val="DAD6C8"/>
-            </a:solidFill>
-            <a:prstDash val="solid"/>
-          </a:ln>
-        </p:spPr>
-        <p:txBody>
-          <a:bodyPr/>
-          <a:lstStyle/>
-          <a:p>
-            <a:endParaRPr lang="es-CO"/>
-          </a:p>
-        </p:txBody>
-      </p:sp>
-      <p:pic>
-        <p:nvPicPr>
-          <p:cNvPr id="5" name="Image 0" descr="Dos gráficos por mes y año: porcentaje de vuelos retrasados (2020 muy por debajo de los demás años) y porcentaje de vuelos cancelados (pico de más de 40 % en abril de 2020)"/>
-          <p:cNvPicPr>
-            <a:picLocks noChangeAspect="1"/>
-          </p:cNvPicPr>
-          <p:nvPr/>
-        </p:nvPicPr>
-        <p:blipFill>
-          <a:blip r:embed="rId3"/>
-          <a:srcRect l="-992" r="-992"/>
-          <a:stretch/>
-        </p:blipFill>
-        <p:spPr>
-          <a:xfrm>
-            <a:off x="946150" y="2008386"/>
-            <a:ext cx="5461000" cy="1887637"/>
-          </a:xfrm>
-          <a:prstGeom prst="rect">
-            <a:avLst/>
-          </a:prstGeom>
-        </p:spPr>
-      </p:pic>
-      <p:sp>
-        <p:nvSpPr>
-          <p:cNvPr id="6" name="Text 3"/>
-          <p:cNvSpPr/>
-          <p:nvPr/>
-        </p:nvSpPr>
-        <p:spPr>
-          <a:xfrm>
-            <a:off x="946150" y="3972223"/>
-            <a:ext cx="5611749" cy="218480"/>
-          </a:xfrm>
-          <a:prstGeom prst="rect">
-            <a:avLst/>
-          </a:prstGeom>
-          <a:noFill/>
-          <a:ln/>
-        </p:spPr>
-        <p:txBody>
-          <a:bodyPr wrap="square" lIns="0" tIns="0" rIns="0" bIns="0" rtlCol="0" anchor="t">
-            <a:normAutofit/>
-          </a:bodyPr>
-          <a:lstStyle/>
-          <a:p>
-            <a:pPr marL="0" indent="0" algn="l">
-              <a:lnSpc>
-                <a:spcPts val="1550"/>
-              </a:lnSpc>
-              <a:buNone/>
-            </a:pPr>
-            <a:r>
-              <a:rPr lang="en-US" sz="1193" dirty="0">
-                <a:solidFill>
-                  <a:srgbClr val="55606B"/>
-                </a:solidFill>
-                <a:latin typeface="Arial" pitchFamily="34" charset="0"/>
-                <a:ea typeface="Arial" pitchFamily="34" charset="-122"/>
-                <a:cs typeface="Arial" pitchFamily="34" charset="-120"/>
-              </a:rPr>
-              <a:t>Vuelos retrasados (izquierda) y cancelados (derecha) por mes y año.</a:t>
-            </a:r>
-            <a:endParaRPr lang="en-US" sz="1193" dirty="0"/>
-          </a:p>
-        </p:txBody>
-      </p:sp>
-      <p:sp>
-        <p:nvSpPr>
-          <p:cNvPr id="7" name="Shape 4"/>
-          <p:cNvSpPr/>
-          <p:nvPr/>
-        </p:nvSpPr>
-        <p:spPr>
-          <a:xfrm>
-            <a:off x="6835775" y="1878211"/>
-            <a:ext cx="4540250" cy="1187450"/>
-          </a:xfrm>
-          <a:prstGeom prst="roundRect">
-            <a:avLst>
-              <a:gd name="adj" fmla="val 8289"/>
-            </a:avLst>
-          </a:prstGeom>
-          <a:solidFill>
-            <a:srgbClr val="FBFAF6"/>
-          </a:solidFill>
-          <a:ln w="6350">
-            <a:solidFill>
-              <a:srgbClr val="DAD6C8"/>
-            </a:solidFill>
-            <a:prstDash val="solid"/>
-          </a:ln>
-        </p:spPr>
-        <p:txBody>
-          <a:bodyPr/>
-          <a:lstStyle/>
-          <a:p>
-            <a:endParaRPr lang="es-CO"/>
-          </a:p>
-        </p:txBody>
-      </p:sp>
-      <p:sp>
-        <p:nvSpPr>
-          <p:cNvPr id="8" name="Text 5"/>
-          <p:cNvSpPr/>
-          <p:nvPr/>
-        </p:nvSpPr>
-        <p:spPr>
-          <a:xfrm>
-            <a:off x="6991350" y="2033786"/>
-            <a:ext cx="4355973" cy="444500"/>
-          </a:xfrm>
-          <a:prstGeom prst="rect">
-            <a:avLst/>
-          </a:prstGeom>
-          <a:noFill/>
-          <a:ln/>
-        </p:spPr>
-        <p:txBody>
-          <a:bodyPr wrap="square" lIns="0" tIns="0" rIns="0" bIns="0" rtlCol="0" anchor="t">
-            <a:normAutofit/>
-          </a:bodyPr>
-          <a:lstStyle/>
-          <a:p>
-            <a:pPr marL="0" indent="0" algn="l">
-              <a:lnSpc>
-                <a:spcPts val="3300"/>
-              </a:lnSpc>
-              <a:buNone/>
-            </a:pPr>
-            <a:r>
-              <a:rPr lang="en-US" sz="3000" b="1" dirty="0">
-                <a:solidFill>
-                  <a:srgbClr val="176B7B"/>
-                </a:solidFill>
-                <a:latin typeface="Arial" pitchFamily="34" charset="0"/>
-                <a:ea typeface="Arial" pitchFamily="34" charset="-122"/>
-                <a:cs typeface="Arial" pitchFamily="34" charset="-120"/>
-              </a:rPr>
-              <a:t>10,0 %</a:t>
-            </a:r>
-            <a:endParaRPr lang="en-US" sz="3000" dirty="0"/>
-          </a:p>
-        </p:txBody>
-      </p:sp>
-      <p:sp>
-        <p:nvSpPr>
-          <p:cNvPr id="9" name="Text 6"/>
-          <p:cNvSpPr/>
-          <p:nvPr/>
-        </p:nvSpPr>
-        <p:spPr>
-          <a:xfrm>
-            <a:off x="6991350" y="2490986"/>
-            <a:ext cx="4355973" cy="444500"/>
-          </a:xfrm>
-          <a:prstGeom prst="rect">
-            <a:avLst/>
-          </a:prstGeom>
-          <a:noFill/>
-          <a:ln/>
-        </p:spPr>
-        <p:txBody>
-          <a:bodyPr wrap="square" lIns="0" tIns="0" rIns="0" bIns="0" rtlCol="0" anchor="t">
-            <a:normAutofit/>
-          </a:bodyPr>
-          <a:lstStyle/>
-          <a:p>
-            <a:pPr marL="0" indent="0" algn="l">
-              <a:lnSpc>
-                <a:spcPts val="1690"/>
-              </a:lnSpc>
-              <a:buNone/>
-            </a:pPr>
-            <a:r>
-              <a:rPr lang="en-US" sz="1300" dirty="0">
-                <a:solidFill>
-                  <a:srgbClr val="55606B"/>
-                </a:solidFill>
-                <a:latin typeface="Arial" pitchFamily="34" charset="0"/>
-                <a:ea typeface="Arial" pitchFamily="34" charset="-122"/>
-                <a:cs typeface="Arial" pitchFamily="34" charset="-120"/>
-              </a:rPr>
-              <a:t>2020: periodo pandémico para EDA; excluido del entrenamiento y de la evaluación.</a:t>
-            </a:r>
-            <a:endParaRPr lang="en-US" sz="1300" dirty="0"/>
-          </a:p>
-        </p:txBody>
-      </p:sp>
-      <p:sp>
-        <p:nvSpPr>
-          <p:cNvPr id="10" name="Shape 7"/>
-          <p:cNvSpPr/>
-          <p:nvPr/>
-        </p:nvSpPr>
-        <p:spPr>
-          <a:xfrm>
-            <a:off x="6832600" y="3195836"/>
-            <a:ext cx="4546600" cy="971550"/>
-          </a:xfrm>
-          <a:prstGeom prst="roundRect">
-            <a:avLst>
-              <a:gd name="adj" fmla="val 10458"/>
-            </a:avLst>
-          </a:prstGeom>
-          <a:solidFill>
-            <a:srgbClr val="13243B"/>
-          </a:solidFill>
-          <a:ln/>
-        </p:spPr>
-        <p:txBody>
-          <a:bodyPr/>
-          <a:lstStyle/>
-          <a:p>
-            <a:endParaRPr lang="es-CO"/>
-          </a:p>
-        </p:txBody>
-      </p:sp>
-      <p:sp>
-        <p:nvSpPr>
-          <p:cNvPr id="11" name="Text 8"/>
-          <p:cNvSpPr/>
-          <p:nvPr/>
-        </p:nvSpPr>
-        <p:spPr>
-          <a:xfrm>
-            <a:off x="6985000" y="3348236"/>
-            <a:ext cx="4369054" cy="444500"/>
-          </a:xfrm>
-          <a:prstGeom prst="rect">
-            <a:avLst/>
-          </a:prstGeom>
-          <a:noFill/>
-          <a:ln/>
-        </p:spPr>
-        <p:txBody>
-          <a:bodyPr wrap="square" lIns="0" tIns="0" rIns="0" bIns="0" rtlCol="0" anchor="t">
-            <a:normAutofit/>
-          </a:bodyPr>
-          <a:lstStyle/>
-          <a:p>
-            <a:pPr marL="0" indent="0" algn="l">
-              <a:lnSpc>
-                <a:spcPts val="3300"/>
-              </a:lnSpc>
-              <a:buNone/>
-            </a:pPr>
-            <a:r>
-              <a:rPr lang="en-US" sz="3000" b="1" dirty="0">
-                <a:solidFill>
-                  <a:srgbClr val="E9A23B"/>
-                </a:solidFill>
-                <a:latin typeface="Arial" pitchFamily="34" charset="0"/>
-                <a:ea typeface="Arial" pitchFamily="34" charset="-122"/>
-                <a:cs typeface="Arial" pitchFamily="34" charset="-120"/>
-              </a:rPr>
-              <a:t>21,6 %</a:t>
-            </a:r>
-            <a:endParaRPr lang="en-US" sz="3000" dirty="0"/>
-          </a:p>
-        </p:txBody>
-      </p:sp>
-      <p:sp>
-        <p:nvSpPr>
-          <p:cNvPr id="12" name="Text 9"/>
-          <p:cNvSpPr/>
-          <p:nvPr/>
-        </p:nvSpPr>
-        <p:spPr>
-          <a:xfrm>
-            <a:off x="6985000" y="3805436"/>
-            <a:ext cx="4369054" cy="234950"/>
-          </a:xfrm>
-          <a:prstGeom prst="rect">
-            <a:avLst/>
-          </a:prstGeom>
-          <a:noFill/>
-          <a:ln/>
-        </p:spPr>
-        <p:txBody>
-          <a:bodyPr wrap="square" lIns="0" tIns="0" rIns="0" bIns="0" rtlCol="0" anchor="t">
-            <a:normAutofit/>
-          </a:bodyPr>
-          <a:lstStyle/>
-          <a:p>
-            <a:pPr marL="0" indent="0" algn="l">
-              <a:lnSpc>
-                <a:spcPts val="1690"/>
-              </a:lnSpc>
-              <a:buNone/>
-            </a:pPr>
-            <a:r>
-              <a:rPr lang="en-US" sz="1300" dirty="0">
-                <a:solidFill>
-                  <a:srgbClr val="B8C4D2"/>
-                </a:solidFill>
-                <a:latin typeface="Arial" pitchFamily="34" charset="0"/>
-                <a:ea typeface="Arial" pitchFamily="34" charset="-122"/>
-                <a:cs typeface="Arial" pitchFamily="34" charset="-120"/>
-              </a:rPr>
-              <a:t>en enero–julio de 2022, el valor más alto de la serie</a:t>
-            </a:r>
-            <a:endParaRPr lang="en-US" sz="1300" dirty="0"/>
-          </a:p>
-        </p:txBody>
-      </p:sp>
-      <p:sp>
-        <p:nvSpPr>
-          <p:cNvPr id="13" name="Text 10"/>
-          <p:cNvSpPr/>
-          <p:nvPr/>
-        </p:nvSpPr>
-        <p:spPr>
-          <a:xfrm>
-            <a:off x="812800" y="4501852"/>
-            <a:ext cx="10883392" cy="287734"/>
-          </a:xfrm>
-          <a:prstGeom prst="rect">
-            <a:avLst/>
-          </a:prstGeom>
-          <a:noFill/>
-          <a:ln/>
-        </p:spPr>
-        <p:txBody>
-          <a:bodyPr wrap="square" lIns="0" tIns="0" rIns="0" bIns="0" rtlCol="0" anchor="t">
-            <a:normAutofit/>
-          </a:bodyPr>
-          <a:lstStyle/>
-          <a:p>
-            <a:pPr marL="0" indent="0" algn="l">
-              <a:lnSpc>
-                <a:spcPts val="2093"/>
-              </a:lnSpc>
-              <a:buNone/>
-            </a:pPr>
-            <a:r>
-              <a:rPr lang="en-US" sz="1495" b="1" dirty="0">
-                <a:solidFill>
-                  <a:srgbClr val="55606B"/>
-                </a:solidFill>
-                <a:latin typeface="Arial" pitchFamily="34" charset="0"/>
-                <a:ea typeface="Arial" pitchFamily="34" charset="-122"/>
-                <a:cs typeface="Arial" pitchFamily="34" charset="-120"/>
-              </a:rPr>
-              <a:t>Ventanas de modelado sin usar datos de 2020</a:t>
-            </a:r>
-            <a:endParaRPr lang="en-US" sz="1495" dirty="0"/>
-          </a:p>
-        </p:txBody>
-      </p:sp>
-      <p:sp>
-        <p:nvSpPr>
-          <p:cNvPr id="14" name="Shape 11"/>
-          <p:cNvSpPr/>
-          <p:nvPr/>
-        </p:nvSpPr>
-        <p:spPr>
-          <a:xfrm>
-            <a:off x="815975" y="4970562"/>
-            <a:ext cx="2346325" cy="868164"/>
-          </a:xfrm>
-          <a:prstGeom prst="roundRect">
-            <a:avLst>
-              <a:gd name="adj" fmla="val 11337"/>
-            </a:avLst>
-          </a:prstGeom>
-          <a:solidFill>
-            <a:srgbClr val="FBFAF6"/>
-          </a:solidFill>
-          <a:ln w="6350">
-            <a:solidFill>
-              <a:srgbClr val="DAD6C8"/>
-            </a:solidFill>
-            <a:prstDash val="solid"/>
-          </a:ln>
-        </p:spPr>
-        <p:txBody>
-          <a:bodyPr/>
-          <a:lstStyle/>
-          <a:p>
-            <a:endParaRPr lang="es-CO"/>
-          </a:p>
-        </p:txBody>
-      </p:sp>
-      <p:sp>
-        <p:nvSpPr>
-          <p:cNvPr id="15" name="Text 12"/>
-          <p:cNvSpPr/>
-          <p:nvPr/>
-        </p:nvSpPr>
-        <p:spPr>
-          <a:xfrm>
-            <a:off x="971550" y="5100737"/>
-            <a:ext cx="2096230" cy="229890"/>
-          </a:xfrm>
-          <a:prstGeom prst="rect">
-            <a:avLst/>
-          </a:prstGeom>
-          <a:noFill/>
-          <a:ln/>
-        </p:spPr>
-        <p:txBody>
-          <a:bodyPr wrap="square" lIns="0" tIns="0" rIns="0" bIns="0" rtlCol="0" anchor="t">
-            <a:normAutofit/>
-          </a:bodyPr>
-          <a:lstStyle/>
-          <a:p>
-            <a:pPr marL="0" indent="0" algn="l">
-              <a:lnSpc>
-                <a:spcPts val="1648"/>
-              </a:lnSpc>
-              <a:buNone/>
-            </a:pPr>
-            <a:r>
-              <a:rPr lang="en-US" sz="1177" b="1" dirty="0">
-                <a:solidFill>
-                  <a:srgbClr val="176B7B"/>
-                </a:solidFill>
-                <a:latin typeface="Arial" pitchFamily="34" charset="0"/>
-                <a:ea typeface="Arial" pitchFamily="34" charset="-122"/>
-                <a:cs typeface="Arial" pitchFamily="34" charset="-120"/>
-              </a:rPr>
-              <a:t>Logística · 2019</a:t>
-            </a:r>
-            <a:endParaRPr lang="en-US" sz="1177" dirty="0"/>
-          </a:p>
-        </p:txBody>
-      </p:sp>
-      <p:sp>
-        <p:nvSpPr>
-          <p:cNvPr id="16" name="Text 13"/>
-          <p:cNvSpPr/>
-          <p:nvPr/>
-        </p:nvSpPr>
-        <p:spPr>
-          <a:xfrm>
-            <a:off x="971550" y="5330627"/>
-            <a:ext cx="2096230" cy="403324"/>
-          </a:xfrm>
-          <a:prstGeom prst="rect">
-            <a:avLst/>
-          </a:prstGeom>
-          <a:noFill/>
-          <a:ln/>
-        </p:spPr>
-        <p:txBody>
-          <a:bodyPr wrap="square" lIns="0" tIns="0" rIns="0" bIns="0" rtlCol="0" anchor="t">
-            <a:normAutofit/>
-          </a:bodyPr>
-          <a:lstStyle/>
-          <a:p>
-            <a:pPr marL="0" indent="0" algn="l">
-              <a:lnSpc>
-                <a:spcPts val="3042"/>
-              </a:lnSpc>
-              <a:buNone/>
-            </a:pPr>
-            <a:r>
-              <a:rPr lang="en-US" sz="2173" b="1" dirty="0">
-                <a:solidFill>
-                  <a:srgbClr val="16222F"/>
-                </a:solidFill>
-                <a:latin typeface="Arial" pitchFamily="34" charset="0"/>
-                <a:ea typeface="Arial" pitchFamily="34" charset="-122"/>
-                <a:cs typeface="Arial" pitchFamily="34" charset="-120"/>
-              </a:rPr>
-              <a:t>Muestra 400.000</a:t>
-            </a:r>
-            <a:endParaRPr lang="en-US" sz="2173" dirty="0"/>
-          </a:p>
-        </p:txBody>
-      </p:sp>
-      <p:pic>
-        <p:nvPicPr>
-          <p:cNvPr id="17" name="Image 1" descr="arrow-right"/>
-          <p:cNvPicPr>
-            <a:picLocks noChangeAspect="1"/>
-          </p:cNvPicPr>
-          <p:nvPr/>
-        </p:nvPicPr>
-        <p:blipFill>
-          <a:blip r:embed="rId4"/>
-          <a:srcRect/>
-          <a:stretch/>
-        </p:blipFill>
-        <p:spPr>
-          <a:xfrm>
-            <a:off x="3267075" y="5303044"/>
-            <a:ext cx="304800" cy="203200"/>
-          </a:xfrm>
-          <a:prstGeom prst="rect">
-            <a:avLst/>
-          </a:prstGeom>
-        </p:spPr>
-      </p:pic>
-      <p:sp>
-        <p:nvSpPr>
-          <p:cNvPr id="18" name="Shape 14"/>
-          <p:cNvSpPr/>
-          <p:nvPr/>
-        </p:nvSpPr>
-        <p:spPr>
-          <a:xfrm>
-            <a:off x="3676650" y="4970562"/>
-            <a:ext cx="2346325" cy="868164"/>
-          </a:xfrm>
-          <a:prstGeom prst="roundRect">
-            <a:avLst>
-              <a:gd name="adj" fmla="val 11337"/>
-            </a:avLst>
-          </a:prstGeom>
-          <a:solidFill>
-            <a:srgbClr val="FBFAF6"/>
-          </a:solidFill>
-          <a:ln w="6350">
-            <a:solidFill>
-              <a:srgbClr val="DAD6C8"/>
-            </a:solidFill>
-            <a:prstDash val="solid"/>
-          </a:ln>
-        </p:spPr>
-        <p:txBody>
-          <a:bodyPr/>
-          <a:lstStyle/>
-          <a:p>
-            <a:endParaRPr lang="es-CO"/>
-          </a:p>
-        </p:txBody>
-      </p:sp>
-      <p:sp>
-        <p:nvSpPr>
-          <p:cNvPr id="19" name="Text 15"/>
-          <p:cNvSpPr/>
-          <p:nvPr/>
-        </p:nvSpPr>
-        <p:spPr>
-          <a:xfrm>
-            <a:off x="3832225" y="5100737"/>
-            <a:ext cx="2096230" cy="229890"/>
-          </a:xfrm>
-          <a:prstGeom prst="rect">
-            <a:avLst/>
-          </a:prstGeom>
-          <a:noFill/>
-          <a:ln/>
-        </p:spPr>
-        <p:txBody>
-          <a:bodyPr wrap="square" lIns="0" tIns="0" rIns="0" bIns="0" rtlCol="0" anchor="t">
-            <a:normAutofit/>
-          </a:bodyPr>
-          <a:lstStyle/>
-          <a:p>
-            <a:pPr marL="0" indent="0" algn="l">
-              <a:lnSpc>
-                <a:spcPts val="1648"/>
-              </a:lnSpc>
-              <a:buNone/>
-            </a:pPr>
-            <a:r>
-              <a:rPr lang="en-US" sz="1177" b="1" dirty="0">
-                <a:solidFill>
-                  <a:srgbClr val="176B7B"/>
-                </a:solidFill>
-                <a:latin typeface="Arial" pitchFamily="34" charset="0"/>
-                <a:ea typeface="Arial" pitchFamily="34" charset="-122"/>
-                <a:cs typeface="Arial" pitchFamily="34" charset="-120"/>
-              </a:rPr>
-              <a:t>Boosting · 2021</a:t>
-            </a:r>
-            <a:endParaRPr lang="en-US" sz="1177" dirty="0"/>
-          </a:p>
-        </p:txBody>
-      </p:sp>
-      <p:sp>
-        <p:nvSpPr>
-          <p:cNvPr id="20" name="Text 16"/>
-          <p:cNvSpPr/>
-          <p:nvPr/>
-        </p:nvSpPr>
-        <p:spPr>
-          <a:xfrm>
-            <a:off x="3832225" y="5330627"/>
-            <a:ext cx="2096230" cy="403324"/>
-          </a:xfrm>
-          <a:prstGeom prst="rect">
-            <a:avLst/>
-          </a:prstGeom>
-          <a:noFill/>
-          <a:ln/>
-        </p:spPr>
-        <p:txBody>
-          <a:bodyPr wrap="square" lIns="0" tIns="0" rIns="0" bIns="0" rtlCol="0" anchor="t">
-            <a:normAutofit/>
-          </a:bodyPr>
-          <a:lstStyle/>
-          <a:p>
-            <a:pPr marL="0" indent="0" algn="l">
-              <a:lnSpc>
-                <a:spcPts val="3042"/>
-              </a:lnSpc>
-              <a:buNone/>
-            </a:pPr>
-            <a:r>
-              <a:rPr lang="en-US" sz="2173" b="1" dirty="0">
-                <a:solidFill>
-                  <a:srgbClr val="16222F"/>
-                </a:solidFill>
-                <a:latin typeface="Arial" pitchFamily="34" charset="0"/>
-                <a:ea typeface="Arial" pitchFamily="34" charset="-122"/>
-                <a:cs typeface="Arial" pitchFamily="34" charset="-120"/>
-              </a:rPr>
-              <a:t>Muestra 1 millón</a:t>
-            </a:r>
-            <a:endParaRPr lang="en-US" sz="2173" dirty="0"/>
-          </a:p>
-        </p:txBody>
-      </p:sp>
-      <p:pic>
-        <p:nvPicPr>
-          <p:cNvPr id="21" name="Image 2" descr="arrow-right"/>
-          <p:cNvPicPr>
-            <a:picLocks noChangeAspect="1"/>
-          </p:cNvPicPr>
-          <p:nvPr/>
-        </p:nvPicPr>
-        <p:blipFill>
-          <a:blip r:embed="rId4"/>
-          <a:srcRect/>
-          <a:stretch/>
-        </p:blipFill>
-        <p:spPr>
-          <a:xfrm>
-            <a:off x="6127750" y="5303044"/>
-            <a:ext cx="304800" cy="203200"/>
-          </a:xfrm>
-          <a:prstGeom prst="rect">
-            <a:avLst/>
-          </a:prstGeom>
-        </p:spPr>
-      </p:pic>
-      <p:sp>
-        <p:nvSpPr>
-          <p:cNvPr id="22" name="Shape 17"/>
-          <p:cNvSpPr/>
-          <p:nvPr/>
-        </p:nvSpPr>
-        <p:spPr>
-          <a:xfrm>
-            <a:off x="6537325" y="4970562"/>
-            <a:ext cx="2346325" cy="868164"/>
-          </a:xfrm>
-          <a:prstGeom prst="roundRect">
-            <a:avLst>
-              <a:gd name="adj" fmla="val 11337"/>
-            </a:avLst>
-          </a:prstGeom>
-          <a:solidFill>
-            <a:srgbClr val="FBFAF6"/>
-          </a:solidFill>
-          <a:ln w="6350">
-            <a:solidFill>
-              <a:srgbClr val="DAD6C8"/>
-            </a:solidFill>
-            <a:prstDash val="solid"/>
-          </a:ln>
-        </p:spPr>
-        <p:txBody>
-          <a:bodyPr/>
-          <a:lstStyle/>
-          <a:p>
-            <a:endParaRPr lang="es-CO"/>
-          </a:p>
-        </p:txBody>
-      </p:sp>
-      <p:sp>
-        <p:nvSpPr>
-          <p:cNvPr id="23" name="Text 18"/>
-          <p:cNvSpPr/>
-          <p:nvPr/>
-        </p:nvSpPr>
-        <p:spPr>
-          <a:xfrm>
-            <a:off x="6692900" y="5100737"/>
-            <a:ext cx="2096230" cy="229890"/>
-          </a:xfrm>
-          <a:prstGeom prst="rect">
-            <a:avLst/>
-          </a:prstGeom>
-          <a:noFill/>
-          <a:ln/>
-        </p:spPr>
-        <p:txBody>
-          <a:bodyPr wrap="square" lIns="0" tIns="0" rIns="0" bIns="0" rtlCol="0" anchor="t">
-            <a:normAutofit/>
-          </a:bodyPr>
-          <a:lstStyle/>
-          <a:p>
-            <a:pPr marL="0" indent="0" algn="l">
-              <a:lnSpc>
-                <a:spcPts val="1648"/>
-              </a:lnSpc>
-              <a:buNone/>
-            </a:pPr>
-            <a:r>
-              <a:rPr lang="en-US" sz="1177" b="1" dirty="0">
-                <a:solidFill>
-                  <a:srgbClr val="176B7B"/>
-                </a:solidFill>
-                <a:latin typeface="Arial" pitchFamily="34" charset="0"/>
-                <a:ea typeface="Arial" pitchFamily="34" charset="-122"/>
-                <a:cs typeface="Arial" pitchFamily="34" charset="-120"/>
-              </a:rPr>
-              <a:t>Evaluación · 2022</a:t>
-            </a:r>
-            <a:endParaRPr lang="en-US" sz="1177" dirty="0"/>
-          </a:p>
-        </p:txBody>
-      </p:sp>
-      <p:sp>
-        <p:nvSpPr>
-          <p:cNvPr id="24" name="Text 19"/>
-          <p:cNvSpPr/>
-          <p:nvPr/>
-        </p:nvSpPr>
-        <p:spPr>
-          <a:xfrm>
-            <a:off x="6692900" y="5330627"/>
-            <a:ext cx="2096230" cy="403324"/>
-          </a:xfrm>
-          <a:prstGeom prst="rect">
-            <a:avLst/>
-          </a:prstGeom>
-          <a:noFill/>
-          <a:ln/>
-        </p:spPr>
-        <p:txBody>
-          <a:bodyPr wrap="square" lIns="0" tIns="0" rIns="0" bIns="0" rtlCol="0" anchor="t">
-            <a:normAutofit/>
-          </a:bodyPr>
-          <a:lstStyle/>
-          <a:p>
-            <a:pPr marL="0" indent="0" algn="l">
-              <a:lnSpc>
-                <a:spcPts val="3042"/>
-              </a:lnSpc>
-              <a:buNone/>
-            </a:pPr>
-            <a:r>
-              <a:rPr lang="en-US" sz="2173" b="1" dirty="0">
-                <a:solidFill>
-                  <a:srgbClr val="16222F"/>
-                </a:solidFill>
-                <a:latin typeface="Arial" pitchFamily="34" charset="0"/>
-                <a:ea typeface="Arial" pitchFamily="34" charset="-122"/>
-                <a:cs typeface="Arial" pitchFamily="34" charset="-120"/>
-              </a:rPr>
-              <a:t>Ene–jul; no independiente</a:t>
-            </a:r>
-            <a:endParaRPr lang="en-US" sz="2173" dirty="0"/>
-          </a:p>
-        </p:txBody>
-      </p:sp>
-      <p:sp>
-        <p:nvSpPr>
-          <p:cNvPr id="25" name="Text 20"/>
-          <p:cNvSpPr/>
-          <p:nvPr/>
-        </p:nvSpPr>
-        <p:spPr>
-          <a:xfrm>
-            <a:off x="8988425" y="4967387"/>
-            <a:ext cx="2390775" cy="874514"/>
-          </a:xfrm>
-          <a:prstGeom prst="roundRect">
-            <a:avLst>
-              <a:gd name="adj" fmla="val 11618"/>
-            </a:avLst>
-          </a:prstGeom>
-          <a:solidFill>
-            <a:srgbClr val="E9A23B"/>
-          </a:solidFill>
-          <a:ln/>
-        </p:spPr>
-        <p:txBody>
-          <a:bodyPr wrap="square" lIns="148042" tIns="97242" rIns="86987" bIns="71842" rtlCol="0" anchor="t">
-            <a:normAutofit/>
-          </a:bodyPr>
-          <a:lstStyle/>
-          <a:p>
-            <a:pPr marL="0" indent="0" algn="l">
-              <a:lnSpc>
-                <a:spcPts val="1750"/>
-              </a:lnSpc>
-              <a:buNone/>
-            </a:pPr>
-            <a:r>
-              <a:rPr lang="en-US" sz="1400" b="1" dirty="0">
-                <a:solidFill>
-                  <a:srgbClr val="13243B"/>
-                </a:solidFill>
-                <a:latin typeface="Arial" pitchFamily="34" charset="0"/>
-                <a:ea typeface="Arial" pitchFamily="34" charset="-122"/>
-                <a:cs typeface="Arial" pitchFamily="34" charset="-120"/>
-              </a:rPr>
-              <a:t>2021: ene–sep entrenamiento; oct–dic validación. Evaluación 2022 no independiente.</a:t>
-            </a:r>
-            <a:endParaRPr lang="en-US" sz="1400" dirty="0"/>
-          </a:p>
-        </p:txBody>
-      </p:sp>
-      <p:sp>
-        <p:nvSpPr>
-          <p:cNvPr id="26" name="Text 21"/>
-          <p:cNvSpPr/>
-          <p:nvPr/>
-        </p:nvSpPr>
-        <p:spPr>
-          <a:xfrm>
-            <a:off x="812800" y="6242050"/>
-            <a:ext cx="8502650" cy="234950"/>
-          </a:xfrm>
-          <a:prstGeom prst="rect">
-            <a:avLst/>
-          </a:prstGeom>
-          <a:noFill/>
-          <a:ln/>
-        </p:spPr>
-        <p:txBody>
-          <a:bodyPr wrap="square" lIns="0" tIns="0" rIns="0" bIns="0" rtlCol="0" anchor="t">
-            <a:normAutofit/>
-          </a:bodyPr>
-          <a:lstStyle/>
-          <a:p>
-            <a:pPr marL="0" indent="0" algn="l">
-              <a:lnSpc>
-                <a:spcPts val="1680"/>
-              </a:lnSpc>
-              <a:buNone/>
-            </a:pPr>
-            <a:r>
-              <a:rPr lang="en-US" sz="1200" dirty="0">
-                <a:solidFill>
-                  <a:srgbClr val="55606B"/>
-                </a:solidFill>
-                <a:latin typeface="Arial" pitchFamily="34" charset="0"/>
-                <a:ea typeface="Arial" pitchFamily="34" charset="-122"/>
-                <a:cs typeface="Arial" pitchFamily="34" charset="-120"/>
-              </a:rPr>
-              <a:t>Fuente: EDA del notebook integrado, secciones 2.8 a 2.13, y separación temporal · Descriptivo, sin causalidad</a:t>
-            </a:r>
-            <a:endParaRPr lang="en-US" sz="1200" dirty="0"/>
-          </a:p>
-        </p:txBody>
-      </p:sp>
-      <p:sp>
-        <p:nvSpPr>
-          <p:cNvPr id="27" name="Text 22"/>
-          <p:cNvSpPr/>
-          <p:nvPr/>
-        </p:nvSpPr>
-        <p:spPr>
-          <a:xfrm>
-            <a:off x="10058400" y="6242050"/>
-            <a:ext cx="1320800" cy="234950"/>
-          </a:xfrm>
-          <a:prstGeom prst="rect">
-            <a:avLst/>
-          </a:prstGeom>
-          <a:noFill/>
-          <a:ln/>
-        </p:spPr>
-        <p:txBody>
-          <a:bodyPr wrap="square" lIns="0" tIns="0" rIns="0" bIns="0" rtlCol="0" anchor="t">
-            <a:normAutofit/>
-          </a:bodyPr>
-          <a:lstStyle/>
-          <a:p>
-            <a:pPr marL="0" indent="0" algn="r">
-              <a:lnSpc>
-                <a:spcPts val="1680"/>
-              </a:lnSpc>
-              <a:buNone/>
-            </a:pPr>
-            <a:r>
-              <a:rPr lang="en-US" sz="1200" dirty="0">
-                <a:solidFill>
-                  <a:srgbClr val="55606B"/>
-                </a:solidFill>
-                <a:latin typeface="Arial" pitchFamily="34" charset="0"/>
-                <a:ea typeface="Arial" pitchFamily="34" charset="-122"/>
-                <a:cs typeface="Arial" pitchFamily="34" charset="-120"/>
-              </a:rPr>
-              <a:t>5</a:t>
-            </a:r>
-            <a:endParaRPr lang="en-US" sz="1200" dirty="0"/>
-          </a:p>
-        </p:txBody>
-      </p:sp>
-    </p:spTree>
-  </p:cSld>
-  <p:clrMapOvr>
-    <a:masterClrMapping/>
-  </p:clrMapOvr>
-</p:sld>
+<ns0:sld xmlns:ns0="http://schemas.openxmlformats.org/presentationml/2006/main" xmlns:ns1="http://schemas.openxmlformats.org/drawingml/2006/main" xmlns:ns2="http://schemas.openxmlformats.org/officeDocument/2006/relationships">
+  <ns0:cSld name="Slide 5">
+    <ns0:bg>
+      <ns0:bgPr>
+        <ns1:solidFill>
+          <ns1:srgbClr val="F5F3EC"/>
+        </ns1:solidFill>
+        <ns1:effectLst/>
+      </ns0:bgPr>
+    </ns0:bg>
+    <ns0:spTree>
+      <ns0:nvGrpSpPr>
+        <ns0:cNvPr id="1" name=""/>
+        <ns0:cNvGrpSpPr/>
+        <ns0:nvPr/>
+      </ns0:nvGrpSpPr>
+      <ns0:grpSpPr>
+        <ns1:xfrm>
+          <ns1:off x="0" y="0"/>
+          <ns1:ext cx="0" cy="0"/>
+          <ns1:chOff x="0" y="0"/>
+          <ns1:chExt cx="0" cy="0"/>
+        </ns1:xfrm>
+      </ns0:grpSpPr>
+      <ns0:sp>
+        <ns0:nvSpPr>
+          <ns0:cNvPr id="2" name="Text 0"/>
+          <ns0:cNvSpPr/>
+          <ns0:nvPr/>
+        </ns0:nvSpPr>
+        <ns0:spPr>
+          <ns1:xfrm>
+            <ns1:off x="812800" y="812800"/>
+            <ns1:ext cx="10883392" cy="268982"/>
+          </ns1:xfrm>
+          <ns1:prstGeom prst="rect">
+            <ns1:avLst/>
+          </ns1:prstGeom>
+          <ns1:noFill/>
+          <ns1:ln/>
+        </ns0:spPr>
+        <ns0:txBody>
+          <ns1:bodyPr wrap="square" lIns="0" tIns="0" rIns="0" bIns="0" rtlCol="0" anchor="t">
+            <ns1:normAutofit/>
+          </ns1:bodyPr>
+          <ns1:lstStyle/>
+          <ns1:p>
+            <ns1:pPr marL="0" indent="0" algn="l">
+              <ns1:lnSpc>
+                <ns1:spcPts val="1948"/>
+              </ns1:lnSpc>
+              <ns1:buNone/>
+            </ns1:pPr>
+            <ns1:r>
+              <ns1:rPr lang="en-US" sz="1391" b="1" kern="0" spc="100" dirty="0">
+                <ns1:solidFill>
+                  <ns1:srgbClr val="176B7B"/>
+                </ns1:solidFill>
+                <ns1:latin typeface="Arial" pitchFamily="34" charset="0"/>
+                <ns1:ea typeface="Arial" pitchFamily="34" charset="-122"/>
+                <ns1:cs typeface="Arial" pitchFamily="34" charset="-120"/>
+              </ns1:rPr>
+              <ns1:t>3 · LO QUE APRENDIMOS · HALLAZGO 2</ns1:t>
+            </ns1:r>
+            <ns1:endParaRPr lang="en-US" sz="1391" dirty="0"/>
+          </ns1:p>
+        </ns0:txBody>
+      </ns0:sp>
+      <ns0:sp>
+        <ns0:nvSpPr>
+          <ns0:cNvPr id="3" name="Text 1"/>
+          <ns0:cNvSpPr>
+            <ns1:spLocks noGrp="1"/>
+          </ns0:cNvSpPr>
+          <ns0:nvPr>
+            <ns0:ph type="title"/>
+          </ns0:nvPr>
+        </ns0:nvSpPr>
+        <ns0:spPr>
+          <ns1:xfrm>
+            <ns1:off x="812800" y="1259582"/>
+            <ns1:ext cx="10883392" cy="437654"/>
+          </ns1:xfrm>
+          <ns1:prstGeom prst="rect">
+            <ns1:avLst/>
+          </ns1:prstGeom>
+          <ns1:noFill/>
+          <ns1:ln/>
+        </ns0:spPr>
+        <ns0:txBody>
+          <ns1:bodyPr wrap="square" lIns="0" tIns="0" rIns="0" bIns="0" rtlCol="0" anchor="t">
+            <ns1:normAutofit/>
+          </ns1:bodyPr>
+          <ns1:lstStyle/>
+          <ns1:p>
+            <ns1:pPr marL="0" indent="0" algn="l">
+              <ns1:lnSpc>
+                <ns1:spcPts val="3290"/>
+              </ns1:lnSpc>
+              <ns1:buNone/>
+            </ns1:pPr>
+            <ns1:r>
+              <ns1:rPr lang="en-US" sz="2991" b="1" i="0" dirty="0">
+                <ns1:solidFill>
+                  <ns1:srgbClr val="16222F"/>
+                </ns1:solidFill>
+                <ns1:latin typeface="Arial" pitchFamily="34" charset="0"/>
+                <ns1:ea typeface="Arial" pitchFamily="34" charset="-122"/>
+                <ns1:cs typeface="Arial" pitchFamily="34" charset="-120"/>
+              </ns1:rPr>
+              <ns1:t>2020 se excluye de todo análisis</ns1:t>
+            </ns1:r>
+            <ns1:endParaRPr lang="en-US" sz="2991" dirty="0"/>
+          </ns1:p>
+        </ns0:txBody>
+      </ns0:sp>
+      <ns0:sp>
+        <ns0:nvSpPr>
+          <ns0:cNvPr id="4" name="Shape 2"/>
+          <ns0:cNvSpPr/>
+          <ns0:nvPr/>
+        </ns0:nvSpPr>
+        <ns0:spPr>
+          <ns1:xfrm>
+            <ns1:off x="815975" y="1878211"/>
+            <ns1:ext cx="5708650" cy="2417266"/>
+          </ns1:xfrm>
+          <ns1:prstGeom prst="roundRect">
+            <ns1:avLst>
+              <ns1:gd name="adj" fmla="val 4072"/>
+            </ns1:avLst>
+          </ns1:prstGeom>
+          <ns1:solidFill>
+            <ns1:srgbClr val="FBFAF6"/>
+          </ns1:solidFill>
+          <ns1:ln w="6350">
+            <ns1:solidFill>
+              <ns1:srgbClr val="DAD6C8"/>
+            </ns1:solidFill>
+            <ns1:prstDash val="solid"/>
+          </ns1:ln>
+        </ns0:spPr>
+        <ns0:txBody>
+          <ns1:bodyPr/>
+          <ns1:lstStyle/>
+          <ns1:p>
+            <ns1:endParaRPr lang="es-CO"/>
+          </ns1:p>
+        </ns0:txBody>
+      </ns0:sp>
+      <ns0:sp>
+        <ns0:nvSpPr>
+          <ns0:cNvPr id="6" name="Text 3"/>
+          <ns0:cNvSpPr/>
+          <ns0:nvPr/>
+        </ns0:nvSpPr>
+        <ns0:spPr>
+          <ns1:xfrm>
+            <ns1:off x="946150" y="3972223"/>
+            <ns1:ext cx="5611749" cy="218480"/>
+          </ns1:xfrm>
+          <ns1:prstGeom prst="rect">
+            <ns1:avLst/>
+          </ns1:prstGeom>
+          <ns1:noFill/>
+          <ns1:ln/>
+        </ns0:spPr>
+        <ns0:txBody>
+          <ns1:bodyPr wrap="square" lIns="0" tIns="0" rIns="0" bIns="0" rtlCol="0" anchor="t">
+            <ns1:normAutofit/>
+          </ns1:bodyPr>
+          <ns1:lstStyle/>
+          <ns1:p>
+            <ns1:pPr marL="0" indent="0" algn="l">
+              <ns1:lnSpc>
+                <ns1:spcPts val="1550"/>
+              </ns1:lnSpc>
+              <ns1:buNone/>
+            </ns1:pPr>
+            <ns1:r>
+              <ns1:rPr lang="en-US" sz="1193" dirty="0">
+                <ns1:solidFill>
+                  <ns1:srgbClr val="55606B"/>
+                </ns1:solidFill>
+                <ns1:latin typeface="Arial" pitchFamily="34" charset="0"/>
+                <ns1:ea typeface="Arial" pitchFamily="34" charset="-122"/>
+                <ns1:cs typeface="Arial" pitchFamily="34" charset="-120"/>
+              </ns1:rPr>
+              <ns1:t>El gráfico comparativo anterior queda obsoleto; debe recalcularse sin 2020.</ns1:t>
+            </ns1:r>
+            <ns1:endParaRPr lang="en-US" sz="1193" dirty="0"/>
+          </ns1:p>
+        </ns0:txBody>
+      </ns0:sp>
+      <ns0:sp>
+        <ns0:nvSpPr>
+          <ns0:cNvPr id="7" name="Shape 4"/>
+          <ns0:cNvSpPr/>
+          <ns0:nvPr/>
+        </ns0:nvSpPr>
+        <ns0:spPr>
+          <ns1:xfrm>
+            <ns1:off x="6835775" y="1878211"/>
+            <ns1:ext cx="4540250" cy="1187450"/>
+          </ns1:xfrm>
+          <ns1:prstGeom prst="roundRect">
+            <ns1:avLst>
+              <ns1:gd name="adj" fmla="val 8289"/>
+            </ns1:avLst>
+          </ns1:prstGeom>
+          <ns1:solidFill>
+            <ns1:srgbClr val="FBFAF6"/>
+          </ns1:solidFill>
+          <ns1:ln w="6350">
+            <ns1:solidFill>
+              <ns1:srgbClr val="DAD6C8"/>
+            </ns1:solidFill>
+            <ns1:prstDash val="solid"/>
+          </ns1:ln>
+        </ns0:spPr>
+        <ns0:txBody>
+          <ns1:bodyPr/>
+          <ns1:lstStyle/>
+          <ns1:p>
+            <ns1:endParaRPr lang="es-CO"/>
+          </ns1:p>
+        </ns0:txBody>
+      </ns0:sp>
+      <ns0:sp>
+        <ns0:nvSpPr>
+          <ns0:cNvPr id="8" name="Text 5"/>
+          <ns0:cNvSpPr/>
+          <ns0:nvPr/>
+        </ns0:nvSpPr>
+        <ns0:spPr>
+          <ns1:xfrm>
+            <ns1:off x="6991350" y="2033786"/>
+            <ns1:ext cx="4355973" cy="444500"/>
+          </ns1:xfrm>
+          <ns1:prstGeom prst="rect">
+            <ns1:avLst/>
+          </ns1:prstGeom>
+          <ns1:noFill/>
+          <ns1:ln/>
+        </ns0:spPr>
+        <ns0:txBody>
+          <ns1:bodyPr wrap="square" lIns="0" tIns="0" rIns="0" bIns="0" rtlCol="0" anchor="t">
+            <ns1:normAutofit/>
+          </ns1:bodyPr>
+          <ns1:lstStyle/>
+          <ns1:p>
+            <ns1:pPr marL="0" indent="0" algn="l">
+              <ns1:lnSpc>
+                <ns1:spcPts val="3300"/>
+              </ns1:lnSpc>
+              <ns1:buNone/>
+            </ns1:pPr>
+            <ns1:r>
+              <ns1:rPr lang="en-US" sz="3000" b="1" dirty="0">
+                <ns1:solidFill>
+                  <ns1:srgbClr val="176B7B"/>
+                </ns1:solidFill>
+                <ns1:latin typeface="Arial" pitchFamily="34" charset="0"/>
+                <ns1:ea typeface="Arial" pitchFamily="34" charset="-122"/>
+                <ns1:cs typeface="Arial" pitchFamily="34" charset="-120"/>
+              </ns1:rPr>
+              <ns1:t>EXCLUIDO</ns1:t>
+            </ns1:r>
+            <ns1:endParaRPr lang="en-US" sz="3000" dirty="0"/>
+          </ns1:p>
+        </ns0:txBody>
+      </ns0:sp>
+      <ns0:sp>
+        <ns0:nvSpPr>
+          <ns0:cNvPr id="9" name="Text 6"/>
+          <ns0:cNvSpPr/>
+          <ns0:nvPr/>
+        </ns0:nvSpPr>
+        <ns0:spPr>
+          <ns1:xfrm>
+            <ns1:off x="6991350" y="2490986"/>
+            <ns1:ext cx="4355973" cy="444500"/>
+          </ns1:xfrm>
+          <ns1:prstGeom prst="rect">
+            <ns1:avLst/>
+          </ns1:prstGeom>
+          <ns1:noFill/>
+          <ns1:ln/>
+        </ns0:spPr>
+        <ns0:txBody>
+          <ns1:bodyPr wrap="square" lIns="0" tIns="0" rIns="0" bIns="0" rtlCol="0" anchor="t">
+            <ns1:normAutofit/>
+          </ns1:bodyPr>
+          <ns1:lstStyle/>
+          <ns1:p>
+            <ns1:pPr marL="0" indent="0" algn="l">
+              <ns1:lnSpc>
+                <ns1:spcPts val="1690"/>
+              </ns1:lnSpc>
+              <ns1:buNone/>
+            </ns1:pPr>
+            <ns1:r>
+              <ns1:rPr lang="en-US" sz="1300" dirty="0">
+                <ns1:solidFill>
+                  <ns1:srgbClr val="55606B"/>
+                </ns1:solidFill>
+                <ns1:latin typeface="Arial" pitchFamily="34" charset="0"/>
+                <ns1:ea typeface="Arial" pitchFamily="34" charset="-122"/>
+                <ns1:cs typeface="Arial" pitchFamily="34" charset="-120"/>
+              </ns1:rPr>
+              <ns1:t>No presentamos métricas ni conclusiones sobre 2020.</ns1:t>
+            </ns1:r>
+            <ns1:endParaRPr lang="en-US" sz="1300" dirty="0"/>
+          </ns1:p>
+        </ns0:txBody>
+      </ns0:sp>
+      <ns0:sp>
+        <ns0:nvSpPr>
+          <ns0:cNvPr id="10" name="Shape 7"/>
+          <ns0:cNvSpPr/>
+          <ns0:nvPr/>
+        </ns0:nvSpPr>
+        <ns0:spPr>
+          <ns1:xfrm>
+            <ns1:off x="6832600" y="3195836"/>
+            <ns1:ext cx="4546600" cy="971550"/>
+          </ns1:xfrm>
+          <ns1:prstGeom prst="roundRect">
+            <ns1:avLst>
+              <ns1:gd name="adj" fmla="val 10458"/>
+            </ns1:avLst>
+          </ns1:prstGeom>
+          <ns1:solidFill>
+            <ns1:srgbClr val="13243B"/>
+          </ns1:solidFill>
+          <ns1:ln/>
+        </ns0:spPr>
+        <ns0:txBody>
+          <ns1:bodyPr/>
+          <ns1:lstStyle/>
+          <ns1:p>
+            <ns1:endParaRPr lang="es-CO"/>
+          </ns1:p>
+        </ns0:txBody>
+      </ns0:sp>
+      <ns0:sp>
+        <ns0:nvSpPr>
+          <ns0:cNvPr id="11" name="Text 8"/>
+          <ns0:cNvSpPr/>
+          <ns0:nvPr/>
+        </ns0:nvSpPr>
+        <ns0:spPr>
+          <ns1:xfrm>
+            <ns1:off x="6985000" y="3348236"/>
+            <ns1:ext cx="4369054" cy="444500"/>
+          </ns1:xfrm>
+          <ns1:prstGeom prst="rect">
+            <ns1:avLst/>
+          </ns1:prstGeom>
+          <ns1:noFill/>
+          <ns1:ln/>
+        </ns0:spPr>
+        <ns0:txBody>
+          <ns1:bodyPr wrap="square" lIns="0" tIns="0" rIns="0" bIns="0" rtlCol="0" anchor="t">
+            <ns1:normAutofit/>
+          </ns1:bodyPr>
+          <ns1:lstStyle/>
+          <ns1:p>
+            <ns1:pPr marL="0" indent="0" algn="l">
+              <ns1:lnSpc>
+                <ns1:spcPts val="3300"/>
+              </ns1:lnSpc>
+              <ns1:buNone/>
+            </ns1:pPr>
+            <ns1:r>
+              <ns1:rPr lang="en-US" sz="3000" b="1" dirty="0">
+                <ns1:solidFill>
+                  <ns1:srgbClr val="E9A23B"/>
+                </ns1:solidFill>
+                <ns1:latin typeface="Arial" pitchFamily="34" charset="0"/>
+                <ns1:ea typeface="Arial" pitchFamily="34" charset="-122"/>
+                <ns1:cs typeface="Arial" pitchFamily="34" charset="-120"/>
+              </ns1:rPr>
+              <ns1:t>21,6 %</ns1:t>
+            </ns1:r>
+            <ns1:endParaRPr lang="en-US" sz="3000" dirty="0"/>
+          </ns1:p>
+        </ns0:txBody>
+      </ns0:sp>
+      <ns0:sp>
+        <ns0:nvSpPr>
+          <ns0:cNvPr id="12" name="Text 9"/>
+          <ns0:cNvSpPr/>
+          <ns0:nvPr/>
+        </ns0:nvSpPr>
+        <ns0:spPr>
+          <ns1:xfrm>
+            <ns1:off x="6985000" y="3805436"/>
+            <ns1:ext cx="4369054" cy="234950"/>
+          </ns1:xfrm>
+          <ns1:prstGeom prst="rect">
+            <ns1:avLst/>
+          </ns1:prstGeom>
+          <ns1:noFill/>
+          <ns1:ln/>
+        </ns0:spPr>
+        <ns0:txBody>
+          <ns1:bodyPr wrap="square" lIns="0" tIns="0" rIns="0" bIns="0" rtlCol="0" anchor="t">
+            <ns1:normAutofit/>
+          </ns1:bodyPr>
+          <ns1:lstStyle/>
+          <ns1:p>
+            <ns1:r>
+              <ns1:rPr sz="1100">
+                <ns1:solidFill>
+                  <ns1:srgbClr val="FFFFFF"/>
+                </ns1:solidFill>
+              </ns1:rPr>
+              <ns1:t>ene–jul 2022; pendiente de recalcular</ns1:t>
+            </ns1:r>
+          </ns1:p>
+        </ns0:txBody>
+      </ns0:sp>
+      <ns0:sp>
+        <ns0:nvSpPr>
+          <ns0:cNvPr id="13" name="Text 10"/>
+          <ns0:cNvSpPr/>
+          <ns0:nvPr/>
+        </ns0:nvSpPr>
+        <ns0:spPr>
+          <ns1:xfrm>
+            <ns1:off x="812800" y="4501852"/>
+            <ns1:ext cx="10883392" cy="287734"/>
+          </ns1:xfrm>
+          <ns1:prstGeom prst="rect">
+            <ns1:avLst/>
+          </ns1:prstGeom>
+          <ns1:noFill/>
+          <ns1:ln/>
+        </ns0:spPr>
+        <ns0:txBody>
+          <ns1:bodyPr wrap="square" lIns="0" tIns="0" rIns="0" bIns="0" rtlCol="0" anchor="t">
+            <ns1:normAutofit/>
+          </ns1:bodyPr>
+          <ns1:lstStyle/>
+          <ns1:p>
+            <ns1:pPr marL="0" indent="0" algn="l">
+              <ns1:lnSpc>
+                <ns1:spcPts val="2093"/>
+              </ns1:lnSpc>
+              <ns1:buNone/>
+            </ns1:pPr>
+            <ns1:r>
+              <ns1:rPr lang="en-US" sz="1495" b="1" dirty="0">
+                <ns1:solidFill>
+                  <ns1:srgbClr val="55606B"/>
+                </ns1:solidFill>
+                <ns1:latin typeface="Arial" pitchFamily="34" charset="0"/>
+                <ns1:ea typeface="Arial" pitchFamily="34" charset="-122"/>
+                <ns1:cs typeface="Arial" pitchFamily="34" charset="-120"/>
+              </ns1:rPr>
+              <ns1:t>Ventanas de análisis y modelado sin 2020</ns1:t>
+            </ns1:r>
+            <ns1:endParaRPr lang="en-US" sz="1495" dirty="0"/>
+          </ns1:p>
+        </ns0:txBody>
+      </ns0:sp>
+      <ns0:sp>
+        <ns0:nvSpPr>
+          <ns0:cNvPr id="14" name="Shape 11"/>
+          <ns0:cNvSpPr/>
+          <ns0:nvPr/>
+        </ns0:nvSpPr>
+        <ns0:spPr>
+          <ns1:xfrm>
+            <ns1:off x="815975" y="4970562"/>
+            <ns1:ext cx="2346325" cy="868164"/>
+          </ns1:xfrm>
+          <ns1:prstGeom prst="roundRect">
+            <ns1:avLst>
+              <ns1:gd name="adj" fmla="val 11337"/>
+            </ns1:avLst>
+          </ns1:prstGeom>
+          <ns1:solidFill>
+            <ns1:srgbClr val="FBFAF6"/>
+          </ns1:solidFill>
+          <ns1:ln w="6350">
+            <ns1:solidFill>
+              <ns1:srgbClr val="DAD6C8"/>
+            </ns1:solidFill>
+            <ns1:prstDash val="solid"/>
+          </ns1:ln>
+        </ns0:spPr>
+        <ns0:txBody>
+          <ns1:bodyPr/>
+          <ns1:lstStyle/>
+          <ns1:p>
+            <ns1:endParaRPr lang="es-CO"/>
+          </ns1:p>
+        </ns0:txBody>
+      </ns0:sp>
+      <ns0:sp>
+        <ns0:nvSpPr>
+          <ns0:cNvPr id="15" name="Text 12"/>
+          <ns0:cNvSpPr/>
+          <ns0:nvPr/>
+        </ns0:nvSpPr>
+        <ns0:spPr>
+          <ns1:xfrm>
+            <ns1:off x="971550" y="5100737"/>
+            <ns1:ext cx="2096230" cy="229890"/>
+          </ns1:xfrm>
+          <ns1:prstGeom prst="rect">
+            <ns1:avLst/>
+          </ns1:prstGeom>
+          <ns1:noFill/>
+          <ns1:ln/>
+        </ns0:spPr>
+        <ns0:txBody>
+          <ns1:bodyPr wrap="square" lIns="0" tIns="0" rIns="0" bIns="0" rtlCol="0" anchor="t">
+            <ns1:normAutofit/>
+          </ns1:bodyPr>
+          <ns1:lstStyle/>
+          <ns1:p>
+            <ns1:pPr marL="0" indent="0" algn="l">
+              <ns1:lnSpc>
+                <ns1:spcPts val="1648"/>
+              </ns1:lnSpc>
+              <ns1:buNone/>
+            </ns1:pPr>
+            <ns1:r>
+              <ns1:rPr lang="en-US" sz="1177" b="1" dirty="0">
+                <ns1:solidFill>
+                  <ns1:srgbClr val="176B7B"/>
+                </ns1:solidFill>
+                <ns1:latin typeface="Arial" pitchFamily="34" charset="0"/>
+                <ns1:ea typeface="Arial" pitchFamily="34" charset="-122"/>
+                <ns1:cs typeface="Arial" pitchFamily="34" charset="-120"/>
+              </ns1:rPr>
+              <ns1:t>Logística · 2019</ns1:t>
+            </ns1:r>
+            <ns1:endParaRPr lang="en-US" sz="1177" dirty="0"/>
+          </ns1:p>
+        </ns0:txBody>
+      </ns0:sp>
+      <ns0:sp>
+        <ns0:nvSpPr>
+          <ns0:cNvPr id="16" name="Text 13"/>
+          <ns0:cNvSpPr/>
+          <ns0:nvPr/>
+        </ns0:nvSpPr>
+        <ns0:spPr>
+          <ns1:xfrm>
+            <ns1:off x="971550" y="5330627"/>
+            <ns1:ext cx="2096230" cy="403324"/>
+          </ns1:xfrm>
+          <ns1:prstGeom prst="rect">
+            <ns1:avLst/>
+          </ns1:prstGeom>
+          <ns1:noFill/>
+          <ns1:ln/>
+        </ns0:spPr>
+        <ns0:txBody>
+          <ns1:bodyPr wrap="square" lIns="0" tIns="0" rIns="0" bIns="0" rtlCol="0" anchor="t">
+            <ns1:normAutofit/>
+          </ns1:bodyPr>
+          <ns1:lstStyle/>
+          <ns1:p>
+            <ns1:pPr marL="0" indent="0" algn="l">
+              <ns1:lnSpc>
+                <ns1:spcPts val="3042"/>
+              </ns1:lnSpc>
+              <ns1:buNone/>
+            </ns1:pPr>
+            <ns1:r>
+              <ns1:rPr lang="en-US" sz="1500" b="1" dirty="0">
+                <ns1:solidFill>
+                  <ns1:srgbClr val="16222F"/>
+                </ns1:solidFill>
+                <ns1:latin typeface="Arial" pitchFamily="34" charset="0"/>
+                <ns1:ea typeface="Arial" pitchFamily="34" charset="-122"/>
+                <ns1:cs typeface="Arial" pitchFamily="34" charset="-120"/>
+              </ns1:rPr>
+              <ns1:t>400.000 vuelos</ns1:t>
+            </ns1:r>
+            <ns1:endParaRPr lang="en-US" sz="2173" dirty="0"/>
+          </ns1:p>
+        </ns0:txBody>
+      </ns0:sp>
+      <ns0:pic>
+        <ns0:nvPicPr>
+          <ns0:cNvPr id="17" name="Image 1" descr="arrow-right"/>
+          <ns0:cNvPicPr>
+            <ns1:picLocks noChangeAspect="1"/>
+          </ns0:cNvPicPr>
+          <ns0:nvPr/>
+        </ns0:nvPicPr>
+        <ns0:blipFill>
+          <ns1:blip ns2:embed="rId4"/>
+          <ns1:srcRect/>
+          <ns1:stretch/>
+        </ns0:blipFill>
+        <ns0:spPr>
+          <ns1:xfrm>
+            <ns1:off x="3267075" y="5303044"/>
+            <ns1:ext cx="304800" cy="203200"/>
+          </ns1:xfrm>
+          <ns1:prstGeom prst="rect">
+            <ns1:avLst/>
+          </ns1:prstGeom>
+        </ns0:spPr>
+      </ns0:pic>
+      <ns0:sp>
+        <ns0:nvSpPr>
+          <ns0:cNvPr id="18" name="Shape 14"/>
+          <ns0:cNvSpPr/>
+          <ns0:nvPr/>
+        </ns0:nvSpPr>
+        <ns0:spPr>
+          <ns1:xfrm>
+            <ns1:off x="3676650" y="4970562"/>
+            <ns1:ext cx="2346325" cy="868164"/>
+          </ns1:xfrm>
+          <ns1:prstGeom prst="roundRect">
+            <ns1:avLst>
+              <ns1:gd name="adj" fmla="val 11337"/>
+            </ns1:avLst>
+          </ns1:prstGeom>
+          <ns1:solidFill>
+            <ns1:srgbClr val="FBFAF6"/>
+          </ns1:solidFill>
+          <ns1:ln w="6350">
+            <ns1:solidFill>
+              <ns1:srgbClr val="DAD6C8"/>
+            </ns1:solidFill>
+            <ns1:prstDash val="solid"/>
+          </ns1:ln>
+        </ns0:spPr>
+        <ns0:txBody>
+          <ns1:bodyPr/>
+          <ns1:lstStyle/>
+          <ns1:p>
+            <ns1:endParaRPr lang="es-CO"/>
+          </ns1:p>
+        </ns0:txBody>
+      </ns0:sp>
+      <ns0:sp>
+        <ns0:nvSpPr>
+          <ns0:cNvPr id="19" name="Text 15"/>
+          <ns0:cNvSpPr/>
+          <ns0:nvPr/>
+        </ns0:nvSpPr>
+        <ns0:spPr>
+          <ns1:xfrm>
+            <ns1:off x="3832225" y="5100737"/>
+            <ns1:ext cx="2096230" cy="229890"/>
+          </ns1:xfrm>
+          <ns1:prstGeom prst="rect">
+            <ns1:avLst/>
+          </ns1:prstGeom>
+          <ns1:noFill/>
+          <ns1:ln/>
+        </ns0:spPr>
+        <ns0:txBody>
+          <ns1:bodyPr wrap="square" lIns="0" tIns="0" rIns="0" bIns="0" rtlCol="0" anchor="t">
+            <ns1:normAutofit/>
+          </ns1:bodyPr>
+          <ns1:lstStyle/>
+          <ns1:p>
+            <ns1:pPr marL="0" indent="0" algn="l">
+              <ns1:lnSpc>
+                <ns1:spcPts val="1648"/>
+              </ns1:lnSpc>
+              <ns1:buNone/>
+            </ns1:pPr>
+            <ns1:r>
+              <ns1:rPr lang="en-US" sz="1177" b="1" dirty="0">
+                <ns1:solidFill>
+                  <ns1:srgbClr val="176B7B"/>
+                </ns1:solidFill>
+                <ns1:latin typeface="Arial" pitchFamily="34" charset="0"/>
+                <ns1:ea typeface="Arial" pitchFamily="34" charset="-122"/>
+                <ns1:cs typeface="Arial" pitchFamily="34" charset="-120"/>
+              </ns1:rPr>
+              <ns1:t>Boosting · 2021</ns1:t>
+            </ns1:r>
+            <ns1:endParaRPr lang="en-US" sz="1177" dirty="0"/>
+          </ns1:p>
+        </ns0:txBody>
+      </ns0:sp>
+      <ns0:sp>
+        <ns0:nvSpPr>
+          <ns0:cNvPr id="20" name="Text 16"/>
+          <ns0:cNvSpPr/>
+          <ns0:nvPr/>
+        </ns0:nvSpPr>
+        <ns0:spPr>
+          <ns1:xfrm>
+            <ns1:off x="3832225" y="5330627"/>
+            <ns1:ext cx="2096230" cy="403324"/>
+          </ns1:xfrm>
+          <ns1:prstGeom prst="rect">
+            <ns1:avLst/>
+          </ns1:prstGeom>
+          <ns1:noFill/>
+          <ns1:ln/>
+        </ns0:spPr>
+        <ns0:txBody>
+          <ns1:bodyPr wrap="square" lIns="0" tIns="0" rIns="0" bIns="0" rtlCol="0" anchor="t">
+            <ns1:normAutofit/>
+          </ns1:bodyPr>
+          <ns1:lstStyle/>
+          <ns1:p>
+            <ns1:pPr marL="0" indent="0" algn="l">
+              <ns1:lnSpc>
+                <ns1:spcPts val="3042"/>
+              </ns1:lnSpc>
+              <ns1:buNone/>
+            </ns1:pPr>
+            <ns1:r>
+              <ns1:rPr lang="en-US" sz="1500" b="1" dirty="0">
+                <ns1:solidFill>
+                  <ns1:srgbClr val="16222F"/>
+                </ns1:solidFill>
+                <ns1:latin typeface="Arial" pitchFamily="34" charset="0"/>
+                <ns1:ea typeface="Arial" pitchFamily="34" charset="-122"/>
+                <ns1:cs typeface="Arial" pitchFamily="34" charset="-120"/>
+              </ns1:rPr>
+              <ns1:t>1 millón de vuelos</ns1:t>
+            </ns1:r>
+            <ns1:endParaRPr lang="en-US" sz="2173" dirty="0"/>
+          </ns1:p>
+        </ns0:txBody>
+      </ns0:sp>
+      <ns0:pic>
+        <ns0:nvPicPr>
+          <ns0:cNvPr id="21" name="Image 2" descr="arrow-right"/>
+          <ns0:cNvPicPr>
+            <ns1:picLocks noChangeAspect="1"/>
+          </ns0:cNvPicPr>
+          <ns0:nvPr/>
+        </ns0:nvPicPr>
+        <ns0:blipFill>
+          <ns1:blip ns2:embed="rId4"/>
+          <ns1:srcRect/>
+          <ns1:stretch/>
+        </ns0:blipFill>
+        <ns0:spPr>
+          <ns1:xfrm>
+            <ns1:off x="6127750" y="5303044"/>
+            <ns1:ext cx="304800" cy="203200"/>
+          </ns1:xfrm>
+          <ns1:prstGeom prst="rect">
+            <ns1:avLst/>
+          </ns1:prstGeom>
+        </ns0:spPr>
+      </ns0:pic>
+      <ns0:sp>
+        <ns0:nvSpPr>
+          <ns0:cNvPr id="22" name="Shape 17"/>
+          <ns0:cNvSpPr/>
+          <ns0:nvPr/>
+        </ns0:nvSpPr>
+        <ns0:spPr>
+          <ns1:xfrm>
+            <ns1:off x="6537325" y="4970562"/>
+            <ns1:ext cx="2346325" cy="868164"/>
+          </ns1:xfrm>
+          <ns1:prstGeom prst="roundRect">
+            <ns1:avLst>
+              <ns1:gd name="adj" fmla="val 11337"/>
+            </ns1:avLst>
+          </ns1:prstGeom>
+          <ns1:solidFill>
+            <ns1:srgbClr val="FBFAF6"/>
+          </ns1:solidFill>
+          <ns1:ln w="6350">
+            <ns1:solidFill>
+              <ns1:srgbClr val="DAD6C8"/>
+            </ns1:solidFill>
+            <ns1:prstDash val="solid"/>
+          </ns1:ln>
+        </ns0:spPr>
+        <ns0:txBody>
+          <ns1:bodyPr/>
+          <ns1:lstStyle/>
+          <ns1:p>
+            <ns1:endParaRPr lang="es-CO"/>
+          </ns1:p>
+        </ns0:txBody>
+      </ns0:sp>
+      <ns0:sp>
+        <ns0:nvSpPr>
+          <ns0:cNvPr id="23" name="Text 18"/>
+          <ns0:cNvSpPr/>
+          <ns0:nvPr/>
+        </ns0:nvSpPr>
+        <ns0:spPr>
+          <ns1:xfrm>
+            <ns1:off x="6692900" y="5100737"/>
+            <ns1:ext cx="2096230" cy="229890"/>
+          </ns1:xfrm>
+          <ns1:prstGeom prst="rect">
+            <ns1:avLst/>
+          </ns1:prstGeom>
+          <ns1:noFill/>
+          <ns1:ln/>
+        </ns0:spPr>
+        <ns0:txBody>
+          <ns1:bodyPr wrap="square" lIns="0" tIns="0" rIns="0" bIns="0" rtlCol="0" anchor="t">
+            <ns1:normAutofit/>
+          </ns1:bodyPr>
+          <ns1:lstStyle/>
+          <ns1:p>
+            <ns1:pPr marL="0" indent="0" algn="l">
+              <ns1:lnSpc>
+                <ns1:spcPts val="1648"/>
+              </ns1:lnSpc>
+              <ns1:buNone/>
+            </ns1:pPr>
+            <ns1:r>
+              <ns1:rPr lang="en-US" sz="1177" b="1" dirty="0">
+                <ns1:solidFill>
+                  <ns1:srgbClr val="176B7B"/>
+                </ns1:solidFill>
+                <ns1:latin typeface="Arial" pitchFamily="34" charset="0"/>
+                <ns1:ea typeface="Arial" pitchFamily="34" charset="-122"/>
+                <ns1:cs typeface="Arial" pitchFamily="34" charset="-120"/>
+              </ns1:rPr>
+              <ns1:t>Evaluación · 2022</ns1:t>
+            </ns1:r>
+            <ns1:endParaRPr lang="en-US" sz="1177" dirty="0"/>
+          </ns1:p>
+        </ns0:txBody>
+      </ns0:sp>
+      <ns0:sp>
+        <ns0:nvSpPr>
+          <ns0:cNvPr id="24" name="Text 19"/>
+          <ns0:cNvSpPr/>
+          <ns0:nvPr/>
+        </ns0:nvSpPr>
+        <ns0:spPr>
+          <ns1:xfrm>
+            <ns1:off x="6692900" y="5330627"/>
+            <ns1:ext cx="2096230" cy="403324"/>
+          </ns1:xfrm>
+          <ns1:prstGeom prst="rect">
+            <ns1:avLst/>
+          </ns1:prstGeom>
+          <ns1:noFill/>
+          <ns1:ln/>
+        </ns0:spPr>
+        <ns0:txBody>
+          <ns1:bodyPr wrap="square" lIns="0" tIns="0" rIns="0" bIns="0" rtlCol="0" anchor="t">
+            <ns1:normAutofit/>
+          </ns1:bodyPr>
+          <ns1:lstStyle/>
+          <ns1:p>
+            <ns1:pPr marL="0" indent="0" algn="l">
+              <ns1:lnSpc>
+                <ns1:spcPts val="3042"/>
+              </ns1:lnSpc>
+              <ns1:buNone/>
+            </ns1:pPr>
+            <ns1:r>
+              <ns1:rPr lang="en-US" sz="2173" b="1" dirty="0">
+                <ns1:solidFill>
+                  <ns1:srgbClr val="16222F"/>
+                </ns1:solidFill>
+                <ns1:latin typeface="Arial" pitchFamily="34" charset="0"/>
+                <ns1:ea typeface="Arial" pitchFamily="34" charset="-122"/>
+                <ns1:cs typeface="Arial" pitchFamily="34" charset="-120"/>
+              </ns1:rPr>
+              <ns1:t>Ene–jul; no independiente</ns1:t>
+            </ns1:r>
+            <ns1:endParaRPr lang="en-US" sz="2173" dirty="0"/>
+          </ns1:p>
+        </ns0:txBody>
+      </ns0:sp>
+      <ns0:sp>
+        <ns0:nvSpPr>
+          <ns0:cNvPr id="25" name="Text 20"/>
+          <ns0:cNvSpPr/>
+          <ns0:nvPr/>
+        </ns0:nvSpPr>
+        <ns0:spPr>
+          <ns1:xfrm>
+            <ns1:off x="8988425" y="4967387"/>
+            <ns1:ext cx="2390775" cy="874514"/>
+          </ns1:xfrm>
+          <ns1:prstGeom prst="roundRect">
+            <ns1:avLst>
+              <ns1:gd name="adj" fmla="val 11618"/>
+            </ns1:avLst>
+          </ns1:prstGeom>
+          <ns1:solidFill>
+            <ns1:srgbClr val="E9A23B"/>
+          </ns1:solidFill>
+          <ns1:ln/>
+        </ns0:spPr>
+        <ns0:txBody>
+          <ns1:bodyPr wrap="square" lIns="148042" tIns="97242" rIns="86987" bIns="71842" rtlCol="0" anchor="t">
+            <ns1:normAutofit/>
+          </ns1:bodyPr>
+          <ns1:lstStyle/>
+          <ns1:p>
+            <ns1:pPr marL="0" indent="0" algn="l">
+              <ns1:lnSpc>
+                <ns1:spcPts val="1750"/>
+              </ns1:lnSpc>
+              <ns1:buNone/>
+            </ns1:pPr>
+            <ns1:r>
+              <ns1:rPr lang="en-US" sz="1100" b="1" dirty="0">
+                <ns1:solidFill>
+                  <ns1:srgbClr val="13243B"/>
+                </ns1:solidFill>
+                <ns1:latin typeface="Arial" pitchFamily="34" charset="0"/>
+                <ns1:ea typeface="Arial" pitchFamily="34" charset="-122"/>
+                <ns1:cs typeface="Arial" pitchFamily="34" charset="-120"/>
+              </ns1:rPr>
+              <ns1:t>2021: entrenamiento ene–sep; validación oct–dic</ns1:t>
+            </ns1:r>
+            <ns1:endParaRPr lang="en-US" sz="1400" dirty="0"/>
+          </ns1:p>
+        </ns0:txBody>
+      </ns0:sp>
+      <ns0:sp>
+        <ns0:nvSpPr>
+          <ns0:cNvPr id="26" name="Text 21"/>
+          <ns0:cNvSpPr/>
+          <ns0:nvPr/>
+        </ns0:nvSpPr>
+        <ns0:spPr>
+          <ns1:xfrm>
+            <ns1:off x="812800" y="6242050"/>
+            <ns1:ext cx="8502650" cy="234950"/>
+          </ns1:xfrm>
+          <ns1:prstGeom prst="rect">
+            <ns1:avLst/>
+          </ns1:prstGeom>
+          <ns1:noFill/>
+          <ns1:ln/>
+        </ns0:spPr>
+        <ns0:txBody>
+          <ns1:bodyPr wrap="square" lIns="0" tIns="0" rIns="0" bIns="0" rtlCol="0" anchor="t">
+            <ns1:normAutofit/>
+          </ns1:bodyPr>
+          <ns1:lstStyle/>
+          <ns1:p>
+            <ns1:pPr marL="0" indent="0" algn="l">
+              <ns1:lnSpc>
+                <ns1:spcPts val="1680"/>
+              </ns1:lnSpc>
+              <ns1:buNone/>
+            </ns1:pPr>
+            <ns1:r>
+              <ns1:rPr lang="en-US" sz="1200" dirty="0">
+                <ns1:solidFill>
+                  <ns1:srgbClr val="55606B"/>
+                </ns1:solidFill>
+                <ns1:latin typeface="Arial" pitchFamily="34" charset="0"/>
+                <ns1:ea typeface="Arial" pitchFamily="34" charset="-122"/>
+                <ns1:cs typeface="Arial" pitchFamily="34" charset="-120"/>
+              </ns1:rPr>
+              <ns1:t>Los gráficos y cifras del EDA previo están obsoletos; recalcular tras excluir 2020.</ns1:t>
+            </ns1:r>
+            <ns1:endParaRPr lang="en-US" sz="1200" dirty="0"/>
+          </ns1:p>
+        </ns0:txBody>
+      </ns0:sp>
+      <ns0:sp>
+        <ns0:nvSpPr>
+          <ns0:cNvPr id="27" name="Text 22"/>
+          <ns0:cNvSpPr/>
+          <ns0:nvPr/>
+        </ns0:nvSpPr>
+        <ns0:spPr>
+          <ns1:xfrm>
+            <ns1:off x="10058400" y="6242050"/>
+            <ns1:ext cx="1320800" cy="234950"/>
+          </ns1:xfrm>
+          <ns1:prstGeom prst="rect">
+            <ns1:avLst/>
+          </ns1:prstGeom>
+          <ns1:noFill/>
+          <ns1:ln/>
+        </ns0:spPr>
+        <ns0:txBody>
+          <ns1:bodyPr wrap="square" lIns="0" tIns="0" rIns="0" bIns="0" rtlCol="0" anchor="t">
+            <ns1:normAutofit/>
+          </ns1:bodyPr>
+          <ns1:lstStyle/>
+          <ns1:p>
+            <ns1:pPr marL="0" indent="0" algn="r">
+              <ns1:lnSpc>
+                <ns1:spcPts val="1680"/>
+              </ns1:lnSpc>
+              <ns1:buNone/>
+            </ns1:pPr>
+            <ns1:r>
+              <ns1:rPr lang="en-US" sz="1200" dirty="0">
+                <ns1:solidFill>
+                  <ns1:srgbClr val="55606B"/>
+                </ns1:solidFill>
+                <ns1:latin typeface="Arial" pitchFamily="34" charset="0"/>
+                <ns1:ea typeface="Arial" pitchFamily="34" charset="-122"/>
+                <ns1:cs typeface="Arial" pitchFamily="34" charset="-120"/>
+              </ns1:rPr>
+              <ns1:t>5</ns1:t>
+            </ns1:r>
+            <ns1:endParaRPr lang="en-US" sz="1200" dirty="0"/>
+          </ns1:p>
+        </ns0:txBody>
+      </ns0:sp>
+      <ns0:sp>
+        <ns0:nvSpPr>
+          <ns0:cNvPr id="28" name="Rounded Rectangle 27"/>
+          <ns0:cNvSpPr/>
+          <ns0:nvPr/>
+        </ns0:nvSpPr>
+        <ns0:spPr>
+          <ns1:xfrm>
+            <ns1:off x="950976" y="2011680"/>
+            <ns1:ext cx="5458968" cy="1883664"/>
+          </ns1:xfrm>
+          <ns1:prstGeom prst="roundRect">
+            <ns1:avLst/>
+          </ns1:prstGeom>
+          <ns1:solidFill>
+            <ns1:srgbClr val="F8FAFC"/>
+          </ns1:solidFill>
+          <ns1:ln>
+            <ns1:solidFill>
+              <ns1:srgbClr val="D2DAE4"/>
+            </ns1:solidFill>
+          </ns1:ln>
+        </ns0:spPr>
+        <ns0:style>
+          <ns1:lnRef idx="1">
+            <ns1:schemeClr val="accent1"/>
+          </ns1:lnRef>
+          <ns1:fillRef idx="3">
+            <ns1:schemeClr val="accent1"/>
+          </ns1:fillRef>
+          <ns1:effectRef idx="2">
+            <ns1:schemeClr val="accent1"/>
+          </ns1:effectRef>
+          <ns1:fontRef idx="minor">
+            <ns1:schemeClr val="lt1"/>
+          </ns1:fontRef>
+        </ns0:style>
+        <ns0:txBody>
+          <ns1:bodyPr rtlCol="0" anchor="ctr"/>
+          <ns1:lstStyle/>
+          <ns1:p>
+            <ns1:pPr algn="ctr"/>
+          </ns1:p>
+        </ns0:txBody>
+      </ns0:sp>
+      <ns0:sp>
+        <ns0:nvSpPr>
+          <ns0:cNvPr id="29" name="Rounded Rectangle 28"/>
+          <ns0:cNvSpPr/>
+          <ns0:nvPr/>
+        </ns0:nvSpPr>
+        <ns0:spPr>
+          <ns1:xfrm>
+            <ns1:off x="1216152" y="2423160"/>
+            <ns1:ext cx="932688" cy="859536"/>
+          </ns1:xfrm>
+          <ns1:prstGeom prst="roundRect">
+            <ns1:avLst/>
+          </ns1:prstGeom>
+          <ns1:solidFill>
+            <ns1:srgbClr val="FFFFFF"/>
+          </ns1:solidFill>
+          <ns1:ln>
+            <ns1:solidFill>
+              <ns1:srgbClr val="236952"/>
+            </ns1:solidFill>
+          </ns1:ln>
+        </ns0:spPr>
+        <ns0:style>
+          <ns1:lnRef idx="1">
+            <ns1:schemeClr val="accent1"/>
+          </ns1:lnRef>
+          <ns1:fillRef idx="3">
+            <ns1:schemeClr val="accent1"/>
+          </ns1:fillRef>
+          <ns1:effectRef idx="2">
+            <ns1:schemeClr val="accent1"/>
+          </ns1:effectRef>
+          <ns1:fontRef idx="minor">
+            <ns1:schemeClr val="lt1"/>
+          </ns1:fontRef>
+        </ns0:style>
+        <ns0:txBody>
+          <ns1:bodyPr rtlCol="0" anchor="ctr"/>
+          <ns1:lstStyle/>
+          <ns1:p>
+            <ns1:pPr algn="ctr"/>
+            <ns1:r>
+              <ns1:rPr b="1" sz="1900">
+                <ns1:solidFill>
+                  <ns1:srgbClr val="1A2530"/>
+                </ns1:solidFill>
+              </ns1:rPr>
+              <ns1:t>2018</ns1:t>
+            </ns1:r>
+          </ns1:p>
+          <ns1:p>
+            <ns1:pPr algn="ctr"/>
+            <ns1:r>
+              <ns1:rPr b="1" sz="900">
+                <ns1:solidFill>
+                  <ns1:srgbClr val="236952"/>
+                </ns1:solidFill>
+              </ns1:rPr>
+              <ns1:t>INCLUIDO</ns1:t>
+            </ns1:r>
+          </ns1:p>
+        </ns0:txBody>
+      </ns0:sp>
+      <ns0:sp>
+        <ns0:nvSpPr>
+          <ns0:cNvPr id="30" name="Rounded Rectangle 29"/>
+          <ns0:cNvSpPr/>
+          <ns0:nvPr/>
+        </ns0:nvSpPr>
+        <ns0:spPr>
+          <ns1:xfrm>
+            <ns1:off x="2286000" y="2423160"/>
+            <ns1:ext cx="932688" cy="859536"/>
+          </ns1:xfrm>
+          <ns1:prstGeom prst="roundRect">
+            <ns1:avLst/>
+          </ns1:prstGeom>
+          <ns1:solidFill>
+            <ns1:srgbClr val="FFFFFF"/>
+          </ns1:solidFill>
+          <ns1:ln>
+            <ns1:solidFill>
+              <ns1:srgbClr val="236952"/>
+            </ns1:solidFill>
+          </ns1:ln>
+        </ns0:spPr>
+        <ns0:style>
+          <ns1:lnRef idx="1">
+            <ns1:schemeClr val="accent1"/>
+          </ns1:lnRef>
+          <ns1:fillRef idx="3">
+            <ns1:schemeClr val="accent1"/>
+          </ns1:fillRef>
+          <ns1:effectRef idx="2">
+            <ns1:schemeClr val="accent1"/>
+          </ns1:effectRef>
+          <ns1:fontRef idx="minor">
+            <ns1:schemeClr val="lt1"/>
+          </ns1:fontRef>
+        </ns0:style>
+        <ns0:txBody>
+          <ns1:bodyPr rtlCol="0" anchor="ctr"/>
+          <ns1:lstStyle/>
+          <ns1:p>
+            <ns1:pPr algn="ctr"/>
+            <ns1:r>
+              <ns1:rPr b="1" sz="1900">
+                <ns1:solidFill>
+                  <ns1:srgbClr val="1A2530"/>
+                </ns1:solidFill>
+              </ns1:rPr>
+              <ns1:t>2019</ns1:t>
+            </ns1:r>
+          </ns1:p>
+          <ns1:p>
+            <ns1:pPr algn="ctr"/>
+            <ns1:r>
+              <ns1:rPr b="1" sz="900">
+                <ns1:solidFill>
+                  <ns1:srgbClr val="236952"/>
+                </ns1:solidFill>
+              </ns1:rPr>
+              <ns1:t>INCLUIDO</ns1:t>
+            </ns1:r>
+          </ns1:p>
+        </ns0:txBody>
+      </ns0:sp>
+      <ns0:sp>
+        <ns0:nvSpPr>
+          <ns0:cNvPr id="31" name="Rounded Rectangle 30"/>
+          <ns0:cNvSpPr/>
+          <ns0:nvPr/>
+        </ns0:nvSpPr>
+        <ns0:spPr>
+          <ns1:xfrm>
+            <ns1:off x="3355848" y="2423160"/>
+            <ns1:ext cx="932688" cy="859536"/>
+          </ns1:xfrm>
+          <ns1:prstGeom prst="roundRect">
+            <ns1:avLst/>
+          </ns1:prstGeom>
+          <ns1:solidFill>
+            <ns1:srgbClr val="FFFFFF"/>
+          </ns1:solidFill>
+          <ns1:ln>
+            <ns1:solidFill>
+              <ns1:srgbClr val="B13D3D"/>
+            </ns1:solidFill>
+          </ns1:ln>
+        </ns0:spPr>
+        <ns0:style>
+          <ns1:lnRef idx="1">
+            <ns1:schemeClr val="accent1"/>
+          </ns1:lnRef>
+          <ns1:fillRef idx="3">
+            <ns1:schemeClr val="accent1"/>
+          </ns1:fillRef>
+          <ns1:effectRef idx="2">
+            <ns1:schemeClr val="accent1"/>
+          </ns1:effectRef>
+          <ns1:fontRef idx="minor">
+            <ns1:schemeClr val="lt1"/>
+          </ns1:fontRef>
+        </ns0:style>
+        <ns0:txBody>
+          <ns1:bodyPr rtlCol="0" anchor="ctr"/>
+          <ns1:lstStyle/>
+          <ns1:p>
+            <ns1:pPr algn="ctr"/>
+            <ns1:r>
+              <ns1:rPr b="1" sz="1900">
+                <ns1:solidFill>
+                  <ns1:srgbClr val="1A2530"/>
+                </ns1:solidFill>
+              </ns1:rPr>
+              <ns1:t>2020</ns1:t>
+            </ns1:r>
+          </ns1:p>
+          <ns1:p>
+            <ns1:pPr algn="ctr"/>
+            <ns1:r>
+              <ns1:rPr b="1" sz="900">
+                <ns1:solidFill>
+                  <ns1:srgbClr val="B13D3D"/>
+                </ns1:solidFill>
+              </ns1:rPr>
+              <ns1:t>EXCLUIDO</ns1:t>
+            </ns1:r>
+          </ns1:p>
+        </ns0:txBody>
+      </ns0:sp>
+      <ns0:sp>
+        <ns0:nvSpPr>
+          <ns0:cNvPr id="32" name="Rounded Rectangle 31"/>
+          <ns0:cNvSpPr/>
+          <ns0:nvPr/>
+        </ns0:nvSpPr>
+        <ns0:spPr>
+          <ns1:xfrm>
+            <ns1:off x="4425696" y="2423160"/>
+            <ns1:ext cx="932688" cy="859536"/>
+          </ns1:xfrm>
+          <ns1:prstGeom prst="roundRect">
+            <ns1:avLst/>
+          </ns1:prstGeom>
+          <ns1:solidFill>
+            <ns1:srgbClr val="FFFFFF"/>
+          </ns1:solidFill>
+          <ns1:ln>
+            <ns1:solidFill>
+              <ns1:srgbClr val="236952"/>
+            </ns1:solidFill>
+          </ns1:ln>
+        </ns0:spPr>
+        <ns0:style>
+          <ns1:lnRef idx="1">
+            <ns1:schemeClr val="accent1"/>
+          </ns1:lnRef>
+          <ns1:fillRef idx="3">
+            <ns1:schemeClr val="accent1"/>
+          </ns1:fillRef>
+          <ns1:effectRef idx="2">
+            <ns1:schemeClr val="accent1"/>
+          </ns1:effectRef>
+          <ns1:fontRef idx="minor">
+            <ns1:schemeClr val="lt1"/>
+          </ns1:fontRef>
+        </ns0:style>
+        <ns0:txBody>
+          <ns1:bodyPr rtlCol="0" anchor="ctr"/>
+          <ns1:lstStyle/>
+          <ns1:p>
+            <ns1:pPr algn="ctr"/>
+            <ns1:r>
+              <ns1:rPr b="1" sz="1900">
+                <ns1:solidFill>
+                  <ns1:srgbClr val="1A2530"/>
+                </ns1:solidFill>
+              </ns1:rPr>
+              <ns1:t>2021</ns1:t>
+            </ns1:r>
+          </ns1:p>
+          <ns1:p>
+            <ns1:pPr algn="ctr"/>
+            <ns1:r>
+              <ns1:rPr b="1" sz="900">
+                <ns1:solidFill>
+                  <ns1:srgbClr val="236952"/>
+                </ns1:solidFill>
+              </ns1:rPr>
+              <ns1:t>INCLUIDO</ns1:t>
+            </ns1:r>
+          </ns1:p>
+        </ns0:txBody>
+      </ns0:sp>
+      <ns0:sp>
+        <ns0:nvSpPr>
+          <ns0:cNvPr id="33" name="Rounded Rectangle 32"/>
+          <ns0:cNvSpPr/>
+          <ns0:nvPr/>
+        </ns0:nvSpPr>
+        <ns0:spPr>
+          <ns1:xfrm>
+            <ns1:off x="5495544" y="2423160"/>
+            <ns1:ext cx="932688" cy="859536"/>
+          </ns1:xfrm>
+          <ns1:prstGeom prst="roundRect">
+            <ns1:avLst/>
+          </ns1:prstGeom>
+          <ns1:solidFill>
+            <ns1:srgbClr val="FFFFFF"/>
+          </ns1:solidFill>
+          <ns1:ln>
+            <ns1:solidFill>
+              <ns1:srgbClr val="236952"/>
+            </ns1:solidFill>
+          </ns1:ln>
+        </ns0:spPr>
+        <ns0:style>
+          <ns1:lnRef idx="1">
+            <ns1:schemeClr val="accent1"/>
+          </ns1:lnRef>
+          <ns1:fillRef idx="3">
+            <ns1:schemeClr val="accent1"/>
+          </ns1:fillRef>
+          <ns1:effectRef idx="2">
+            <ns1:schemeClr val="accent1"/>
+          </ns1:effectRef>
+          <ns1:fontRef idx="minor">
+            <ns1:schemeClr val="lt1"/>
+          </ns1:fontRef>
+        </ns0:style>
+        <ns0:txBody>
+          <ns1:bodyPr rtlCol="0" anchor="ctr"/>
+          <ns1:lstStyle/>
+          <ns1:p>
+            <ns1:pPr algn="ctr"/>
+            <ns1:r>
+              <ns1:rPr b="1" sz="1900">
+                <ns1:solidFill>
+                  <ns1:srgbClr val="1A2530"/>
+                </ns1:solidFill>
+              </ns1:rPr>
+              <ns1:t>2022</ns1:t>
+            </ns1:r>
+          </ns1:p>
+          <ns1:p>
+            <ns1:pPr algn="ctr"/>
+            <ns1:r>
+              <ns1:rPr b="1" sz="900">
+                <ns1:solidFill>
+                  <ns1:srgbClr val="236952"/>
+                </ns1:solidFill>
+              </ns1:rPr>
+              <ns1:t>ENE–JUL</ns1:t>
+            </ns1:r>
+          </ns1:p>
+        </ns0:txBody>
+      </ns0:sp>
+      <ns0:sp>
+        <ns0:nvSpPr>
+          <ns0:cNvPr id="34" name="TextBox 33"/>
+          <ns0:cNvSpPr txBox="1"/>
+          <ns0:nvPr/>
+        </ns0:nvSpPr>
+        <ns0:spPr>
+          <ns1:xfrm>
+            <ns1:off x="1179576" y="3410712"/>
+            <ns1:ext cx="5001768" cy="320040"/>
+          </ns1:xfrm>
+          <ns1:prstGeom prst="rect">
+            <ns1:avLst/>
+          </ns1:prstGeom>
+          <ns1:noFill/>
+        </ns0:spPr>
+        <ns0:txBody>
+          <ns1:bodyPr wrap="none">
+            <ns1:spAutoFit/>
+          </ns1:bodyPr>
+          <ns1:lstStyle/>
+          <ns1:p>
+            <ns1:pPr algn="ctr"/>
+            <ns1:r>
+              <ns1:rPr sz="1100">
+                <ns1:solidFill>
+                  <ns1:srgbClr val="3D4957"/>
+                </ns1:solidFill>
+              </ns1:rPr>
+              <ns1:t>Periodo analítico: 2018, 2019, 2021 y enero–julio de 2022</ns1:t>
+            </ns1:r>
+          </ns1:p>
+        </ns0:txBody>
+      </ns0:sp>
+    </ns0:spTree>
+  </ns0:cSld>
+  <ns0:clrMapOvr>
+    <ns1:masterClrMapping/>
+  </ns0:clrMapOvr>
+</ns0:sld>
 </file>
 
 <file path=ppt/slides/slide6.xml><?xml version="1.0" encoding="utf-8"?>
@@ -12021,1555 +12387,1555 @@
 </file>
 
 <file path=ppt/slides/slide7.xml><?xml version="1.0" encoding="utf-8"?>
-<p:sld xmlns:a="http://schemas.openxmlformats.org/drawingml/2006/main" xmlns:r="http://schemas.openxmlformats.org/officeDocument/2006/relationships" xmlns:p="http://schemas.openxmlformats.org/presentationml/2006/main">
-  <p:cSld name="Slide 7">
-    <p:bg>
-      <p:bgPr>
-        <a:solidFill>
-          <a:srgbClr val="F5F3EC"/>
-        </a:solidFill>
-        <a:effectLst/>
-      </p:bgPr>
-    </p:bg>
-    <p:spTree>
-      <p:nvGrpSpPr>
-        <p:cNvPr id="1" name=""/>
-        <p:cNvGrpSpPr/>
-        <p:nvPr/>
-      </p:nvGrpSpPr>
-      <p:grpSpPr>
-        <a:xfrm>
-          <a:off x="0" y="0"/>
-          <a:ext cx="0" cy="0"/>
-          <a:chOff x="0" y="0"/>
-          <a:chExt cx="0" cy="0"/>
-        </a:xfrm>
-      </p:grpSpPr>
-      <p:sp>
-        <p:nvSpPr>
-          <p:cNvPr id="2" name="Text 0"/>
-          <p:cNvSpPr/>
-          <p:nvPr/>
-        </p:nvSpPr>
-        <p:spPr>
-          <a:xfrm>
-            <a:off x="812800" y="812800"/>
-            <a:ext cx="10883392" cy="273050"/>
-          </a:xfrm>
-          <a:prstGeom prst="rect">
-            <a:avLst/>
-          </a:prstGeom>
-          <a:noFill/>
-          <a:ln/>
-        </p:spPr>
-        <p:txBody>
-          <a:bodyPr wrap="square" lIns="0" tIns="0" rIns="0" bIns="0" rtlCol="0" anchor="t">
-            <a:normAutofit/>
-          </a:bodyPr>
-          <a:lstStyle/>
-          <a:p>
-            <a:pPr marL="0" indent="0" algn="l">
-              <a:lnSpc>
-                <a:spcPts val="1960"/>
-              </a:lnSpc>
-              <a:buNone/>
-            </a:pPr>
-            <a:r>
-              <a:rPr lang="en-US" sz="1400" b="1" kern="0" spc="100" dirty="0">
-                <a:solidFill>
-                  <a:srgbClr val="176B7B"/>
-                </a:solidFill>
-                <a:latin typeface="Arial" pitchFamily="34" charset="0"/>
-                <a:ea typeface="Arial" pitchFamily="34" charset="-122"/>
-                <a:cs typeface="Arial" pitchFamily="34" charset="-120"/>
-              </a:rPr>
-              <a:t>4 · LA SOLUCIÓN</a:t>
-            </a:r>
-            <a:endParaRPr lang="en-US" sz="1400" dirty="0"/>
-          </a:p>
-        </p:txBody>
-      </p:sp>
-      <p:sp>
-        <p:nvSpPr>
-          <p:cNvPr id="3" name="Text 1"/>
-          <p:cNvSpPr>
-            <a:spLocks noGrp="1"/>
-          </p:cNvSpPr>
-          <p:nvPr>
-            <p:ph type="title"/>
-          </p:nvPr>
-        </p:nvSpPr>
-        <p:spPr>
-          <a:xfrm>
-            <a:off x="812800" y="1263650"/>
-            <a:ext cx="10883392" cy="444500"/>
-          </a:xfrm>
-          <a:prstGeom prst="rect">
-            <a:avLst/>
-          </a:prstGeom>
-          <a:noFill/>
-          <a:ln/>
-        </p:spPr>
-        <p:txBody>
-          <a:bodyPr wrap="square" lIns="0" tIns="0" rIns="0" bIns="0" rtlCol="0" anchor="t">
-            <a:normAutofit/>
-          </a:bodyPr>
-          <a:lstStyle/>
-          <a:p>
-            <a:pPr marL="0" indent="0" algn="l">
-              <a:lnSpc>
-                <a:spcPts val="3300"/>
-              </a:lnSpc>
-              <a:buNone/>
-            </a:pPr>
-            <a:r>
-              <a:rPr lang="en-US" sz="3000" b="1" i="0" dirty="0">
-                <a:solidFill>
-                  <a:srgbClr val="16222F"/>
-                </a:solidFill>
-                <a:latin typeface="Arial" pitchFamily="34" charset="0"/>
-                <a:ea typeface="Arial" pitchFamily="34" charset="-122"/>
-                <a:cs typeface="Arial" pitchFamily="34" charset="-120"/>
-              </a:rPr>
-              <a:t>Cómo construimos la solución</a:t>
-            </a:r>
-            <a:endParaRPr lang="en-US" sz="3000" dirty="0"/>
-          </a:p>
-        </p:txBody>
-      </p:sp>
-      <p:sp>
-        <p:nvSpPr>
-          <p:cNvPr id="4" name="Text 2"/>
-          <p:cNvSpPr/>
-          <p:nvPr/>
-        </p:nvSpPr>
-        <p:spPr>
-          <a:xfrm>
-            <a:off x="812800" y="1885950"/>
-            <a:ext cx="10883392" cy="292100"/>
-          </a:xfrm>
-          <a:prstGeom prst="rect">
-            <a:avLst/>
-          </a:prstGeom>
-          <a:noFill/>
-          <a:ln/>
-        </p:spPr>
-        <p:txBody>
-          <a:bodyPr wrap="square" lIns="0" tIns="0" rIns="0" bIns="0" rtlCol="0" anchor="t">
-            <a:normAutofit/>
-          </a:bodyPr>
-          <a:lstStyle/>
-          <a:p>
-            <a:pPr marL="0" indent="0" algn="l">
-              <a:lnSpc>
-                <a:spcPts val="2100"/>
-              </a:lnSpc>
-              <a:buNone/>
-            </a:pPr>
-            <a:r>
-              <a:rPr lang="en-US" sz="1500" b="1" dirty="0">
-                <a:solidFill>
-                  <a:srgbClr val="55606B"/>
-                </a:solidFill>
-                <a:latin typeface="Arial" pitchFamily="34" charset="0"/>
-                <a:ea typeface="Arial" pitchFamily="34" charset="-122"/>
-                <a:cs typeface="Arial" pitchFamily="34" charset="-120"/>
-              </a:rPr>
-              <a:t>Una base limpia: ningún resultado desconocido se convierte en cero</a:t>
-            </a:r>
-            <a:endParaRPr lang="en-US" sz="1500" dirty="0"/>
-          </a:p>
-        </p:txBody>
-      </p:sp>
-      <p:sp>
-        <p:nvSpPr>
-          <p:cNvPr id="5" name="Shape 3"/>
-          <p:cNvSpPr/>
-          <p:nvPr/>
-        </p:nvSpPr>
-        <p:spPr>
-          <a:xfrm>
-            <a:off x="815975" y="2359025"/>
-            <a:ext cx="2157115" cy="1022350"/>
-          </a:xfrm>
-          <a:prstGeom prst="roundRect">
-            <a:avLst>
-              <a:gd name="adj" fmla="val 9627"/>
-            </a:avLst>
-          </a:prstGeom>
-          <a:solidFill>
-            <a:srgbClr val="FBFAF6"/>
-          </a:solidFill>
-          <a:ln w="6350">
-            <a:solidFill>
-              <a:srgbClr val="DAD6C8"/>
-            </a:solidFill>
-            <a:prstDash val="solid"/>
-          </a:ln>
-        </p:spPr>
-        <p:txBody>
-          <a:bodyPr/>
-          <a:lstStyle/>
-          <a:p>
-            <a:endParaRPr lang="es-CO"/>
-          </a:p>
-        </p:txBody>
-      </p:sp>
-      <p:sp>
-        <p:nvSpPr>
-          <p:cNvPr id="6" name="Text 4"/>
-          <p:cNvSpPr/>
-          <p:nvPr/>
-        </p:nvSpPr>
-        <p:spPr>
-          <a:xfrm>
-            <a:off x="971550" y="2501900"/>
-            <a:ext cx="1901344" cy="330200"/>
-          </a:xfrm>
-          <a:prstGeom prst="rect">
-            <a:avLst/>
-          </a:prstGeom>
-          <a:noFill/>
-          <a:ln/>
-        </p:spPr>
-        <p:txBody>
-          <a:bodyPr wrap="square" lIns="0" tIns="0" rIns="0" bIns="0" rtlCol="0" anchor="t">
-            <a:normAutofit/>
-          </a:bodyPr>
-          <a:lstStyle/>
-          <a:p>
-            <a:pPr marL="0" indent="0" algn="l">
-              <a:lnSpc>
-                <a:spcPts val="2420"/>
-              </a:lnSpc>
-              <a:buNone/>
-            </a:pPr>
-            <a:r>
-              <a:rPr lang="en-US" sz="2200" b="1" dirty="0">
-                <a:solidFill>
-                  <a:srgbClr val="176B7B"/>
-                </a:solidFill>
-                <a:latin typeface="Arial" pitchFamily="34" charset="0"/>
-                <a:ea typeface="Arial" pitchFamily="34" charset="-122"/>
-                <a:cs typeface="Arial" pitchFamily="34" charset="-120"/>
-              </a:rPr>
-              <a:t>29.193.782</a:t>
-            </a:r>
-            <a:endParaRPr lang="en-US" sz="2200" dirty="0"/>
-          </a:p>
-        </p:txBody>
-      </p:sp>
-      <p:sp>
-        <p:nvSpPr>
-          <p:cNvPr id="7" name="Text 5"/>
-          <p:cNvSpPr/>
-          <p:nvPr/>
-        </p:nvSpPr>
-        <p:spPr>
-          <a:xfrm>
-            <a:off x="971550" y="2844800"/>
-            <a:ext cx="1901344" cy="234950"/>
-          </a:xfrm>
-          <a:prstGeom prst="rect">
-            <a:avLst/>
-          </a:prstGeom>
-          <a:noFill/>
-          <a:ln/>
-        </p:spPr>
-        <p:txBody>
-          <a:bodyPr wrap="square" lIns="0" tIns="0" rIns="0" bIns="0" rtlCol="0" anchor="t">
-            <a:normAutofit/>
-          </a:bodyPr>
-          <a:lstStyle/>
-          <a:p>
-            <a:pPr marL="0" indent="0" algn="l">
-              <a:lnSpc>
-                <a:spcPts val="1690"/>
-              </a:lnSpc>
-              <a:buNone/>
-            </a:pPr>
-            <a:r>
-              <a:rPr lang="en-US" sz="1300" dirty="0">
-                <a:solidFill>
-                  <a:srgbClr val="55606B"/>
-                </a:solidFill>
-                <a:latin typeface="Arial" pitchFamily="34" charset="0"/>
-                <a:ea typeface="Arial" pitchFamily="34" charset="-122"/>
-                <a:cs typeface="Arial" pitchFamily="34" charset="-120"/>
-              </a:rPr>
-              <a:t>registros originales</a:t>
-            </a:r>
-            <a:endParaRPr lang="en-US" sz="1300" dirty="0"/>
-          </a:p>
-        </p:txBody>
-      </p:sp>
-      <p:pic>
-        <p:nvPicPr>
-          <p:cNvPr id="8" name="Image 0" descr="arrow-right"/>
-          <p:cNvPicPr>
-            <a:picLocks noChangeAspect="1"/>
-          </p:cNvPicPr>
-          <p:nvPr/>
-        </p:nvPicPr>
-        <p:blipFill>
-          <a:blip r:embed="rId3"/>
-          <a:srcRect/>
-          <a:stretch/>
-        </p:blipFill>
-        <p:spPr>
-          <a:xfrm>
-            <a:off x="3077865" y="2768600"/>
-            <a:ext cx="254000" cy="203200"/>
-          </a:xfrm>
-          <a:prstGeom prst="rect">
-            <a:avLst/>
-          </a:prstGeom>
-        </p:spPr>
-      </p:pic>
-      <p:sp>
-        <p:nvSpPr>
-          <p:cNvPr id="9" name="Shape 6"/>
-          <p:cNvSpPr/>
-          <p:nvPr/>
-        </p:nvSpPr>
-        <p:spPr>
-          <a:xfrm>
-            <a:off x="3436640" y="2359025"/>
-            <a:ext cx="2526308" cy="1022350"/>
-          </a:xfrm>
-          <a:prstGeom prst="roundRect">
-            <a:avLst>
-              <a:gd name="adj" fmla="val 9627"/>
-            </a:avLst>
-          </a:prstGeom>
-          <a:solidFill>
-            <a:srgbClr val="FBFAF6"/>
-          </a:solidFill>
-          <a:ln w="6350">
-            <a:solidFill>
-              <a:srgbClr val="DAD6C8"/>
-            </a:solidFill>
-            <a:prstDash val="solid"/>
-          </a:ln>
-        </p:spPr>
-        <p:txBody>
-          <a:bodyPr/>
-          <a:lstStyle/>
-          <a:p>
-            <a:endParaRPr lang="es-CO"/>
-          </a:p>
-        </p:txBody>
-      </p:sp>
-      <p:sp>
-        <p:nvSpPr>
-          <p:cNvPr id="10" name="Text 7"/>
-          <p:cNvSpPr/>
-          <p:nvPr/>
-        </p:nvSpPr>
-        <p:spPr>
-          <a:xfrm>
-            <a:off x="3592215" y="2501900"/>
-            <a:ext cx="2281613" cy="330200"/>
-          </a:xfrm>
-          <a:prstGeom prst="rect">
-            <a:avLst/>
-          </a:prstGeom>
-          <a:noFill/>
-          <a:ln/>
-        </p:spPr>
-        <p:txBody>
-          <a:bodyPr wrap="square" lIns="0" tIns="0" rIns="0" bIns="0" rtlCol="0" anchor="t">
-            <a:normAutofit/>
-          </a:bodyPr>
-          <a:lstStyle/>
-          <a:p>
-            <a:pPr marL="0" indent="0" algn="l">
-              <a:lnSpc>
-                <a:spcPts val="2420"/>
-              </a:lnSpc>
-              <a:buNone/>
-            </a:pPr>
-            <a:r>
-              <a:rPr lang="en-US" sz="2200" b="1" dirty="0">
-                <a:solidFill>
-                  <a:srgbClr val="8A5A0A"/>
-                </a:solidFill>
-                <a:latin typeface="Arial" pitchFamily="34" charset="0"/>
-                <a:ea typeface="Arial" pitchFamily="34" charset="-122"/>
-                <a:cs typeface="Arial" pitchFamily="34" charset="-120"/>
-              </a:rPr>
-              <a:t>− 846.183</a:t>
-            </a:r>
-            <a:endParaRPr lang="en-US" sz="2200" dirty="0"/>
-          </a:p>
-        </p:txBody>
-      </p:sp>
-      <p:sp>
-        <p:nvSpPr>
-          <p:cNvPr id="11" name="Text 8"/>
-          <p:cNvSpPr/>
-          <p:nvPr/>
-        </p:nvSpPr>
-        <p:spPr>
-          <a:xfrm>
-            <a:off x="3592215" y="2844800"/>
-            <a:ext cx="2281613" cy="419100"/>
-          </a:xfrm>
-          <a:prstGeom prst="rect">
-            <a:avLst/>
-          </a:prstGeom>
-          <a:noFill/>
-          <a:ln/>
-        </p:spPr>
-        <p:txBody>
-          <a:bodyPr wrap="square" lIns="0" tIns="0" rIns="0" bIns="0" rtlCol="0" anchor="t">
-            <a:normAutofit/>
-          </a:bodyPr>
-          <a:lstStyle/>
-          <a:p>
-            <a:pPr marL="0" indent="0" algn="l">
-              <a:lnSpc>
-                <a:spcPts val="1560"/>
-              </a:lnSpc>
-              <a:buNone/>
-            </a:pPr>
-            <a:r>
-              <a:rPr lang="en-US" sz="1200" dirty="0">
-                <a:solidFill>
-                  <a:srgbClr val="55606B"/>
-                </a:solidFill>
-                <a:latin typeface="Arial" pitchFamily="34" charset="0"/>
-                <a:ea typeface="Arial" pitchFamily="34" charset="-122"/>
-                <a:cs typeface="Arial" pitchFamily="34" charset="-120"/>
-              </a:rPr>
-              <a:t>cancelados 777.265 · desviados 68.347 · otros 571</a:t>
-            </a:r>
-            <a:endParaRPr lang="en-US" sz="1200" dirty="0"/>
-          </a:p>
-        </p:txBody>
-      </p:sp>
-      <p:pic>
-        <p:nvPicPr>
-          <p:cNvPr id="12" name="Image 1" descr="arrow-right"/>
-          <p:cNvPicPr>
-            <a:picLocks noChangeAspect="1"/>
-          </p:cNvPicPr>
-          <p:nvPr/>
-        </p:nvPicPr>
-        <p:blipFill>
-          <a:blip r:embed="rId3"/>
-          <a:srcRect/>
-          <a:stretch/>
-        </p:blipFill>
-        <p:spPr>
-          <a:xfrm>
-            <a:off x="6067723" y="2768600"/>
-            <a:ext cx="254000" cy="203200"/>
-          </a:xfrm>
-          <a:prstGeom prst="rect">
-            <a:avLst/>
-          </a:prstGeom>
-        </p:spPr>
-      </p:pic>
-      <p:sp>
-        <p:nvSpPr>
-          <p:cNvPr id="13" name="Shape 9"/>
-          <p:cNvSpPr/>
-          <p:nvPr/>
-        </p:nvSpPr>
-        <p:spPr>
-          <a:xfrm>
-            <a:off x="6426498" y="2359025"/>
-            <a:ext cx="2157115" cy="1022350"/>
-          </a:xfrm>
-          <a:prstGeom prst="roundRect">
-            <a:avLst>
-              <a:gd name="adj" fmla="val 9627"/>
-            </a:avLst>
-          </a:prstGeom>
-          <a:solidFill>
-            <a:srgbClr val="FBFAF6"/>
-          </a:solidFill>
-          <a:ln w="6350">
-            <a:solidFill>
-              <a:srgbClr val="DAD6C8"/>
-            </a:solidFill>
-            <a:prstDash val="solid"/>
-          </a:ln>
-        </p:spPr>
-        <p:txBody>
-          <a:bodyPr/>
-          <a:lstStyle/>
-          <a:p>
-            <a:endParaRPr lang="es-CO"/>
-          </a:p>
-        </p:txBody>
-      </p:sp>
-      <p:sp>
-        <p:nvSpPr>
-          <p:cNvPr id="14" name="Text 10"/>
-          <p:cNvSpPr/>
-          <p:nvPr/>
-        </p:nvSpPr>
-        <p:spPr>
-          <a:xfrm>
-            <a:off x="6582073" y="2501900"/>
-            <a:ext cx="1901344" cy="330200"/>
-          </a:xfrm>
-          <a:prstGeom prst="rect">
-            <a:avLst/>
-          </a:prstGeom>
-          <a:noFill/>
-          <a:ln/>
-        </p:spPr>
-        <p:txBody>
-          <a:bodyPr wrap="square" lIns="0" tIns="0" rIns="0" bIns="0" rtlCol="0" anchor="t">
-            <a:normAutofit/>
-          </a:bodyPr>
-          <a:lstStyle/>
-          <a:p>
-            <a:pPr marL="0" indent="0" algn="l">
-              <a:lnSpc>
-                <a:spcPts val="2420"/>
-              </a:lnSpc>
-              <a:buNone/>
-            </a:pPr>
-            <a:r>
-              <a:rPr lang="en-US" sz="2200" b="1" dirty="0">
-                <a:solidFill>
-                  <a:srgbClr val="176B7B"/>
-                </a:solidFill>
-                <a:latin typeface="Arial" pitchFamily="34" charset="0"/>
-                <a:ea typeface="Arial" pitchFamily="34" charset="-122"/>
-                <a:cs typeface="Arial" pitchFamily="34" charset="-120"/>
-              </a:rPr>
-              <a:t>28.347.599</a:t>
-            </a:r>
-            <a:endParaRPr lang="en-US" sz="2200" dirty="0"/>
-          </a:p>
-        </p:txBody>
-      </p:sp>
-      <p:sp>
-        <p:nvSpPr>
-          <p:cNvPr id="15" name="Text 11"/>
-          <p:cNvSpPr/>
-          <p:nvPr/>
-        </p:nvSpPr>
-        <p:spPr>
-          <a:xfrm>
-            <a:off x="6582073" y="2844800"/>
-            <a:ext cx="1901344" cy="234950"/>
-          </a:xfrm>
-          <a:prstGeom prst="rect">
-            <a:avLst/>
-          </a:prstGeom>
-          <a:noFill/>
-          <a:ln/>
-        </p:spPr>
-        <p:txBody>
-          <a:bodyPr wrap="square" lIns="0" tIns="0" rIns="0" bIns="0" rtlCol="0" anchor="t">
-            <a:normAutofit/>
-          </a:bodyPr>
-          <a:lstStyle/>
-          <a:p>
-            <a:pPr marL="0" indent="0" algn="l">
-              <a:lnSpc>
-                <a:spcPts val="1690"/>
-              </a:lnSpc>
-              <a:buNone/>
-            </a:pPr>
-            <a:r>
-              <a:rPr lang="en-US" sz="1300" dirty="0">
-                <a:solidFill>
-                  <a:srgbClr val="55606B"/>
-                </a:solidFill>
-                <a:latin typeface="Arial" pitchFamily="34" charset="0"/>
-                <a:ea typeface="Arial" pitchFamily="34" charset="-122"/>
-                <a:cs typeface="Arial" pitchFamily="34" charset="-120"/>
-              </a:rPr>
-              <a:t>con resultado válido</a:t>
-            </a:r>
-            <a:endParaRPr lang="en-US" sz="1300" dirty="0"/>
-          </a:p>
-        </p:txBody>
-      </p:sp>
-      <p:pic>
-        <p:nvPicPr>
-          <p:cNvPr id="16" name="Image 2" descr="arrow-right"/>
-          <p:cNvPicPr>
-            <a:picLocks noChangeAspect="1"/>
-          </p:cNvPicPr>
-          <p:nvPr/>
-        </p:nvPicPr>
-        <p:blipFill>
-          <a:blip r:embed="rId3"/>
-          <a:srcRect/>
-          <a:stretch/>
-        </p:blipFill>
-        <p:spPr>
-          <a:xfrm>
-            <a:off x="8688388" y="2768600"/>
-            <a:ext cx="254000" cy="203200"/>
-          </a:xfrm>
-          <a:prstGeom prst="rect">
-            <a:avLst/>
-          </a:prstGeom>
-        </p:spPr>
-      </p:pic>
-      <p:sp>
-        <p:nvSpPr>
-          <p:cNvPr id="17" name="Shape 12"/>
-          <p:cNvSpPr/>
-          <p:nvPr/>
-        </p:nvSpPr>
-        <p:spPr>
-          <a:xfrm>
-            <a:off x="9043988" y="2355850"/>
-            <a:ext cx="2335312" cy="1028700"/>
-          </a:xfrm>
-          <a:prstGeom prst="roundRect">
-            <a:avLst>
-              <a:gd name="adj" fmla="val 9877"/>
-            </a:avLst>
-          </a:prstGeom>
-          <a:solidFill>
-            <a:srgbClr val="13243B"/>
-          </a:solidFill>
-          <a:ln/>
-        </p:spPr>
-        <p:txBody>
-          <a:bodyPr/>
-          <a:lstStyle/>
-          <a:p>
-            <a:endParaRPr lang="es-CO"/>
-          </a:p>
-        </p:txBody>
-      </p:sp>
-      <p:sp>
-        <p:nvSpPr>
-          <p:cNvPr id="18" name="Text 13"/>
-          <p:cNvSpPr/>
-          <p:nvPr/>
-        </p:nvSpPr>
-        <p:spPr>
-          <a:xfrm>
-            <a:off x="9196388" y="2495550"/>
-            <a:ext cx="2091427" cy="330200"/>
-          </a:xfrm>
-          <a:prstGeom prst="rect">
-            <a:avLst/>
-          </a:prstGeom>
-          <a:noFill/>
-          <a:ln/>
-        </p:spPr>
-        <p:txBody>
-          <a:bodyPr wrap="square" lIns="0" tIns="0" rIns="0" bIns="0" rtlCol="0" anchor="t">
-            <a:normAutofit/>
-          </a:bodyPr>
-          <a:lstStyle/>
-          <a:p>
-            <a:pPr marL="0" indent="0" algn="l">
-              <a:lnSpc>
-                <a:spcPts val="2420"/>
-              </a:lnSpc>
-              <a:buNone/>
-            </a:pPr>
-            <a:r>
-              <a:rPr lang="en-US" sz="2200" b="1" dirty="0">
-                <a:solidFill>
-                  <a:srgbClr val="E9A23B"/>
-                </a:solidFill>
-                <a:latin typeface="Arial" pitchFamily="34" charset="0"/>
-                <a:ea typeface="Arial" pitchFamily="34" charset="-122"/>
-                <a:cs typeface="Arial" pitchFamily="34" charset="-120"/>
-              </a:rPr>
-              <a:t>28.347.597</a:t>
-            </a:r>
-            <a:endParaRPr lang="en-US" sz="2200" dirty="0"/>
-          </a:p>
-        </p:txBody>
-      </p:sp>
-      <p:sp>
-        <p:nvSpPr>
-          <p:cNvPr id="19" name="Text 14"/>
-          <p:cNvSpPr/>
-          <p:nvPr/>
-        </p:nvSpPr>
-        <p:spPr>
-          <a:xfrm>
-            <a:off x="9196388" y="2838450"/>
-            <a:ext cx="2091427" cy="419100"/>
-          </a:xfrm>
-          <a:prstGeom prst="rect">
-            <a:avLst/>
-          </a:prstGeom>
-          <a:noFill/>
-          <a:ln/>
-        </p:spPr>
-        <p:txBody>
-          <a:bodyPr wrap="square" lIns="0" tIns="0" rIns="0" bIns="0" rtlCol="0" anchor="t">
-            <a:normAutofit/>
-          </a:bodyPr>
-          <a:lstStyle/>
-          <a:p>
-            <a:pPr marL="0" indent="0" algn="l">
-              <a:lnSpc>
-                <a:spcPts val="1560"/>
-              </a:lnSpc>
-              <a:buNone/>
-            </a:pPr>
-            <a:r>
-              <a:rPr lang="en-US" sz="1200" dirty="0">
-                <a:solidFill>
-                  <a:srgbClr val="B8C4D2"/>
-                </a:solidFill>
-                <a:latin typeface="Arial" pitchFamily="34" charset="0"/>
-                <a:ea typeface="Arial" pitchFamily="34" charset="-122"/>
-                <a:cs typeface="Arial" pitchFamily="34" charset="-120"/>
-              </a:rPr>
-              <a:t>sin 2 registros contradictorios · 55 archivos</a:t>
-            </a:r>
-            <a:endParaRPr lang="en-US" sz="1200" dirty="0"/>
-          </a:p>
-        </p:txBody>
-      </p:sp>
-      <p:sp>
-        <p:nvSpPr>
-          <p:cNvPr id="20" name="Text 15"/>
-          <p:cNvSpPr/>
-          <p:nvPr/>
-        </p:nvSpPr>
-        <p:spPr>
-          <a:xfrm>
-            <a:off x="812800" y="3587750"/>
-            <a:ext cx="10883392" cy="292100"/>
-          </a:xfrm>
-          <a:prstGeom prst="rect">
-            <a:avLst/>
-          </a:prstGeom>
-          <a:noFill/>
-          <a:ln/>
-        </p:spPr>
-        <p:txBody>
-          <a:bodyPr wrap="square" lIns="0" tIns="0" rIns="0" bIns="0" rtlCol="0" anchor="t">
-            <a:normAutofit/>
-          </a:bodyPr>
-          <a:lstStyle/>
-          <a:p>
-            <a:pPr marL="0" indent="0" algn="l">
-              <a:lnSpc>
-                <a:spcPts val="2100"/>
-              </a:lnSpc>
-              <a:buNone/>
-            </a:pPr>
-            <a:r>
-              <a:rPr lang="en-US" sz="1500" b="1" dirty="0">
-                <a:solidFill>
-                  <a:srgbClr val="55606B"/>
-                </a:solidFill>
-                <a:latin typeface="Arial" pitchFamily="34" charset="0"/>
-                <a:ea typeface="Arial" pitchFamily="34" charset="-122"/>
-                <a:cs typeface="Arial" pitchFamily="34" charset="-120"/>
-              </a:rPr>
-              <a:t>Ventanas temporales; 2020 solo EDA</a:t>
-            </a:r>
-            <a:endParaRPr lang="en-US" sz="1500" dirty="0"/>
-          </a:p>
-        </p:txBody>
-      </p:sp>
-      <p:sp>
-        <p:nvSpPr>
-          <p:cNvPr id="21" name="Shape 16"/>
-          <p:cNvSpPr/>
-          <p:nvPr/>
-        </p:nvSpPr>
-        <p:spPr>
-          <a:xfrm>
-            <a:off x="812800" y="4057650"/>
-            <a:ext cx="2107109" cy="1098550"/>
-          </a:xfrm>
-          <a:prstGeom prst="roundRect">
-            <a:avLst>
-              <a:gd name="adj" fmla="val 6936"/>
-            </a:avLst>
-          </a:prstGeom>
-          <a:solidFill>
-            <a:srgbClr val="C9D3DE"/>
-          </a:solidFill>
-          <a:ln/>
-        </p:spPr>
-        <p:txBody>
-          <a:bodyPr/>
-          <a:lstStyle/>
-          <a:p>
-            <a:endParaRPr lang="es-CO"/>
-          </a:p>
-        </p:txBody>
-      </p:sp>
-      <p:sp>
-        <p:nvSpPr>
-          <p:cNvPr id="22" name="Text 17"/>
-          <p:cNvSpPr/>
-          <p:nvPr/>
-        </p:nvSpPr>
-        <p:spPr>
-          <a:xfrm>
-            <a:off x="939800" y="4184650"/>
-            <a:ext cx="1908702" cy="254000"/>
-          </a:xfrm>
-          <a:prstGeom prst="rect">
-            <a:avLst/>
-          </a:prstGeom>
-          <a:noFill/>
-          <a:ln/>
-        </p:spPr>
-        <p:txBody>
-          <a:bodyPr wrap="square" lIns="0" tIns="0" rIns="0" bIns="0" rtlCol="0" anchor="t">
-            <a:normAutofit/>
-          </a:bodyPr>
-          <a:lstStyle/>
-          <a:p>
-            <a:pPr marL="0" indent="0" algn="l">
-              <a:lnSpc>
-                <a:spcPts val="1820"/>
-              </a:lnSpc>
-              <a:buNone/>
-            </a:pPr>
-            <a:r>
-              <a:rPr lang="en-US" sz="1300" b="1" dirty="0">
-                <a:solidFill>
-                  <a:srgbClr val="16222F"/>
-                </a:solidFill>
-                <a:latin typeface="Arial" pitchFamily="34" charset="0"/>
-                <a:ea typeface="Arial" pitchFamily="34" charset="-122"/>
-                <a:cs typeface="Arial" pitchFamily="34" charset="-120"/>
-              </a:rPr>
-              <a:t>2018 + 2020</a:t>
-            </a:r>
-            <a:endParaRPr lang="en-US" sz="1300" dirty="0"/>
-          </a:p>
-        </p:txBody>
-      </p:sp>
-      <p:sp>
-        <p:nvSpPr>
-          <p:cNvPr id="23" name="Text 18"/>
-          <p:cNvSpPr/>
-          <p:nvPr/>
-        </p:nvSpPr>
-        <p:spPr>
-          <a:xfrm>
-            <a:off x="939800" y="4438650"/>
-            <a:ext cx="1908702" cy="234950"/>
-          </a:xfrm>
-          <a:prstGeom prst="rect">
-            <a:avLst/>
-          </a:prstGeom>
-          <a:noFill/>
-          <a:ln/>
-        </p:spPr>
-        <p:txBody>
-          <a:bodyPr wrap="square" lIns="0" tIns="0" rIns="0" bIns="0" rtlCol="0" anchor="t">
-            <a:normAutofit/>
-          </a:bodyPr>
-          <a:lstStyle/>
-          <a:p>
-            <a:pPr marL="0" indent="0" algn="l">
-              <a:lnSpc>
-                <a:spcPts val="1680"/>
-              </a:lnSpc>
-              <a:buNone/>
-            </a:pPr>
-            <a:r>
-              <a:rPr lang="en-US" sz="1200" dirty="0">
-                <a:solidFill>
-                  <a:srgbClr val="16222F"/>
-                </a:solidFill>
-                <a:latin typeface="Arial" pitchFamily="34" charset="0"/>
-                <a:ea typeface="Arial" pitchFamily="34" charset="-122"/>
-                <a:cs typeface="Arial" pitchFamily="34" charset="-120"/>
-              </a:rPr>
-              <a:t>Exploración descriptiva</a:t>
-            </a:r>
-            <a:endParaRPr lang="en-US" sz="1200" dirty="0"/>
-          </a:p>
-        </p:txBody>
-      </p:sp>
-      <p:sp>
-        <p:nvSpPr>
-          <p:cNvPr id="24" name="Text 19"/>
-          <p:cNvSpPr/>
-          <p:nvPr/>
-        </p:nvSpPr>
-        <p:spPr>
-          <a:xfrm>
-            <a:off x="939800" y="4673600"/>
-            <a:ext cx="1908702" cy="381000"/>
-          </a:xfrm>
-          <a:prstGeom prst="rect">
-            <a:avLst/>
-          </a:prstGeom>
-          <a:noFill/>
-          <a:ln/>
-        </p:spPr>
-        <p:txBody>
-          <a:bodyPr wrap="square" lIns="0" tIns="0" rIns="0" bIns="0" rtlCol="0" anchor="t">
-            <a:normAutofit/>
-          </a:bodyPr>
-          <a:lstStyle/>
-          <a:p>
-            <a:pPr marL="0" indent="0" algn="l">
-              <a:lnSpc>
-                <a:spcPts val="2800"/>
-              </a:lnSpc>
-              <a:buNone/>
-            </a:pPr>
-            <a:r>
-              <a:rPr lang="en-US" sz="2000" b="1" dirty="0">
-                <a:solidFill>
-                  <a:srgbClr val="16222F"/>
-                </a:solidFill>
-                <a:latin typeface="Arial" pitchFamily="34" charset="0"/>
-                <a:ea typeface="Arial" pitchFamily="34" charset="-122"/>
-                <a:cs typeface="Arial" pitchFamily="34" charset="-120"/>
-              </a:rPr>
-              <a:t>2020: pandemia</a:t>
-            </a:r>
-            <a:endParaRPr lang="en-US" sz="2000" dirty="0"/>
-          </a:p>
-        </p:txBody>
-      </p:sp>
-      <p:sp>
-        <p:nvSpPr>
-          <p:cNvPr id="25" name="Shape 20"/>
-          <p:cNvSpPr/>
-          <p:nvPr/>
-        </p:nvSpPr>
-        <p:spPr>
-          <a:xfrm>
-            <a:off x="2970709" y="4057650"/>
-            <a:ext cx="4440833" cy="1098550"/>
-          </a:xfrm>
-          <a:prstGeom prst="roundRect">
-            <a:avLst>
-              <a:gd name="adj" fmla="val 6936"/>
-            </a:avLst>
-          </a:prstGeom>
-          <a:solidFill>
-            <a:srgbClr val="176B7B"/>
-          </a:solidFill>
-          <a:ln/>
-        </p:spPr>
-        <p:txBody>
-          <a:bodyPr/>
-          <a:lstStyle/>
-          <a:p>
-            <a:endParaRPr lang="es-CO"/>
-          </a:p>
-        </p:txBody>
-      </p:sp>
-      <p:sp>
-        <p:nvSpPr>
-          <p:cNvPr id="26" name="Text 21"/>
-          <p:cNvSpPr/>
-          <p:nvPr/>
-        </p:nvSpPr>
-        <p:spPr>
-          <a:xfrm>
-            <a:off x="3097709" y="4184650"/>
-            <a:ext cx="4312438" cy="254000"/>
-          </a:xfrm>
-          <a:prstGeom prst="rect">
-            <a:avLst/>
-          </a:prstGeom>
-          <a:noFill/>
-          <a:ln/>
-        </p:spPr>
-        <p:txBody>
-          <a:bodyPr wrap="square" lIns="0" tIns="0" rIns="0" bIns="0" rtlCol="0" anchor="t">
-            <a:normAutofit/>
-          </a:bodyPr>
-          <a:lstStyle/>
-          <a:p>
-            <a:pPr marL="0" indent="0" algn="l">
-              <a:lnSpc>
-                <a:spcPts val="1820"/>
-              </a:lnSpc>
-              <a:buNone/>
-            </a:pPr>
-            <a:r>
-              <a:rPr lang="en-US" sz="1300" b="1" dirty="0">
-                <a:solidFill>
-                  <a:srgbClr val="F5F3EC"/>
-                </a:solidFill>
-                <a:latin typeface="Arial" pitchFamily="34" charset="0"/>
-                <a:ea typeface="Arial" pitchFamily="34" charset="-122"/>
-                <a:cs typeface="Arial" pitchFamily="34" charset="-120"/>
-              </a:rPr>
-              <a:t>2019 · Regresión logística</a:t>
-            </a:r>
-            <a:endParaRPr lang="en-US" sz="1300" dirty="0"/>
-          </a:p>
-        </p:txBody>
-      </p:sp>
-      <p:sp>
-        <p:nvSpPr>
-          <p:cNvPr id="27" name="Text 22"/>
-          <p:cNvSpPr/>
-          <p:nvPr/>
-        </p:nvSpPr>
-        <p:spPr>
-          <a:xfrm>
-            <a:off x="3097709" y="4438650"/>
-            <a:ext cx="4312438" cy="234950"/>
-          </a:xfrm>
-          <a:prstGeom prst="rect">
-            <a:avLst/>
-          </a:prstGeom>
-          <a:noFill/>
-          <a:ln/>
-        </p:spPr>
-        <p:txBody>
-          <a:bodyPr wrap="square" lIns="0" tIns="0" rIns="0" bIns="0" rtlCol="0" anchor="t">
-            <a:normAutofit/>
-          </a:bodyPr>
-          <a:lstStyle/>
-          <a:p>
-            <a:pPr marL="0" indent="0" algn="l">
-              <a:lnSpc>
-                <a:spcPts val="1680"/>
-              </a:lnSpc>
-              <a:buNone/>
-            </a:pPr>
-            <a:r>
-              <a:rPr lang="en-US" sz="1200" dirty="0">
-                <a:solidFill>
-                  <a:srgbClr val="F5F3EC"/>
-                </a:solidFill>
-                <a:latin typeface="Arial" pitchFamily="34" charset="0"/>
-                <a:ea typeface="Arial" pitchFamily="34" charset="-122"/>
-                <a:cs typeface="Arial" pitchFamily="34" charset="-120"/>
-              </a:rPr>
-              <a:t>Muestra de 400.000 vuelos</a:t>
-            </a:r>
-            <a:endParaRPr lang="en-US" sz="1200" dirty="0"/>
-          </a:p>
-        </p:txBody>
-      </p:sp>
-      <p:sp>
-        <p:nvSpPr>
-          <p:cNvPr id="28" name="Text 23"/>
-          <p:cNvSpPr/>
-          <p:nvPr/>
-        </p:nvSpPr>
-        <p:spPr>
-          <a:xfrm>
-            <a:off x="3097709" y="4673600"/>
-            <a:ext cx="4312438" cy="381000"/>
-          </a:xfrm>
-          <a:prstGeom prst="rect">
-            <a:avLst/>
-          </a:prstGeom>
-          <a:noFill/>
-          <a:ln/>
-        </p:spPr>
-        <p:txBody>
-          <a:bodyPr wrap="square" lIns="0" tIns="0" rIns="0" bIns="0" rtlCol="0" anchor="t">
-            <a:normAutofit/>
-          </a:bodyPr>
-          <a:lstStyle/>
-          <a:p>
-            <a:pPr marL="0" indent="0" algn="l">
-              <a:lnSpc>
-                <a:spcPts val="2800"/>
-              </a:lnSpc>
-              <a:buNone/>
-            </a:pPr>
-            <a:r>
-              <a:rPr lang="en-US" sz="2000" b="1" dirty="0">
-                <a:solidFill>
-                  <a:srgbClr val="F5F3EC"/>
-                </a:solidFill>
-                <a:latin typeface="Arial" pitchFamily="34" charset="0"/>
-                <a:ea typeface="Arial" pitchFamily="34" charset="-122"/>
-                <a:cs typeface="Arial" pitchFamily="34" charset="-120"/>
-              </a:rPr>
-              <a:t>Referencia sin 2020</a:t>
-            </a:r>
-            <a:endParaRPr lang="en-US" sz="2000" dirty="0"/>
-          </a:p>
-        </p:txBody>
-      </p:sp>
-      <p:sp>
-        <p:nvSpPr>
-          <p:cNvPr id="29" name="Shape 24"/>
-          <p:cNvSpPr/>
-          <p:nvPr/>
-        </p:nvSpPr>
-        <p:spPr>
-          <a:xfrm>
-            <a:off x="7462341" y="4057650"/>
-            <a:ext cx="2305943" cy="1098550"/>
-          </a:xfrm>
-          <a:prstGeom prst="roundRect">
-            <a:avLst>
-              <a:gd name="adj" fmla="val 6936"/>
-            </a:avLst>
-          </a:prstGeom>
-          <a:solidFill>
-            <a:srgbClr val="E9A23B"/>
-          </a:solidFill>
-          <a:ln/>
-        </p:spPr>
-        <p:txBody>
-          <a:bodyPr/>
-          <a:lstStyle/>
-          <a:p>
-            <a:endParaRPr lang="es-CO"/>
-          </a:p>
-        </p:txBody>
-      </p:sp>
-      <p:sp>
-        <p:nvSpPr>
-          <p:cNvPr id="30" name="Text 25"/>
-          <p:cNvSpPr/>
-          <p:nvPr/>
-        </p:nvSpPr>
-        <p:spPr>
-          <a:xfrm>
-            <a:off x="7589341" y="4184650"/>
-            <a:ext cx="2113501" cy="254000"/>
-          </a:xfrm>
-          <a:prstGeom prst="rect">
-            <a:avLst/>
-          </a:prstGeom>
-          <a:noFill/>
-          <a:ln/>
-        </p:spPr>
-        <p:txBody>
-          <a:bodyPr wrap="square" lIns="0" tIns="0" rIns="0" bIns="0" rtlCol="0" anchor="t">
-            <a:normAutofit/>
-          </a:bodyPr>
-          <a:lstStyle/>
-          <a:p>
-            <a:pPr marL="0" indent="0" algn="l">
-              <a:lnSpc>
-                <a:spcPts val="1820"/>
-              </a:lnSpc>
-              <a:buNone/>
-            </a:pPr>
-            <a:r>
-              <a:rPr lang="en-US" sz="1300" b="1" dirty="0">
-                <a:solidFill>
-                  <a:srgbClr val="13243B"/>
-                </a:solidFill>
-                <a:latin typeface="Arial" pitchFamily="34" charset="0"/>
-                <a:ea typeface="Arial" pitchFamily="34" charset="-122"/>
-                <a:cs typeface="Arial" pitchFamily="34" charset="-120"/>
-              </a:rPr>
-              <a:t>2021 · Boosting</a:t>
-            </a:r>
-            <a:endParaRPr lang="en-US" sz="1300" dirty="0"/>
-          </a:p>
-        </p:txBody>
-      </p:sp>
-      <p:sp>
-        <p:nvSpPr>
-          <p:cNvPr id="31" name="Text 26"/>
-          <p:cNvSpPr/>
-          <p:nvPr/>
-        </p:nvSpPr>
-        <p:spPr>
-          <a:xfrm>
-            <a:off x="7589341" y="4438650"/>
-            <a:ext cx="2113501" cy="234950"/>
-          </a:xfrm>
-          <a:prstGeom prst="rect">
-            <a:avLst/>
-          </a:prstGeom>
-          <a:noFill/>
-          <a:ln/>
-        </p:spPr>
-        <p:txBody>
-          <a:bodyPr wrap="square" lIns="0" tIns="0" rIns="0" bIns="0" rtlCol="0" anchor="t">
-            <a:normAutofit/>
-          </a:bodyPr>
-          <a:lstStyle/>
-          <a:p>
-            <a:pPr marL="0" indent="0" algn="l">
-              <a:lnSpc>
-                <a:spcPts val="1680"/>
-              </a:lnSpc>
-              <a:buNone/>
-            </a:pPr>
-            <a:r>
-              <a:rPr lang="en-US" sz="1200" dirty="0">
-                <a:solidFill>
-                  <a:srgbClr val="13243B"/>
-                </a:solidFill>
-                <a:latin typeface="Arial" pitchFamily="34" charset="0"/>
-                <a:ea typeface="Arial" pitchFamily="34" charset="-122"/>
-                <a:cs typeface="Arial" pitchFamily="34" charset="-120"/>
-              </a:rPr>
-              <a:t>Ene–sep · 1 M</a:t>
-            </a:r>
-            <a:endParaRPr lang="en-US" sz="1200" dirty="0"/>
-          </a:p>
-        </p:txBody>
-      </p:sp>
-      <p:sp>
-        <p:nvSpPr>
-          <p:cNvPr id="32" name="Text 27"/>
-          <p:cNvSpPr/>
-          <p:nvPr/>
-        </p:nvSpPr>
-        <p:spPr>
-          <a:xfrm>
-            <a:off x="7589341" y="4673600"/>
-            <a:ext cx="2113501" cy="381000"/>
-          </a:xfrm>
-          <a:prstGeom prst="rect">
-            <a:avLst/>
-          </a:prstGeom>
-          <a:noFill/>
-          <a:ln/>
-        </p:spPr>
-        <p:txBody>
-          <a:bodyPr wrap="square" lIns="0" tIns="0" rIns="0" bIns="0" rtlCol="0" anchor="t">
-            <a:normAutofit/>
-          </a:bodyPr>
-          <a:lstStyle/>
-          <a:p>
-            <a:pPr marL="0" indent="0" algn="l">
-              <a:lnSpc>
-                <a:spcPts val="2800"/>
-              </a:lnSpc>
-              <a:buNone/>
-            </a:pPr>
-            <a:r>
-              <a:rPr lang="en-US" sz="2000" b="1" dirty="0">
-                <a:solidFill>
-                  <a:srgbClr val="13243B"/>
-                </a:solidFill>
-                <a:latin typeface="Arial" pitchFamily="34" charset="0"/>
-                <a:ea typeface="Arial" pitchFamily="34" charset="-122"/>
-                <a:cs typeface="Arial" pitchFamily="34" charset="-120"/>
-              </a:rPr>
-              <a:t>Q4 · validación</a:t>
-            </a:r>
-            <a:endParaRPr lang="en-US" sz="2000" dirty="0"/>
-          </a:p>
-        </p:txBody>
-      </p:sp>
-      <p:sp>
-        <p:nvSpPr>
-          <p:cNvPr id="33" name="Shape 28"/>
-          <p:cNvSpPr/>
-          <p:nvPr/>
-        </p:nvSpPr>
-        <p:spPr>
-          <a:xfrm>
-            <a:off x="9819084" y="4057650"/>
-            <a:ext cx="1560116" cy="1098550"/>
-          </a:xfrm>
-          <a:prstGeom prst="roundRect">
-            <a:avLst>
-              <a:gd name="adj" fmla="val 6936"/>
-            </a:avLst>
-          </a:prstGeom>
-          <a:solidFill>
-            <a:srgbClr val="13243B"/>
-          </a:solidFill>
-          <a:ln/>
-        </p:spPr>
-        <p:txBody>
-          <a:bodyPr/>
-          <a:lstStyle/>
-          <a:p>
-            <a:endParaRPr lang="es-CO"/>
-          </a:p>
-        </p:txBody>
-      </p:sp>
-      <p:sp>
-        <p:nvSpPr>
-          <p:cNvPr id="34" name="Text 29"/>
-          <p:cNvSpPr/>
-          <p:nvPr/>
-        </p:nvSpPr>
-        <p:spPr>
-          <a:xfrm>
-            <a:off x="9946084" y="4184650"/>
-            <a:ext cx="1356916" cy="254000"/>
-          </a:xfrm>
-          <a:prstGeom prst="rect">
-            <a:avLst/>
-          </a:prstGeom>
-          <a:noFill/>
-          <a:ln/>
-        </p:spPr>
-        <p:txBody>
-          <a:bodyPr wrap="square" lIns="0" tIns="0" rIns="0" bIns="0" rtlCol="0" anchor="t">
-            <a:normAutofit/>
-          </a:bodyPr>
-          <a:lstStyle/>
-          <a:p>
-            <a:pPr marL="0" indent="0" algn="l">
-              <a:lnSpc>
-                <a:spcPts val="1820"/>
-              </a:lnSpc>
-              <a:buNone/>
-            </a:pPr>
-            <a:r>
-              <a:rPr lang="en-US" sz="1300" b="1" dirty="0">
-                <a:solidFill>
-                  <a:srgbClr val="F5F3EC"/>
-                </a:solidFill>
-                <a:latin typeface="Arial" pitchFamily="34" charset="0"/>
-                <a:ea typeface="Arial" pitchFamily="34" charset="-122"/>
-                <a:cs typeface="Arial" pitchFamily="34" charset="-120"/>
-              </a:rPr>
-              <a:t>2022 · Eval.</a:t>
-            </a:r>
-            <a:endParaRPr lang="en-US" sz="1300" dirty="0"/>
-          </a:p>
-        </p:txBody>
-      </p:sp>
-      <p:sp>
-        <p:nvSpPr>
-          <p:cNvPr id="35" name="Text 30"/>
-          <p:cNvSpPr/>
-          <p:nvPr/>
-        </p:nvSpPr>
-        <p:spPr>
-          <a:xfrm>
-            <a:off x="9946084" y="4438650"/>
-            <a:ext cx="1356916" cy="234950"/>
-          </a:xfrm>
-          <a:prstGeom prst="rect">
-            <a:avLst/>
-          </a:prstGeom>
-          <a:noFill/>
-          <a:ln/>
-        </p:spPr>
-        <p:txBody>
-          <a:bodyPr wrap="square" lIns="0" tIns="0" rIns="0" bIns="0" rtlCol="0" anchor="t">
-            <a:normAutofit/>
-          </a:bodyPr>
-          <a:lstStyle/>
-          <a:p>
-            <a:pPr marL="0" indent="0" algn="l">
-              <a:lnSpc>
-                <a:spcPts val="1680"/>
-              </a:lnSpc>
-              <a:buNone/>
-            </a:pPr>
-            <a:r>
-              <a:rPr lang="en-US" sz="1200" dirty="0">
-                <a:solidFill>
-                  <a:srgbClr val="F5F3EC"/>
-                </a:solidFill>
-                <a:latin typeface="Arial" pitchFamily="34" charset="0"/>
-                <a:ea typeface="Arial" pitchFamily="34" charset="-122"/>
-                <a:cs typeface="Arial" pitchFamily="34" charset="-120"/>
-              </a:rPr>
-              <a:t>Ene–jul</a:t>
-            </a:r>
-            <a:endParaRPr lang="en-US" sz="1200" dirty="0"/>
-          </a:p>
-        </p:txBody>
-      </p:sp>
-      <p:sp>
-        <p:nvSpPr>
-          <p:cNvPr id="36" name="Text 31"/>
-          <p:cNvSpPr/>
-          <p:nvPr/>
-        </p:nvSpPr>
-        <p:spPr>
-          <a:xfrm>
-            <a:off x="9946084" y="4673600"/>
-            <a:ext cx="1356916" cy="381000"/>
-          </a:xfrm>
-          <a:prstGeom prst="rect">
-            <a:avLst/>
-          </a:prstGeom>
-          <a:noFill/>
-          <a:ln/>
-        </p:spPr>
-        <p:txBody>
-          <a:bodyPr wrap="square" lIns="0" tIns="0" rIns="0" bIns="0" rtlCol="0" anchor="t">
-            <a:normAutofit/>
-          </a:bodyPr>
-          <a:lstStyle/>
-          <a:p>
-            <a:pPr marL="0" indent="0" algn="l">
-              <a:lnSpc>
-                <a:spcPts val="2800"/>
-              </a:lnSpc>
-              <a:buNone/>
-            </a:pPr>
-            <a:r>
-              <a:rPr lang="en-US" sz="2000" b="1" dirty="0">
-                <a:solidFill>
-                  <a:srgbClr val="F5F3EC"/>
-                </a:solidFill>
-                <a:latin typeface="Arial" pitchFamily="34" charset="0"/>
-                <a:ea typeface="Arial" pitchFamily="34" charset="-122"/>
-                <a:cs typeface="Arial" pitchFamily="34" charset="-120"/>
-              </a:rPr>
-              <a:t>No indep.</a:t>
-            </a:r>
-            <a:endParaRPr lang="en-US" sz="2000" dirty="0"/>
-          </a:p>
-        </p:txBody>
-      </p:sp>
-      <p:sp>
-        <p:nvSpPr>
-          <p:cNvPr id="37" name="Text 32"/>
-          <p:cNvSpPr/>
-          <p:nvPr/>
-        </p:nvSpPr>
-        <p:spPr>
-          <a:xfrm>
-            <a:off x="812800" y="5359400"/>
-            <a:ext cx="10883392" cy="495300"/>
-          </a:xfrm>
-          <a:prstGeom prst="rect">
-            <a:avLst/>
-          </a:prstGeom>
-          <a:noFill/>
-          <a:ln/>
-        </p:spPr>
-        <p:txBody>
-          <a:bodyPr wrap="square" lIns="0" tIns="0" rIns="0" bIns="0" rtlCol="0" anchor="t">
-            <a:normAutofit/>
-          </a:bodyPr>
-          <a:lstStyle/>
-          <a:p>
-            <a:pPr marL="0" indent="0" algn="l">
-              <a:lnSpc>
-                <a:spcPts val="1890"/>
-              </a:lnSpc>
-              <a:buNone/>
-            </a:pPr>
-            <a:r>
-              <a:rPr lang="en-US" sz="1400" b="1" dirty="0">
-                <a:solidFill>
-                  <a:srgbClr val="16222F"/>
-                </a:solidFill>
-                <a:latin typeface="Arial" pitchFamily="34" charset="0"/>
-                <a:ea typeface="Arial" pitchFamily="34" charset="-122"/>
-                <a:cs typeface="Arial" pitchFamily="34" charset="-120"/>
-              </a:rPr>
-              <a:t>Logística: muestra 2019 · Gradient Boosting: 1 M de vuelos ene–sep 2021 · Validación: oct–dic 2021</a:t>
-            </a:r>
-            <a:r>
-              <a:rPr lang="en-US" sz="1400" dirty="0">
-                <a:solidFill>
-                  <a:srgbClr val="16222F"/>
-                </a:solidFill>
-                <a:latin typeface="Arial" pitchFamily="34" charset="0"/>
-                <a:ea typeface="Arial" pitchFamily="34" charset="-122"/>
-                <a:cs typeface="Arial" pitchFamily="34" charset="-120"/>
-              </a:rPr>
-              <a:t/>
-            </a:r>
-            <a:endParaRPr lang="en-US" sz="1400" dirty="0"/>
-          </a:p>
-        </p:txBody>
-      </p:sp>
-      <p:sp>
-        <p:nvSpPr>
-          <p:cNvPr id="38" name="Text 33"/>
-          <p:cNvSpPr/>
-          <p:nvPr/>
-        </p:nvSpPr>
-        <p:spPr>
-          <a:xfrm>
-            <a:off x="812800" y="6242050"/>
-            <a:ext cx="9810750" cy="234950"/>
-          </a:xfrm>
-          <a:prstGeom prst="rect">
-            <a:avLst/>
-          </a:prstGeom>
-          <a:noFill/>
-          <a:ln/>
-        </p:spPr>
-        <p:txBody>
-          <a:bodyPr wrap="square" lIns="0" tIns="0" rIns="0" bIns="0" rtlCol="0" anchor="t">
-            <a:normAutofit/>
-          </a:bodyPr>
-          <a:lstStyle/>
-          <a:p>
-            <a:pPr marL="0" indent="0" algn="l">
-              <a:lnSpc>
-                <a:spcPts val="1680"/>
-              </a:lnSpc>
-              <a:buNone/>
-            </a:pPr>
-            <a:r>
-              <a:rPr lang="en-US" sz="1200" dirty="0">
-                <a:solidFill>
-                  <a:srgbClr val="55606B"/>
-                </a:solidFill>
-                <a:latin typeface="Arial" pitchFamily="34" charset="0"/>
-                <a:ea typeface="Arial" pitchFamily="34" charset="-122"/>
-                <a:cs typeface="Arial" pitchFamily="34" charset="-120"/>
-              </a:rPr>
-              <a:t>EE. UU.; 2020 solo EDA; Colombia como propuesta pendiente de validación local.</a:t>
-            </a:r>
-            <a:endParaRPr lang="en-US" sz="1200" dirty="0"/>
-          </a:p>
-        </p:txBody>
-      </p:sp>
-      <p:sp>
-        <p:nvSpPr>
-          <p:cNvPr id="39" name="Text 34"/>
-          <p:cNvSpPr/>
-          <p:nvPr/>
-        </p:nvSpPr>
-        <p:spPr>
-          <a:xfrm>
-            <a:off x="10693400" y="6242050"/>
-            <a:ext cx="685800" cy="234950"/>
-          </a:xfrm>
-          <a:prstGeom prst="rect">
-            <a:avLst/>
-          </a:prstGeom>
-          <a:noFill/>
-          <a:ln/>
-        </p:spPr>
-        <p:txBody>
-          <a:bodyPr wrap="square" lIns="0" tIns="0" rIns="0" bIns="0" rtlCol="0" anchor="t">
-            <a:normAutofit/>
-          </a:bodyPr>
-          <a:lstStyle/>
-          <a:p>
-            <a:pPr marL="0" indent="0" algn="r">
-              <a:lnSpc>
-                <a:spcPts val="1680"/>
-              </a:lnSpc>
-              <a:buNone/>
-            </a:pPr>
-            <a:r>
-              <a:rPr lang="en-US" sz="1200" dirty="0">
-                <a:solidFill>
-                  <a:srgbClr val="55606B"/>
-                </a:solidFill>
-                <a:latin typeface="Arial" pitchFamily="34" charset="0"/>
-                <a:ea typeface="Arial" pitchFamily="34" charset="-122"/>
-                <a:cs typeface="Arial" pitchFamily="34" charset="-120"/>
-              </a:rPr>
-              <a:t>7</a:t>
-            </a:r>
-            <a:endParaRPr lang="en-US" sz="1200" dirty="0"/>
-          </a:p>
-        </p:txBody>
-      </p:sp>
-    </p:spTree>
-  </p:cSld>
-  <p:clrMapOvr>
-    <a:masterClrMapping/>
-  </p:clrMapOvr>
-</p:sld>
+<ns0:sld xmlns:ns0="http://schemas.openxmlformats.org/presentationml/2006/main" xmlns:ns1="http://schemas.openxmlformats.org/drawingml/2006/main" xmlns:ns2="http://schemas.openxmlformats.org/officeDocument/2006/relationships">
+  <ns0:cSld name="Slide 7">
+    <ns0:bg>
+      <ns0:bgPr>
+        <ns1:solidFill>
+          <ns1:srgbClr val="F5F3EC"/>
+        </ns1:solidFill>
+        <ns1:effectLst/>
+      </ns0:bgPr>
+    </ns0:bg>
+    <ns0:spTree>
+      <ns0:nvGrpSpPr>
+        <ns0:cNvPr id="1" name=""/>
+        <ns0:cNvGrpSpPr/>
+        <ns0:nvPr/>
+      </ns0:nvGrpSpPr>
+      <ns0:grpSpPr>
+        <ns1:xfrm>
+          <ns1:off x="0" y="0"/>
+          <ns1:ext cx="0" cy="0"/>
+          <ns1:chOff x="0" y="0"/>
+          <ns1:chExt cx="0" cy="0"/>
+        </ns1:xfrm>
+      </ns0:grpSpPr>
+      <ns0:sp>
+        <ns0:nvSpPr>
+          <ns0:cNvPr id="2" name="Text 0"/>
+          <ns0:cNvSpPr/>
+          <ns0:nvPr/>
+        </ns0:nvSpPr>
+        <ns0:spPr>
+          <ns1:xfrm>
+            <ns1:off x="812800" y="812800"/>
+            <ns1:ext cx="10883392" cy="273050"/>
+          </ns1:xfrm>
+          <ns1:prstGeom prst="rect">
+            <ns1:avLst/>
+          </ns1:prstGeom>
+          <ns1:noFill/>
+          <ns1:ln/>
+        </ns0:spPr>
+        <ns0:txBody>
+          <ns1:bodyPr wrap="square" lIns="0" tIns="0" rIns="0" bIns="0" rtlCol="0" anchor="t">
+            <ns1:normAutofit/>
+          </ns1:bodyPr>
+          <ns1:lstStyle/>
+          <ns1:p>
+            <ns1:pPr marL="0" indent="0" algn="l">
+              <ns1:lnSpc>
+                <ns1:spcPts val="1960"/>
+              </ns1:lnSpc>
+              <ns1:buNone/>
+            </ns1:pPr>
+            <ns1:r>
+              <ns1:rPr lang="en-US" sz="1400" b="1" kern="0" spc="100" dirty="0">
+                <ns1:solidFill>
+                  <ns1:srgbClr val="176B7B"/>
+                </ns1:solidFill>
+                <ns1:latin typeface="Arial" pitchFamily="34" charset="0"/>
+                <ns1:ea typeface="Arial" pitchFamily="34" charset="-122"/>
+                <ns1:cs typeface="Arial" pitchFamily="34" charset="-120"/>
+              </ns1:rPr>
+              <ns1:t>4 · LA SOLUCIÓN</ns1:t>
+            </ns1:r>
+            <ns1:endParaRPr lang="en-US" sz="1400" dirty="0"/>
+          </ns1:p>
+        </ns0:txBody>
+      </ns0:sp>
+      <ns0:sp>
+        <ns0:nvSpPr>
+          <ns0:cNvPr id="3" name="Text 1"/>
+          <ns0:cNvSpPr>
+            <ns1:spLocks noGrp="1"/>
+          </ns0:cNvSpPr>
+          <ns0:nvPr>
+            <ns0:ph type="title"/>
+          </ns0:nvPr>
+        </ns0:nvSpPr>
+        <ns0:spPr>
+          <ns1:xfrm>
+            <ns1:off x="812800" y="1263650"/>
+            <ns1:ext cx="10883392" cy="444500"/>
+          </ns1:xfrm>
+          <ns1:prstGeom prst="rect">
+            <ns1:avLst/>
+          </ns1:prstGeom>
+          <ns1:noFill/>
+          <ns1:ln/>
+        </ns0:spPr>
+        <ns0:txBody>
+          <ns1:bodyPr wrap="square" lIns="0" tIns="0" rIns="0" bIns="0" rtlCol="0" anchor="t">
+            <ns1:normAutofit/>
+          </ns1:bodyPr>
+          <ns1:lstStyle/>
+          <ns1:p>
+            <ns1:pPr marL="0" indent="0" algn="l">
+              <ns1:lnSpc>
+                <ns1:spcPts val="3300"/>
+              </ns1:lnSpc>
+              <ns1:buNone/>
+            </ns1:pPr>
+            <ns1:r>
+              <ns1:rPr lang="en-US" sz="3000" b="1" i="0" dirty="0">
+                <ns1:solidFill>
+                  <ns1:srgbClr val="16222F"/>
+                </ns1:solidFill>
+                <ns1:latin typeface="Arial" pitchFamily="34" charset="0"/>
+                <ns1:ea typeface="Arial" pitchFamily="34" charset="-122"/>
+                <ns1:cs typeface="Arial" pitchFamily="34" charset="-120"/>
+              </ns1:rPr>
+              <ns1:t>Cómo construimos la solución</ns1:t>
+            </ns1:r>
+            <ns1:endParaRPr lang="en-US" sz="3000" dirty="0"/>
+          </ns1:p>
+        </ns0:txBody>
+      </ns0:sp>
+      <ns0:sp>
+        <ns0:nvSpPr>
+          <ns0:cNvPr id="4" name="Text 2"/>
+          <ns0:cNvSpPr/>
+          <ns0:nvPr/>
+        </ns0:nvSpPr>
+        <ns0:spPr>
+          <ns1:xfrm>
+            <ns1:off x="812800" y="1885950"/>
+            <ns1:ext cx="10883392" cy="292100"/>
+          </ns1:xfrm>
+          <ns1:prstGeom prst="rect">
+            <ns1:avLst/>
+          </ns1:prstGeom>
+          <ns1:noFill/>
+          <ns1:ln/>
+        </ns0:spPr>
+        <ns0:txBody>
+          <ns1:bodyPr wrap="square" lIns="0" tIns="0" rIns="0" bIns="0" rtlCol="0" anchor="t">
+            <ns1:normAutofit/>
+          </ns1:bodyPr>
+          <ns1:lstStyle/>
+          <ns1:p>
+            <ns1:pPr marL="0" indent="0" algn="l">
+              <ns1:lnSpc>
+                <ns1:spcPts val="2100"/>
+              </ns1:lnSpc>
+              <ns1:buNone/>
+            </ns1:pPr>
+            <ns1:r>
+              <ns1:rPr lang="en-US" sz="1500" b="1" dirty="0">
+                <ns1:solidFill>
+                  <ns1:srgbClr val="55606B"/>
+                </ns1:solidFill>
+                <ns1:latin typeface="Arial" pitchFamily="34" charset="0"/>
+                <ns1:ea typeface="Arial" pitchFamily="34" charset="-122"/>
+                <ns1:cs typeface="Arial" pitchFamily="34" charset="-120"/>
+              </ns1:rPr>
+              <ns1:t>Una base limpia: ningún resultado desconocido se convierte en cero</ns1:t>
+            </ns1:r>
+            <ns1:endParaRPr lang="en-US" sz="1500" dirty="0"/>
+          </ns1:p>
+        </ns0:txBody>
+      </ns0:sp>
+      <ns0:sp>
+        <ns0:nvSpPr>
+          <ns0:cNvPr id="5" name="Shape 3"/>
+          <ns0:cNvSpPr/>
+          <ns0:nvPr/>
+        </ns0:nvSpPr>
+        <ns0:spPr>
+          <ns1:xfrm>
+            <ns1:off x="815975" y="2359025"/>
+            <ns1:ext cx="2157115" cy="1022350"/>
+          </ns1:xfrm>
+          <ns1:prstGeom prst="roundRect">
+            <ns1:avLst>
+              <ns1:gd name="adj" fmla="val 9627"/>
+            </ns1:avLst>
+          </ns1:prstGeom>
+          <ns1:solidFill>
+            <ns1:srgbClr val="FBFAF6"/>
+          </ns1:solidFill>
+          <ns1:ln w="6350">
+            <ns1:solidFill>
+              <ns1:srgbClr val="DAD6C8"/>
+            </ns1:solidFill>
+            <ns1:prstDash val="solid"/>
+          </ns1:ln>
+        </ns0:spPr>
+        <ns0:txBody>
+          <ns1:bodyPr/>
+          <ns1:lstStyle/>
+          <ns1:p>
+            <ns1:endParaRPr lang="es-CO"/>
+          </ns1:p>
+        </ns0:txBody>
+      </ns0:sp>
+      <ns0:sp>
+        <ns0:nvSpPr>
+          <ns0:cNvPr id="6" name="Text 4"/>
+          <ns0:cNvSpPr/>
+          <ns0:nvPr/>
+        </ns0:nvSpPr>
+        <ns0:spPr>
+          <ns1:xfrm>
+            <ns1:off x="971550" y="2501900"/>
+            <ns1:ext cx="1901344" cy="330200"/>
+          </ns1:xfrm>
+          <ns1:prstGeom prst="rect">
+            <ns1:avLst/>
+          </ns1:prstGeom>
+          <ns1:noFill/>
+          <ns1:ln/>
+        </ns0:spPr>
+        <ns0:txBody>
+          <ns1:bodyPr wrap="square" lIns="0" tIns="0" rIns="0" bIns="0" rtlCol="0" anchor="t">
+            <ns1:normAutofit/>
+          </ns1:bodyPr>
+          <ns1:lstStyle/>
+          <ns1:p>
+            <ns1:pPr marL="0" indent="0" algn="l">
+              <ns1:lnSpc>
+                <ns1:spcPts val="2420"/>
+              </ns1:lnSpc>
+              <ns1:buNone/>
+            </ns1:pPr>
+            <ns1:r>
+              <ns1:rPr lang="en-US" sz="2200" b="1" dirty="0">
+                <ns1:solidFill>
+                  <ns1:srgbClr val="176B7B"/>
+                </ns1:solidFill>
+                <ns1:latin typeface="Arial" pitchFamily="34" charset="0"/>
+                <ns1:ea typeface="Arial" pitchFamily="34" charset="-122"/>
+                <ns1:cs typeface="Arial" pitchFamily="34" charset="-120"/>
+              </ns1:rPr>
+              <ns1:t>Pendiente</ns1:t>
+            </ns1:r>
+            <ns1:endParaRPr lang="en-US" sz="2200" dirty="0"/>
+          </ns1:p>
+        </ns0:txBody>
+      </ns0:sp>
+      <ns0:sp>
+        <ns0:nvSpPr>
+          <ns0:cNvPr id="7" name="Text 5"/>
+          <ns0:cNvSpPr/>
+          <ns0:nvPr/>
+        </ns0:nvSpPr>
+        <ns0:spPr>
+          <ns1:xfrm>
+            <ns1:off x="971550" y="2844800"/>
+            <ns1:ext cx="1901344" cy="234950"/>
+          </ns1:xfrm>
+          <ns1:prstGeom prst="rect">
+            <ns1:avLst/>
+          </ns1:prstGeom>
+          <ns1:noFill/>
+          <ns1:ln/>
+        </ns0:spPr>
+        <ns0:txBody>
+          <ns1:bodyPr wrap="square" lIns="0" tIns="0" rIns="0" bIns="0" rtlCol="0" anchor="t">
+            <ns1:normAutofit/>
+          </ns1:bodyPr>
+          <ns1:lstStyle/>
+          <ns1:p>
+            <ns1:pPr marL="0" indent="0" algn="l">
+              <ns1:lnSpc>
+                <ns1:spcPts val="1690"/>
+              </ns1:lnSpc>
+              <ns1:buNone/>
+            </ns1:pPr>
+            <ns1:r>
+              <ns1:rPr lang="en-US" sz="1000" dirty="0">
+                <ns1:solidFill>
+                  <ns1:srgbClr val="55606B"/>
+                </ns1:solidFill>
+                <ns1:latin typeface="Arial" pitchFamily="34" charset="0"/>
+                <ns1:ea typeface="Arial" pitchFamily="34" charset="-122"/>
+                <ns1:cs typeface="Arial" pitchFamily="34" charset="-120"/>
+              </ns1:rPr>
+              <ns1:t>conteo sin 2020 pendiente</ns1:t>
+            </ns1:r>
+            <ns1:endParaRPr lang="en-US" sz="1300" dirty="0"/>
+          </ns1:p>
+        </ns0:txBody>
+      </ns0:sp>
+      <ns0:pic>
+        <ns0:nvPicPr>
+          <ns0:cNvPr id="8" name="Image 0" descr="arrow-right"/>
+          <ns0:cNvPicPr>
+            <ns1:picLocks noChangeAspect="1"/>
+          </ns0:cNvPicPr>
+          <ns0:nvPr/>
+        </ns0:nvPicPr>
+        <ns0:blipFill>
+          <ns1:blip ns2:embed="rId3"/>
+          <ns1:srcRect/>
+          <ns1:stretch/>
+        </ns0:blipFill>
+        <ns0:spPr>
+          <ns1:xfrm>
+            <ns1:off x="3077865" y="2768600"/>
+            <ns1:ext cx="254000" cy="203200"/>
+          </ns1:xfrm>
+          <ns1:prstGeom prst="rect">
+            <ns1:avLst/>
+          </ns1:prstGeom>
+        </ns0:spPr>
+      </ns0:pic>
+      <ns0:sp>
+        <ns0:nvSpPr>
+          <ns0:cNvPr id="9" name="Shape 6"/>
+          <ns0:cNvSpPr/>
+          <ns0:nvPr/>
+        </ns0:nvSpPr>
+        <ns0:spPr>
+          <ns1:xfrm>
+            <ns1:off x="3436640" y="2359025"/>
+            <ns1:ext cx="2526308" cy="1022350"/>
+          </ns1:xfrm>
+          <ns1:prstGeom prst="roundRect">
+            <ns1:avLst>
+              <ns1:gd name="adj" fmla="val 9627"/>
+            </ns1:avLst>
+          </ns1:prstGeom>
+          <ns1:solidFill>
+            <ns1:srgbClr val="FBFAF6"/>
+          </ns1:solidFill>
+          <ns1:ln w="6350">
+            <ns1:solidFill>
+              <ns1:srgbClr val="DAD6C8"/>
+            </ns1:solidFill>
+            <ns1:prstDash val="solid"/>
+          </ns1:ln>
+        </ns0:spPr>
+        <ns0:txBody>
+          <ns1:bodyPr/>
+          <ns1:lstStyle/>
+          <ns1:p>
+            <ns1:endParaRPr lang="es-CO"/>
+          </ns1:p>
+        </ns0:txBody>
+      </ns0:sp>
+      <ns0:sp>
+        <ns0:nvSpPr>
+          <ns0:cNvPr id="10" name="Text 7"/>
+          <ns0:cNvSpPr/>
+          <ns0:nvPr/>
+        </ns0:nvSpPr>
+        <ns0:spPr>
+          <ns1:xfrm>
+            <ns1:off x="3592215" y="2501900"/>
+            <ns1:ext cx="2281613" cy="330200"/>
+          </ns1:xfrm>
+          <ns1:prstGeom prst="rect">
+            <ns1:avLst/>
+          </ns1:prstGeom>
+          <ns1:noFill/>
+          <ns1:ln/>
+        </ns0:spPr>
+        <ns0:txBody>
+          <ns1:bodyPr wrap="square" lIns="0" tIns="0" rIns="0" bIns="0" rtlCol="0" anchor="t">
+            <ns1:normAutofit/>
+          </ns1:bodyPr>
+          <ns1:lstStyle/>
+          <ns1:p>
+            <ns1:pPr marL="0" indent="0" algn="l">
+              <ns1:lnSpc>
+                <ns1:spcPts val="2420"/>
+              </ns1:lnSpc>
+              <ns1:buNone/>
+            </ns1:pPr>
+            <ns1:r>
+              <ns1:rPr lang="en-US" sz="2200" b="1" dirty="0">
+                <ns1:solidFill>
+                  <ns1:srgbClr val="8A5A0A"/>
+                </ns1:solidFill>
+                <ns1:latin typeface="Arial" pitchFamily="34" charset="0"/>
+                <ns1:ea typeface="Arial" pitchFamily="34" charset="-122"/>
+                <ns1:cs typeface="Arial" pitchFamily="34" charset="-120"/>
+              </ns1:rPr>
+              <ns1:t>2020 excluido</ns1:t>
+            </ns1:r>
+            <ns1:endParaRPr lang="en-US" sz="2200" dirty="0"/>
+          </ns1:p>
+        </ns0:txBody>
+      </ns0:sp>
+      <ns0:sp>
+        <ns0:nvSpPr>
+          <ns0:cNvPr id="11" name="Text 8"/>
+          <ns0:cNvSpPr/>
+          <ns0:nvPr/>
+        </ns0:nvSpPr>
+        <ns0:spPr>
+          <ns1:xfrm>
+            <ns1:off x="3592215" y="2844800"/>
+            <ns1:ext cx="2281613" cy="419100"/>
+          </ns1:xfrm>
+          <ns1:prstGeom prst="rect">
+            <ns1:avLst/>
+          </ns1:prstGeom>
+          <ns1:noFill/>
+          <ns1:ln/>
+        </ns0:spPr>
+        <ns0:txBody>
+          <ns1:bodyPr wrap="square" lIns="0" tIns="0" rIns="0" bIns="0" rtlCol="0" anchor="t">
+            <ns1:normAutofit/>
+          </ns1:bodyPr>
+          <ns1:lstStyle/>
+          <ns1:p>
+            <ns1:pPr marL="0" indent="0" algn="l">
+              <ns1:lnSpc>
+                <ns1:spcPts val="1560"/>
+              </ns1:lnSpc>
+              <ns1:buNone/>
+            </ns1:pPr>
+            <ns1:r>
+              <ns1:rPr lang="en-US" sz="1200" dirty="0">
+                <ns1:solidFill>
+                  <ns1:srgbClr val="55606B"/>
+                </ns1:solidFill>
+                <ns1:latin typeface="Arial" pitchFamily="34" charset="0"/>
+                <ns1:ea typeface="Arial" pitchFamily="34" charset="-122"/>
+                <ns1:cs typeface="Arial" pitchFamily="34" charset="-120"/>
+              </ns1:rPr>
+              <ns1:t>No se presentan resultados de 2020</ns1:t>
+            </ns1:r>
+            <ns1:endParaRPr lang="en-US" sz="1200" dirty="0"/>
+          </ns1:p>
+        </ns0:txBody>
+      </ns0:sp>
+      <ns0:pic>
+        <ns0:nvPicPr>
+          <ns0:cNvPr id="12" name="Image 1" descr="arrow-right"/>
+          <ns0:cNvPicPr>
+            <ns1:picLocks noChangeAspect="1"/>
+          </ns0:cNvPicPr>
+          <ns0:nvPr/>
+        </ns0:nvPicPr>
+        <ns0:blipFill>
+          <ns1:blip ns2:embed="rId3"/>
+          <ns1:srcRect/>
+          <ns1:stretch/>
+        </ns0:blipFill>
+        <ns0:spPr>
+          <ns1:xfrm>
+            <ns1:off x="6067723" y="2768600"/>
+            <ns1:ext cx="254000" cy="203200"/>
+          </ns1:xfrm>
+          <ns1:prstGeom prst="rect">
+            <ns1:avLst/>
+          </ns1:prstGeom>
+        </ns0:spPr>
+      </ns0:pic>
+      <ns0:sp>
+        <ns0:nvSpPr>
+          <ns0:cNvPr id="13" name="Shape 9"/>
+          <ns0:cNvSpPr/>
+          <ns0:nvPr/>
+        </ns0:nvSpPr>
+        <ns0:spPr>
+          <ns1:xfrm>
+            <ns1:off x="6426498" y="2359025"/>
+            <ns1:ext cx="2157115" cy="1022350"/>
+          </ns1:xfrm>
+          <ns1:prstGeom prst="roundRect">
+            <ns1:avLst>
+              <ns1:gd name="adj" fmla="val 9627"/>
+            </ns1:avLst>
+          </ns1:prstGeom>
+          <ns1:solidFill>
+            <ns1:srgbClr val="FBFAF6"/>
+          </ns1:solidFill>
+          <ns1:ln w="6350">
+            <ns1:solidFill>
+              <ns1:srgbClr val="DAD6C8"/>
+            </ns1:solidFill>
+            <ns1:prstDash val="solid"/>
+          </ns1:ln>
+        </ns0:spPr>
+        <ns0:txBody>
+          <ns1:bodyPr/>
+          <ns1:lstStyle/>
+          <ns1:p>
+            <ns1:endParaRPr lang="es-CO"/>
+          </ns1:p>
+        </ns0:txBody>
+      </ns0:sp>
+      <ns0:sp>
+        <ns0:nvSpPr>
+          <ns0:cNvPr id="14" name="Text 10"/>
+          <ns0:cNvSpPr/>
+          <ns0:nvPr/>
+        </ns0:nvSpPr>
+        <ns0:spPr>
+          <ns1:xfrm>
+            <ns1:off x="6582073" y="2501900"/>
+            <ns1:ext cx="1901344" cy="330200"/>
+          </ns1:xfrm>
+          <ns1:prstGeom prst="rect">
+            <ns1:avLst/>
+          </ns1:prstGeom>
+          <ns1:noFill/>
+          <ns1:ln/>
+        </ns0:spPr>
+        <ns0:txBody>
+          <ns1:bodyPr wrap="square" lIns="0" tIns="0" rIns="0" bIns="0" rtlCol="0" anchor="t">
+            <ns1:normAutofit/>
+          </ns1:bodyPr>
+          <ns1:lstStyle/>
+          <ns1:p>
+            <ns1:pPr marL="0" indent="0" algn="l">
+              <ns1:lnSpc>
+                <ns1:spcPts val="2420"/>
+              </ns1:lnSpc>
+              <ns1:buNone/>
+            </ns1:pPr>
+            <ns1:r>
+              <ns1:rPr lang="en-US" sz="2200" b="1" dirty="0">
+                <ns1:solidFill>
+                  <ns1:srgbClr val="176B7B"/>
+                </ns1:solidFill>
+                <ns1:latin typeface="Arial" pitchFamily="34" charset="0"/>
+                <ns1:ea typeface="Arial" pitchFamily="34" charset="-122"/>
+                <ns1:cs typeface="Arial" pitchFamily="34" charset="-120"/>
+              </ns1:rPr>
+              <ns1:t>Pendiente</ns1:t>
+            </ns1:r>
+            <ns1:endParaRPr lang="en-US" sz="2200" dirty="0"/>
+          </ns1:p>
+        </ns0:txBody>
+      </ns0:sp>
+      <ns0:sp>
+        <ns0:nvSpPr>
+          <ns0:cNvPr id="15" name="Text 11"/>
+          <ns0:cNvSpPr/>
+          <ns0:nvPr/>
+        </ns0:nvSpPr>
+        <ns0:spPr>
+          <ns1:xfrm>
+            <ns1:off x="6582073" y="2844800"/>
+            <ns1:ext cx="1901344" cy="234950"/>
+          </ns1:xfrm>
+          <ns1:prstGeom prst="rect">
+            <ns1:avLst/>
+          </ns1:prstGeom>
+          <ns1:noFill/>
+          <ns1:ln/>
+        </ns0:spPr>
+        <ns0:txBody>
+          <ns1:bodyPr wrap="square" lIns="0" tIns="0" rIns="0" bIns="0" rtlCol="0" anchor="t">
+            <ns1:normAutofit/>
+          </ns1:bodyPr>
+          <ns1:lstStyle/>
+          <ns1:p>
+            <ns1:pPr marL="0" indent="0" algn="l">
+              <ns1:lnSpc>
+                <ns1:spcPts val="1690"/>
+              </ns1:lnSpc>
+              <ns1:buNone/>
+            </ns1:pPr>
+            <ns1:r>
+              <ns1:rPr lang="en-US" sz="1000" dirty="0">
+                <ns1:solidFill>
+                  <ns1:srgbClr val="55606B"/>
+                </ns1:solidFill>
+                <ns1:latin typeface="Arial" pitchFamily="34" charset="0"/>
+                <ns1:ea typeface="Arial" pitchFamily="34" charset="-122"/>
+                <ns1:cs typeface="Arial" pitchFamily="34" charset="-120"/>
+              </ns1:rPr>
+              <ns1:t>total válido sin 2020 pendiente</ns1:t>
+            </ns1:r>
+            <ns1:endParaRPr lang="en-US" sz="1300" dirty="0"/>
+          </ns1:p>
+        </ns0:txBody>
+      </ns0:sp>
+      <ns0:pic>
+        <ns0:nvPicPr>
+          <ns0:cNvPr id="16" name="Image 2" descr="arrow-right"/>
+          <ns0:cNvPicPr>
+            <ns1:picLocks noChangeAspect="1"/>
+          </ns0:cNvPicPr>
+          <ns0:nvPr/>
+        </ns0:nvPicPr>
+        <ns0:blipFill>
+          <ns1:blip ns2:embed="rId3"/>
+          <ns1:srcRect/>
+          <ns1:stretch/>
+        </ns0:blipFill>
+        <ns0:spPr>
+          <ns1:xfrm>
+            <ns1:off x="8688388" y="2768600"/>
+            <ns1:ext cx="254000" cy="203200"/>
+          </ns1:xfrm>
+          <ns1:prstGeom prst="rect">
+            <ns1:avLst/>
+          </ns1:prstGeom>
+        </ns0:spPr>
+      </ns0:pic>
+      <ns0:sp>
+        <ns0:nvSpPr>
+          <ns0:cNvPr id="17" name="Shape 12"/>
+          <ns0:cNvSpPr/>
+          <ns0:nvPr/>
+        </ns0:nvSpPr>
+        <ns0:spPr>
+          <ns1:xfrm>
+            <ns1:off x="9043988" y="2355850"/>
+            <ns1:ext cx="2335312" cy="1028700"/>
+          </ns1:xfrm>
+          <ns1:prstGeom prst="roundRect">
+            <ns1:avLst>
+              <ns1:gd name="adj" fmla="val 9877"/>
+            </ns1:avLst>
+          </ns1:prstGeom>
+          <ns1:solidFill>
+            <ns1:srgbClr val="13243B"/>
+          </ns1:solidFill>
+          <ns1:ln/>
+        </ns0:spPr>
+        <ns0:txBody>
+          <ns1:bodyPr/>
+          <ns1:lstStyle/>
+          <ns1:p>
+            <ns1:endParaRPr lang="es-CO"/>
+          </ns1:p>
+        </ns0:txBody>
+      </ns0:sp>
+      <ns0:sp>
+        <ns0:nvSpPr>
+          <ns0:cNvPr id="18" name="Text 13"/>
+          <ns0:cNvSpPr/>
+          <ns0:nvPr/>
+        </ns0:nvSpPr>
+        <ns0:spPr>
+          <ns1:xfrm>
+            <ns1:off x="9196388" y="2495550"/>
+            <ns1:ext cx="2091427" cy="330200"/>
+          </ns1:xfrm>
+          <ns1:prstGeom prst="rect">
+            <ns1:avLst/>
+          </ns1:prstGeom>
+          <ns1:noFill/>
+          <ns1:ln/>
+        </ns0:spPr>
+        <ns0:txBody>
+          <ns1:bodyPr wrap="square" lIns="0" tIns="0" rIns="0" bIns="0" rtlCol="0" anchor="t">
+            <ns1:normAutofit/>
+          </ns1:bodyPr>
+          <ns1:lstStyle/>
+          <ns1:p>
+            <ns1:pPr marL="0" indent="0" algn="l">
+              <ns1:lnSpc>
+                <ns1:spcPts val="2420"/>
+              </ns1:lnSpc>
+              <ns1:buNone/>
+            </ns1:pPr>
+            <ns1:r>
+              <ns1:rPr lang="en-US" sz="2200" b="1" dirty="0">
+                <ns1:solidFill>
+                  <ns1:srgbClr val="E9A23B"/>
+                </ns1:solidFill>
+                <ns1:latin typeface="Arial" pitchFamily="34" charset="0"/>
+                <ns1:ea typeface="Arial" pitchFamily="34" charset="-122"/>
+                <ns1:cs typeface="Arial" pitchFamily="34" charset="-120"/>
+              </ns1:rPr>
+              <ns1:t>Pendiente</ns1:t>
+            </ns1:r>
+            <ns1:endParaRPr lang="en-US" sz="2200" dirty="0"/>
+          </ns1:p>
+        </ns0:txBody>
+      </ns0:sp>
+      <ns0:sp>
+        <ns0:nvSpPr>
+          <ns0:cNvPr id="19" name="Text 14"/>
+          <ns0:cNvSpPr/>
+          <ns0:nvPr/>
+        </ns0:nvSpPr>
+        <ns0:spPr>
+          <ns1:xfrm>
+            <ns1:off x="9196388" y="2838450"/>
+            <ns1:ext cx="2091427" cy="419100"/>
+          </ns1:xfrm>
+          <ns1:prstGeom prst="rect">
+            <ns1:avLst/>
+          </ns1:prstGeom>
+          <ns1:noFill/>
+          <ns1:ln/>
+        </ns0:spPr>
+        <ns0:txBody>
+          <ns1:bodyPr wrap="square" lIns="0" tIns="0" rIns="0" bIns="0" rtlCol="0" anchor="t">
+            <ns1:normAutofit/>
+          </ns1:bodyPr>
+          <ns1:lstStyle/>
+          <ns1:p>
+            <ns1:pPr marL="0" indent="0" algn="l">
+              <ns1:lnSpc>
+                <ns1:spcPts val="1560"/>
+              </ns1:lnSpc>
+              <ns1:buNone/>
+            </ns1:pPr>
+            <ns1:r>
+              <ns1:rPr lang="en-US" sz="950" dirty="0">
+                <ns1:solidFill>
+                  <ns1:srgbClr val="B8C4D2"/>
+                </ns1:solidFill>
+                <ns1:latin typeface="Arial" pitchFamily="34" charset="0"/>
+                <ns1:ea typeface="Arial" pitchFamily="34" charset="-122"/>
+                <ns1:cs typeface="Arial" pitchFamily="34" charset="-120"/>
+              </ns1:rPr>
+              <ns1:t>archivos por recalcular sin 2020</ns1:t>
+            </ns1:r>
+            <ns1:endParaRPr lang="en-US" sz="1200" dirty="0"/>
+          </ns1:p>
+        </ns0:txBody>
+      </ns0:sp>
+      <ns0:sp>
+        <ns0:nvSpPr>
+          <ns0:cNvPr id="20" name="Text 15"/>
+          <ns0:cNvSpPr/>
+          <ns0:nvPr/>
+        </ns0:nvSpPr>
+        <ns0:spPr>
+          <ns1:xfrm>
+            <ns1:off x="812800" y="3587750"/>
+            <ns1:ext cx="10883392" cy="292100"/>
+          </ns1:xfrm>
+          <ns1:prstGeom prst="rect">
+            <ns1:avLst/>
+          </ns1:prstGeom>
+          <ns1:noFill/>
+          <ns1:ln/>
+        </ns0:spPr>
+        <ns0:txBody>
+          <ns1:bodyPr wrap="square" lIns="0" tIns="0" rIns="0" bIns="0" rtlCol="0" anchor="t">
+            <ns1:normAutofit/>
+          </ns1:bodyPr>
+          <ns1:lstStyle/>
+          <ns1:p>
+            <ns1:pPr marL="0" indent="0" algn="l">
+              <ns1:lnSpc>
+                <ns1:spcPts val="2100"/>
+              </ns1:lnSpc>
+              <ns1:buNone/>
+            </ns1:pPr>
+            <ns1:r>
+              <ns1:rPr lang="en-US" sz="1500" b="1" dirty="0">
+                <ns1:solidFill>
+                  <ns1:srgbClr val="55606B"/>
+                </ns1:solidFill>
+                <ns1:latin typeface="Arial" pitchFamily="34" charset="0"/>
+                <ns1:ea typeface="Arial" pitchFamily="34" charset="-122"/>
+                <ns1:cs typeface="Arial" pitchFamily="34" charset="-120"/>
+              </ns1:rPr>
+              <ns1:t>Alcance temporal; 2020 excluido</ns1:t>
+            </ns1:r>
+            <ns1:endParaRPr lang="en-US" sz="1500" dirty="0"/>
+          </ns1:p>
+        </ns0:txBody>
+      </ns0:sp>
+      <ns0:sp>
+        <ns0:nvSpPr>
+          <ns0:cNvPr id="21" name="Shape 16"/>
+          <ns0:cNvSpPr/>
+          <ns0:nvPr/>
+        </ns0:nvSpPr>
+        <ns0:spPr>
+          <ns1:xfrm>
+            <ns1:off x="812800" y="4057650"/>
+            <ns1:ext cx="2107109" cy="1098550"/>
+          </ns1:xfrm>
+          <ns1:prstGeom prst="roundRect">
+            <ns1:avLst>
+              <ns1:gd name="adj" fmla="val 6936"/>
+            </ns1:avLst>
+          </ns1:prstGeom>
+          <ns1:solidFill>
+            <ns1:srgbClr val="C9D3DE"/>
+          </ns1:solidFill>
+          <ns1:ln/>
+        </ns0:spPr>
+        <ns0:txBody>
+          <ns1:bodyPr/>
+          <ns1:lstStyle/>
+          <ns1:p>
+            <ns1:endParaRPr lang="es-CO"/>
+          </ns1:p>
+        </ns0:txBody>
+      </ns0:sp>
+      <ns0:sp>
+        <ns0:nvSpPr>
+          <ns0:cNvPr id="22" name="Text 17"/>
+          <ns0:cNvSpPr/>
+          <ns0:nvPr/>
+        </ns0:nvSpPr>
+        <ns0:spPr>
+          <ns1:xfrm>
+            <ns1:off x="939800" y="4184650"/>
+            <ns1:ext cx="1908702" cy="254000"/>
+          </ns1:xfrm>
+          <ns1:prstGeom prst="rect">
+            <ns1:avLst/>
+          </ns1:prstGeom>
+          <ns1:noFill/>
+          <ns1:ln/>
+        </ns0:spPr>
+        <ns0:txBody>
+          <ns1:bodyPr wrap="square" lIns="0" tIns="0" rIns="0" bIns="0" rtlCol="0" anchor="t">
+            <ns1:normAutofit/>
+          </ns1:bodyPr>
+          <ns1:lstStyle/>
+          <ns1:p>
+            <ns1:pPr marL="0" indent="0" algn="l">
+              <ns1:lnSpc>
+                <ns1:spcPts val="1820"/>
+              </ns1:lnSpc>
+              <ns1:buNone/>
+            </ns1:pPr>
+            <ns1:r>
+              <ns1:rPr lang="en-US" sz="1000" b="1" dirty="0">
+                <ns1:solidFill>
+                  <ns1:srgbClr val="16222F"/>
+                </ns1:solidFill>
+                <ns1:latin typeface="Arial" pitchFamily="34" charset="0"/>
+                <ns1:ea typeface="Arial" pitchFamily="34" charset="-122"/>
+                <ns1:cs typeface="Arial" pitchFamily="34" charset="-120"/>
+              </ns1:rPr>
+              <ns1:t>Periodo analítico</ns1:t>
+            </ns1:r>
+            <ns1:endParaRPr lang="en-US" sz="1300" dirty="0"/>
+          </ns1:p>
+        </ns0:txBody>
+      </ns0:sp>
+      <ns0:sp>
+        <ns0:nvSpPr>
+          <ns0:cNvPr id="23" name="Text 18"/>
+          <ns0:cNvSpPr/>
+          <ns0:nvPr/>
+        </ns0:nvSpPr>
+        <ns0:spPr>
+          <ns1:xfrm>
+            <ns1:off x="939800" y="4438650"/>
+            <ns1:ext cx="1908702" cy="234950"/>
+          </ns1:xfrm>
+          <ns1:prstGeom prst="rect">
+            <ns1:avLst/>
+          </ns1:prstGeom>
+          <ns1:noFill/>
+          <ns1:ln/>
+        </ns0:spPr>
+        <ns0:txBody>
+          <ns1:bodyPr wrap="square" lIns="0" tIns="0" rIns="0" bIns="0" rtlCol="0" anchor="t">
+            <ns1:normAutofit/>
+          </ns1:bodyPr>
+          <ns1:lstStyle/>
+          <ns1:p>
+            <ns1:pPr marL="0" indent="0" algn="l">
+              <ns1:lnSpc>
+                <ns1:spcPts val="1680"/>
+              </ns1:lnSpc>
+              <ns1:buNone/>
+            </ns1:pPr>
+            <ns1:r>
+              <ns1:rPr lang="en-US" sz="900" dirty="0">
+                <ns1:solidFill>
+                  <ns1:srgbClr val="16222F"/>
+                </ns1:solidFill>
+                <ns1:latin typeface="Arial" pitchFamily="34" charset="0"/>
+                <ns1:ea typeface="Arial" pitchFamily="34" charset="-122"/>
+                <ns1:cs typeface="Arial" pitchFamily="34" charset="-120"/>
+              </ns1:rPr>
+              <ns1:t>2018, 2019, 2021 y 2022</ns1:t>
+            </ns1:r>
+            <ns1:endParaRPr lang="en-US" sz="1200" dirty="0"/>
+          </ns1:p>
+        </ns0:txBody>
+      </ns0:sp>
+      <ns0:sp>
+        <ns0:nvSpPr>
+          <ns0:cNvPr id="24" name="Text 19"/>
+          <ns0:cNvSpPr/>
+          <ns0:nvPr/>
+        </ns0:nvSpPr>
+        <ns0:spPr>
+          <ns1:xfrm>
+            <ns1:off x="939800" y="4673600"/>
+            <ns1:ext cx="1908702" cy="381000"/>
+          </ns1:xfrm>
+          <ns1:prstGeom prst="rect">
+            <ns1:avLst/>
+          </ns1:prstGeom>
+          <ns1:noFill/>
+          <ns1:ln/>
+        </ns0:spPr>
+        <ns0:txBody>
+          <ns1:bodyPr wrap="square" lIns="0" tIns="0" rIns="0" bIns="0" rtlCol="0" anchor="t">
+            <ns1:normAutofit/>
+          </ns1:bodyPr>
+          <ns1:lstStyle/>
+          <ns1:p>
+            <ns1:pPr marL="0" indent="0" algn="l">
+              <ns1:lnSpc>
+                <ns1:spcPts val="2800"/>
+              </ns1:lnSpc>
+              <ns1:buNone/>
+            </ns1:pPr>
+            <ns1:r>
+              <ns1:rPr lang="en-US" sz="1000" b="1" dirty="0">
+                <ns1:solidFill>
+                  <ns1:srgbClr val="16222F"/>
+                </ns1:solidFill>
+                <ns1:latin typeface="Arial" pitchFamily="34" charset="0"/>
+                <ns1:ea typeface="Arial" pitchFamily="34" charset="-122"/>
+                <ns1:cs typeface="Arial" pitchFamily="34" charset="-120"/>
+              </ns1:rPr>
+              <ns1:t>ene–jul · 2020 excluido</ns1:t>
+            </ns1:r>
+            <ns1:endParaRPr lang="en-US" sz="2000" dirty="0"/>
+          </ns1:p>
+        </ns0:txBody>
+      </ns0:sp>
+      <ns0:sp>
+        <ns0:nvSpPr>
+          <ns0:cNvPr id="25" name="Shape 20"/>
+          <ns0:cNvSpPr/>
+          <ns0:nvPr/>
+        </ns0:nvSpPr>
+        <ns0:spPr>
+          <ns1:xfrm>
+            <ns1:off x="2970709" y="4057650"/>
+            <ns1:ext cx="4440833" cy="1098550"/>
+          </ns1:xfrm>
+          <ns1:prstGeom prst="roundRect">
+            <ns1:avLst>
+              <ns1:gd name="adj" fmla="val 6936"/>
+            </ns1:avLst>
+          </ns1:prstGeom>
+          <ns1:solidFill>
+            <ns1:srgbClr val="176B7B"/>
+          </ns1:solidFill>
+          <ns1:ln/>
+        </ns0:spPr>
+        <ns0:txBody>
+          <ns1:bodyPr/>
+          <ns1:lstStyle/>
+          <ns1:p>
+            <ns1:endParaRPr lang="es-CO"/>
+          </ns1:p>
+        </ns0:txBody>
+      </ns0:sp>
+      <ns0:sp>
+        <ns0:nvSpPr>
+          <ns0:cNvPr id="26" name="Text 21"/>
+          <ns0:cNvSpPr/>
+          <ns0:nvPr/>
+        </ns0:nvSpPr>
+        <ns0:spPr>
+          <ns1:xfrm>
+            <ns1:off x="3097709" y="4184650"/>
+            <ns1:ext cx="4312438" cy="254000"/>
+          </ns1:xfrm>
+          <ns1:prstGeom prst="rect">
+            <ns1:avLst/>
+          </ns1:prstGeom>
+          <ns1:noFill/>
+          <ns1:ln/>
+        </ns0:spPr>
+        <ns0:txBody>
+          <ns1:bodyPr wrap="square" lIns="0" tIns="0" rIns="0" bIns="0" rtlCol="0" anchor="t">
+            <ns1:normAutofit/>
+          </ns1:bodyPr>
+          <ns1:lstStyle/>
+          <ns1:p>
+            <ns1:pPr marL="0" indent="0" algn="l">
+              <ns1:lnSpc>
+                <ns1:spcPts val="1820"/>
+              </ns1:lnSpc>
+              <ns1:buNone/>
+            </ns1:pPr>
+            <ns1:r>
+              <ns1:rPr lang="en-US" sz="1300" b="1" dirty="0">
+                <ns1:solidFill>
+                  <ns1:srgbClr val="F5F3EC"/>
+                </ns1:solidFill>
+                <ns1:latin typeface="Arial" pitchFamily="34" charset="0"/>
+                <ns1:ea typeface="Arial" pitchFamily="34" charset="-122"/>
+                <ns1:cs typeface="Arial" pitchFamily="34" charset="-120"/>
+              </ns1:rPr>
+              <ns1:t>2019 · Regresión logística</ns1:t>
+            </ns1:r>
+            <ns1:endParaRPr lang="en-US" sz="1300" dirty="0"/>
+          </ns1:p>
+        </ns0:txBody>
+      </ns0:sp>
+      <ns0:sp>
+        <ns0:nvSpPr>
+          <ns0:cNvPr id="27" name="Text 22"/>
+          <ns0:cNvSpPr/>
+          <ns0:nvPr/>
+        </ns0:nvSpPr>
+        <ns0:spPr>
+          <ns1:xfrm>
+            <ns1:off x="3097709" y="4438650"/>
+            <ns1:ext cx="4312438" cy="234950"/>
+          </ns1:xfrm>
+          <ns1:prstGeom prst="rect">
+            <ns1:avLst/>
+          </ns1:prstGeom>
+          <ns1:noFill/>
+          <ns1:ln/>
+        </ns0:spPr>
+        <ns0:txBody>
+          <ns1:bodyPr wrap="square" lIns="0" tIns="0" rIns="0" bIns="0" rtlCol="0" anchor="t">
+            <ns1:normAutofit/>
+          </ns1:bodyPr>
+          <ns1:lstStyle/>
+          <ns1:p>
+            <ns1:pPr marL="0" indent="0" algn="l">
+              <ns1:lnSpc>
+                <ns1:spcPts val="1680"/>
+              </ns1:lnSpc>
+              <ns1:buNone/>
+            </ns1:pPr>
+            <ns1:r>
+              <ns1:rPr lang="en-US" sz="1200" dirty="0">
+                <ns1:solidFill>
+                  <ns1:srgbClr val="F5F3EC"/>
+                </ns1:solidFill>
+                <ns1:latin typeface="Arial" pitchFamily="34" charset="0"/>
+                <ns1:ea typeface="Arial" pitchFamily="34" charset="-122"/>
+                <ns1:cs typeface="Arial" pitchFamily="34" charset="-120"/>
+              </ns1:rPr>
+              <ns1:t>Muestra de 400.000 vuelos</ns1:t>
+            </ns1:r>
+            <ns1:endParaRPr lang="en-US" sz="1200" dirty="0"/>
+          </ns1:p>
+        </ns0:txBody>
+      </ns0:sp>
+      <ns0:sp>
+        <ns0:nvSpPr>
+          <ns0:cNvPr id="28" name="Text 23"/>
+          <ns0:cNvSpPr/>
+          <ns0:nvPr/>
+        </ns0:nvSpPr>
+        <ns0:spPr>
+          <ns1:xfrm>
+            <ns1:off x="3097709" y="4673600"/>
+            <ns1:ext cx="4312438" cy="381000"/>
+          </ns1:xfrm>
+          <ns1:prstGeom prst="rect">
+            <ns1:avLst/>
+          </ns1:prstGeom>
+          <ns1:noFill/>
+          <ns1:ln/>
+        </ns0:spPr>
+        <ns0:txBody>
+          <ns1:bodyPr wrap="square" lIns="0" tIns="0" rIns="0" bIns="0" rtlCol="0" anchor="t">
+            <ns1:normAutofit/>
+          </ns1:bodyPr>
+          <ns1:lstStyle/>
+          <ns1:p>
+            <ns1:pPr marL="0" indent="0" algn="l">
+              <ns1:lnSpc>
+                <ns1:spcPts val="2800"/>
+              </ns1:lnSpc>
+              <ns1:buNone/>
+            </ns1:pPr>
+            <ns1:r>
+              <ns1:rPr lang="en-US" sz="2000" b="1" dirty="0">
+                <ns1:solidFill>
+                  <ns1:srgbClr val="F5F3EC"/>
+                </ns1:solidFill>
+                <ns1:latin typeface="Arial" pitchFamily="34" charset="0"/>
+                <ns1:ea typeface="Arial" pitchFamily="34" charset="-122"/>
+                <ns1:cs typeface="Arial" pitchFamily="34" charset="-120"/>
+              </ns1:rPr>
+              <ns1:t>Referencia sin 2020</ns1:t>
+            </ns1:r>
+            <ns1:endParaRPr lang="en-US" sz="2000" dirty="0"/>
+          </ns1:p>
+        </ns0:txBody>
+      </ns0:sp>
+      <ns0:sp>
+        <ns0:nvSpPr>
+          <ns0:cNvPr id="29" name="Shape 24"/>
+          <ns0:cNvSpPr/>
+          <ns0:nvPr/>
+        </ns0:nvSpPr>
+        <ns0:spPr>
+          <ns1:xfrm>
+            <ns1:off x="7462341" y="4057650"/>
+            <ns1:ext cx="2305943" cy="1098550"/>
+          </ns1:xfrm>
+          <ns1:prstGeom prst="roundRect">
+            <ns1:avLst>
+              <ns1:gd name="adj" fmla="val 6936"/>
+            </ns1:avLst>
+          </ns1:prstGeom>
+          <ns1:solidFill>
+            <ns1:srgbClr val="E9A23B"/>
+          </ns1:solidFill>
+          <ns1:ln/>
+        </ns0:spPr>
+        <ns0:txBody>
+          <ns1:bodyPr/>
+          <ns1:lstStyle/>
+          <ns1:p>
+            <ns1:endParaRPr lang="es-CO"/>
+          </ns1:p>
+        </ns0:txBody>
+      </ns0:sp>
+      <ns0:sp>
+        <ns0:nvSpPr>
+          <ns0:cNvPr id="30" name="Text 25"/>
+          <ns0:cNvSpPr/>
+          <ns0:nvPr/>
+        </ns0:nvSpPr>
+        <ns0:spPr>
+          <ns1:xfrm>
+            <ns1:off x="7589341" y="4184650"/>
+            <ns1:ext cx="2113501" cy="254000"/>
+          </ns1:xfrm>
+          <ns1:prstGeom prst="rect">
+            <ns1:avLst/>
+          </ns1:prstGeom>
+          <ns1:noFill/>
+          <ns1:ln/>
+        </ns0:spPr>
+        <ns0:txBody>
+          <ns1:bodyPr wrap="square" lIns="0" tIns="0" rIns="0" bIns="0" rtlCol="0" anchor="t">
+            <ns1:normAutofit/>
+          </ns1:bodyPr>
+          <ns1:lstStyle/>
+          <ns1:p>
+            <ns1:pPr marL="0" indent="0" algn="l">
+              <ns1:lnSpc>
+                <ns1:spcPts val="1820"/>
+              </ns1:lnSpc>
+              <ns1:buNone/>
+            </ns1:pPr>
+            <ns1:r>
+              <ns1:rPr lang="en-US" sz="1300" b="1" dirty="0">
+                <ns1:solidFill>
+                  <ns1:srgbClr val="13243B"/>
+                </ns1:solidFill>
+                <ns1:latin typeface="Arial" pitchFamily="34" charset="0"/>
+                <ns1:ea typeface="Arial" pitchFamily="34" charset="-122"/>
+                <ns1:cs typeface="Arial" pitchFamily="34" charset="-120"/>
+              </ns1:rPr>
+              <ns1:t>2021 · Boosting</ns1:t>
+            </ns1:r>
+            <ns1:endParaRPr lang="en-US" sz="1300" dirty="0"/>
+          </ns1:p>
+        </ns0:txBody>
+      </ns0:sp>
+      <ns0:sp>
+        <ns0:nvSpPr>
+          <ns0:cNvPr id="31" name="Text 26"/>
+          <ns0:cNvSpPr/>
+          <ns0:nvPr/>
+        </ns0:nvSpPr>
+        <ns0:spPr>
+          <ns1:xfrm>
+            <ns1:off x="7589341" y="4438650"/>
+            <ns1:ext cx="2113501" cy="234950"/>
+          </ns1:xfrm>
+          <ns1:prstGeom prst="rect">
+            <ns1:avLst/>
+          </ns1:prstGeom>
+          <ns1:noFill/>
+          <ns1:ln/>
+        </ns0:spPr>
+        <ns0:txBody>
+          <ns1:bodyPr wrap="square" lIns="0" tIns="0" rIns="0" bIns="0" rtlCol="0" anchor="t">
+            <ns1:normAutofit/>
+          </ns1:bodyPr>
+          <ns1:lstStyle/>
+          <ns1:p>
+            <ns1:pPr marL="0" indent="0" algn="l">
+              <ns1:lnSpc>
+                <ns1:spcPts val="1680"/>
+              </ns1:lnSpc>
+              <ns1:buNone/>
+            </ns1:pPr>
+            <ns1:r>
+              <ns1:rPr lang="en-US" sz="1200" dirty="0">
+                <ns1:solidFill>
+                  <ns1:srgbClr val="13243B"/>
+                </ns1:solidFill>
+                <ns1:latin typeface="Arial" pitchFamily="34" charset="0"/>
+                <ns1:ea typeface="Arial" pitchFamily="34" charset="-122"/>
+                <ns1:cs typeface="Arial" pitchFamily="34" charset="-120"/>
+              </ns1:rPr>
+              <ns1:t>Ene–sep · 1 M</ns1:t>
+            </ns1:r>
+            <ns1:endParaRPr lang="en-US" sz="1200" dirty="0"/>
+          </ns1:p>
+        </ns0:txBody>
+      </ns0:sp>
+      <ns0:sp>
+        <ns0:nvSpPr>
+          <ns0:cNvPr id="32" name="Text 27"/>
+          <ns0:cNvSpPr/>
+          <ns0:nvPr/>
+        </ns0:nvSpPr>
+        <ns0:spPr>
+          <ns1:xfrm>
+            <ns1:off x="7589341" y="4673600"/>
+            <ns1:ext cx="2113501" cy="381000"/>
+          </ns1:xfrm>
+          <ns1:prstGeom prst="rect">
+            <ns1:avLst/>
+          </ns1:prstGeom>
+          <ns1:noFill/>
+          <ns1:ln/>
+        </ns0:spPr>
+        <ns0:txBody>
+          <ns1:bodyPr wrap="square" lIns="0" tIns="0" rIns="0" bIns="0" rtlCol="0" anchor="t">
+            <ns1:normAutofit/>
+          </ns1:bodyPr>
+          <ns1:lstStyle/>
+          <ns1:p>
+            <ns1:pPr marL="0" indent="0" algn="l">
+              <ns1:lnSpc>
+                <ns1:spcPts val="2800"/>
+              </ns1:lnSpc>
+              <ns1:buNone/>
+            </ns1:pPr>
+            <ns1:r>
+              <ns1:rPr lang="en-US" sz="2000" b="1" dirty="0">
+                <ns1:solidFill>
+                  <ns1:srgbClr val="13243B"/>
+                </ns1:solidFill>
+                <ns1:latin typeface="Arial" pitchFamily="34" charset="0"/>
+                <ns1:ea typeface="Arial" pitchFamily="34" charset="-122"/>
+                <ns1:cs typeface="Arial" pitchFamily="34" charset="-120"/>
+              </ns1:rPr>
+              <ns1:t>Q4 · validación</ns1:t>
+            </ns1:r>
+            <ns1:endParaRPr lang="en-US" sz="2000" dirty="0"/>
+          </ns1:p>
+        </ns0:txBody>
+      </ns0:sp>
+      <ns0:sp>
+        <ns0:nvSpPr>
+          <ns0:cNvPr id="33" name="Shape 28"/>
+          <ns0:cNvSpPr/>
+          <ns0:nvPr/>
+        </ns0:nvSpPr>
+        <ns0:spPr>
+          <ns1:xfrm>
+            <ns1:off x="9819084" y="4057650"/>
+            <ns1:ext cx="1560116" cy="1098550"/>
+          </ns1:xfrm>
+          <ns1:prstGeom prst="roundRect">
+            <ns1:avLst>
+              <ns1:gd name="adj" fmla="val 6936"/>
+            </ns1:avLst>
+          </ns1:prstGeom>
+          <ns1:solidFill>
+            <ns1:srgbClr val="13243B"/>
+          </ns1:solidFill>
+          <ns1:ln/>
+        </ns0:spPr>
+        <ns0:txBody>
+          <ns1:bodyPr/>
+          <ns1:lstStyle/>
+          <ns1:p>
+            <ns1:endParaRPr lang="es-CO"/>
+          </ns1:p>
+        </ns0:txBody>
+      </ns0:sp>
+      <ns0:sp>
+        <ns0:nvSpPr>
+          <ns0:cNvPr id="34" name="Text 29"/>
+          <ns0:cNvSpPr/>
+          <ns0:nvPr/>
+        </ns0:nvSpPr>
+        <ns0:spPr>
+          <ns1:xfrm>
+            <ns1:off x="9946084" y="4184650"/>
+            <ns1:ext cx="1356916" cy="254000"/>
+          </ns1:xfrm>
+          <ns1:prstGeom prst="rect">
+            <ns1:avLst/>
+          </ns1:prstGeom>
+          <ns1:noFill/>
+          <ns1:ln/>
+        </ns0:spPr>
+        <ns0:txBody>
+          <ns1:bodyPr wrap="square" lIns="0" tIns="0" rIns="0" bIns="0" rtlCol="0" anchor="t">
+            <ns1:normAutofit/>
+          </ns1:bodyPr>
+          <ns1:lstStyle/>
+          <ns1:p>
+            <ns1:pPr marL="0" indent="0" algn="l">
+              <ns1:lnSpc>
+                <ns1:spcPts val="1820"/>
+              </ns1:lnSpc>
+              <ns1:buNone/>
+            </ns1:pPr>
+            <ns1:r>
+              <ns1:rPr lang="en-US" sz="1300" b="1" dirty="0">
+                <ns1:solidFill>
+                  <ns1:srgbClr val="F5F3EC"/>
+                </ns1:solidFill>
+                <ns1:latin typeface="Arial" pitchFamily="34" charset="0"/>
+                <ns1:ea typeface="Arial" pitchFamily="34" charset="-122"/>
+                <ns1:cs typeface="Arial" pitchFamily="34" charset="-120"/>
+              </ns1:rPr>
+              <ns1:t>2022 · Eval.</ns1:t>
+            </ns1:r>
+            <ns1:endParaRPr lang="en-US" sz="1300" dirty="0"/>
+          </ns1:p>
+        </ns0:txBody>
+      </ns0:sp>
+      <ns0:sp>
+        <ns0:nvSpPr>
+          <ns0:cNvPr id="35" name="Text 30"/>
+          <ns0:cNvSpPr/>
+          <ns0:nvPr/>
+        </ns0:nvSpPr>
+        <ns0:spPr>
+          <ns1:xfrm>
+            <ns1:off x="9946084" y="4438650"/>
+            <ns1:ext cx="1356916" cy="234950"/>
+          </ns1:xfrm>
+          <ns1:prstGeom prst="rect">
+            <ns1:avLst/>
+          </ns1:prstGeom>
+          <ns1:noFill/>
+          <ns1:ln/>
+        </ns0:spPr>
+        <ns0:txBody>
+          <ns1:bodyPr wrap="square" lIns="0" tIns="0" rIns="0" bIns="0" rtlCol="0" anchor="t">
+            <ns1:normAutofit/>
+          </ns1:bodyPr>
+          <ns1:lstStyle/>
+          <ns1:p>
+            <ns1:pPr marL="0" indent="0" algn="l">
+              <ns1:lnSpc>
+                <ns1:spcPts val="1680"/>
+              </ns1:lnSpc>
+              <ns1:buNone/>
+            </ns1:pPr>
+            <ns1:r>
+              <ns1:rPr lang="en-US" sz="1200" dirty="0">
+                <ns1:solidFill>
+                  <ns1:srgbClr val="F5F3EC"/>
+                </ns1:solidFill>
+                <ns1:latin typeface="Arial" pitchFamily="34" charset="0"/>
+                <ns1:ea typeface="Arial" pitchFamily="34" charset="-122"/>
+                <ns1:cs typeface="Arial" pitchFamily="34" charset="-120"/>
+              </ns1:rPr>
+              <ns1:t>Ene–jul</ns1:t>
+            </ns1:r>
+            <ns1:endParaRPr lang="en-US" sz="1200" dirty="0"/>
+          </ns1:p>
+        </ns0:txBody>
+      </ns0:sp>
+      <ns0:sp>
+        <ns0:nvSpPr>
+          <ns0:cNvPr id="36" name="Text 31"/>
+          <ns0:cNvSpPr/>
+          <ns0:nvPr/>
+        </ns0:nvSpPr>
+        <ns0:spPr>
+          <ns1:xfrm>
+            <ns1:off x="9946084" y="4673600"/>
+            <ns1:ext cx="1356916" cy="381000"/>
+          </ns1:xfrm>
+          <ns1:prstGeom prst="rect">
+            <ns1:avLst/>
+          </ns1:prstGeom>
+          <ns1:noFill/>
+          <ns1:ln/>
+        </ns0:spPr>
+        <ns0:txBody>
+          <ns1:bodyPr wrap="square" lIns="0" tIns="0" rIns="0" bIns="0" rtlCol="0" anchor="t">
+            <ns1:normAutofit/>
+          </ns1:bodyPr>
+          <ns1:lstStyle/>
+          <ns1:p>
+            <ns1:pPr marL="0" indent="0" algn="l">
+              <ns1:lnSpc>
+                <ns1:spcPts val="2800"/>
+              </ns1:lnSpc>
+              <ns1:buNone/>
+            </ns1:pPr>
+            <ns1:r>
+              <ns1:rPr lang="en-US" sz="2000" b="1" dirty="0">
+                <ns1:solidFill>
+                  <ns1:srgbClr val="F5F3EC"/>
+                </ns1:solidFill>
+                <ns1:latin typeface="Arial" pitchFamily="34" charset="0"/>
+                <ns1:ea typeface="Arial" pitchFamily="34" charset="-122"/>
+                <ns1:cs typeface="Arial" pitchFamily="34" charset="-120"/>
+              </ns1:rPr>
+              <ns1:t>No indep.</ns1:t>
+            </ns1:r>
+            <ns1:endParaRPr lang="en-US" sz="2000" dirty="0"/>
+          </ns1:p>
+        </ns0:txBody>
+      </ns0:sp>
+      <ns0:sp>
+        <ns0:nvSpPr>
+          <ns0:cNvPr id="37" name="Text 32"/>
+          <ns0:cNvSpPr/>
+          <ns0:nvPr/>
+        </ns0:nvSpPr>
+        <ns0:spPr>
+          <ns1:xfrm>
+            <ns1:off x="812800" y="5359400"/>
+            <ns1:ext cx="10883392" cy="495300"/>
+          </ns1:xfrm>
+          <ns1:prstGeom prst="rect">
+            <ns1:avLst/>
+          </ns1:prstGeom>
+          <ns1:noFill/>
+          <ns1:ln/>
+        </ns0:spPr>
+        <ns0:txBody>
+          <ns1:bodyPr wrap="square" lIns="0" tIns="0" rIns="0" bIns="0" rtlCol="0" anchor="t">
+            <ns1:normAutofit/>
+          </ns1:bodyPr>
+          <ns1:lstStyle/>
+          <ns1:p>
+            <ns1:pPr marL="0" indent="0" algn="l">
+              <ns1:lnSpc>
+                <ns1:spcPts val="1890"/>
+              </ns1:lnSpc>
+              <ns1:buNone/>
+            </ns1:pPr>
+            <ns1:r>
+              <ns1:rPr lang="en-US" sz="1400" b="1" dirty="0">
+                <ns1:solidFill>
+                  <ns1:srgbClr val="16222F"/>
+                </ns1:solidFill>
+                <ns1:latin typeface="Arial" pitchFamily="34" charset="0"/>
+                <ns1:ea typeface="Arial" pitchFamily="34" charset="-122"/>
+                <ns1:cs typeface="Arial" pitchFamily="34" charset="-120"/>
+              </ns1:rPr>
+              <ns1:t>Logística: muestra 2019 · Gradient Boosting: 1 M de vuelos ene–sep 2021 · Validación: oct–dic 2021</ns1:t>
+            </ns1:r>
+            <ns1:r>
+              <ns1:rPr lang="en-US" sz="1400" dirty="0">
+                <ns1:solidFill>
+                  <ns1:srgbClr val="16222F"/>
+                </ns1:solidFill>
+                <ns1:latin typeface="Arial" pitchFamily="34" charset="0"/>
+                <ns1:ea typeface="Arial" pitchFamily="34" charset="-122"/>
+                <ns1:cs typeface="Arial" pitchFamily="34" charset="-120"/>
+              </ns1:rPr>
+              <ns1:t/>
+            </ns1:r>
+            <ns1:endParaRPr lang="en-US" sz="1400" dirty="0"/>
+          </ns1:p>
+        </ns0:txBody>
+      </ns0:sp>
+      <ns0:sp>
+        <ns0:nvSpPr>
+          <ns0:cNvPr id="38" name="Text 33"/>
+          <ns0:cNvSpPr/>
+          <ns0:nvPr/>
+        </ns0:nvSpPr>
+        <ns0:spPr>
+          <ns1:xfrm>
+            <ns1:off x="812800" y="6242050"/>
+            <ns1:ext cx="9810750" cy="234950"/>
+          </ns1:xfrm>
+          <ns1:prstGeom prst="rect">
+            <ns1:avLst/>
+          </ns1:prstGeom>
+          <ns1:noFill/>
+          <ns1:ln/>
+        </ns0:spPr>
+        <ns0:txBody>
+          <ns1:bodyPr wrap="square" lIns="0" tIns="0" rIns="0" bIns="0" rtlCol="0" anchor="t">
+            <ns1:normAutofit/>
+          </ns1:bodyPr>
+          <ns1:lstStyle/>
+          <ns1:p>
+            <ns1:pPr marL="0" indent="0" algn="l">
+              <ns1:lnSpc>
+                <ns1:spcPts val="1680"/>
+              </ns1:lnSpc>
+              <ns1:buNone/>
+            </ns1:pPr>
+            <ns1:r>
+              <ns1:rPr lang="en-US" sz="1200" dirty="0">
+                <ns1:solidFill>
+                  <ns1:srgbClr val="55606B"/>
+                </ns1:solidFill>
+                <ns1:latin typeface="Arial" pitchFamily="34" charset="0"/>
+                <ns1:ea typeface="Arial" pitchFamily="34" charset="-122"/>
+                <ns1:cs typeface="Arial" pitchFamily="34" charset="-120"/>
+              </ns1:rPr>
+              <ns1:t>Datos de EE. UU.; 2020 excluido de todo análisis. Colombia es una propuesta pendiente de validación local.</ns1:t>
+            </ns1:r>
+            <ns1:endParaRPr lang="en-US" sz="1200" dirty="0"/>
+          </ns1:p>
+        </ns0:txBody>
+      </ns0:sp>
+      <ns0:sp>
+        <ns0:nvSpPr>
+          <ns0:cNvPr id="39" name="Text 34"/>
+          <ns0:cNvSpPr/>
+          <ns0:nvPr/>
+        </ns0:nvSpPr>
+        <ns0:spPr>
+          <ns1:xfrm>
+            <ns1:off x="10693400" y="6242050"/>
+            <ns1:ext cx="685800" cy="234950"/>
+          </ns1:xfrm>
+          <ns1:prstGeom prst="rect">
+            <ns1:avLst/>
+          </ns1:prstGeom>
+          <ns1:noFill/>
+          <ns1:ln/>
+        </ns0:spPr>
+        <ns0:txBody>
+          <ns1:bodyPr wrap="square" lIns="0" tIns="0" rIns="0" bIns="0" rtlCol="0" anchor="t">
+            <ns1:normAutofit/>
+          </ns1:bodyPr>
+          <ns1:lstStyle/>
+          <ns1:p>
+            <ns1:pPr marL="0" indent="0" algn="r">
+              <ns1:lnSpc>
+                <ns1:spcPts val="1680"/>
+              </ns1:lnSpc>
+              <ns1:buNone/>
+            </ns1:pPr>
+            <ns1:r>
+              <ns1:rPr lang="en-US" sz="1200" dirty="0">
+                <ns1:solidFill>
+                  <ns1:srgbClr val="55606B"/>
+                </ns1:solidFill>
+                <ns1:latin typeface="Arial" pitchFamily="34" charset="0"/>
+                <ns1:ea typeface="Arial" pitchFamily="34" charset="-122"/>
+                <ns1:cs typeface="Arial" pitchFamily="34" charset="-120"/>
+              </ns1:rPr>
+              <ns1:t>7</ns1:t>
+            </ns1:r>
+            <ns1:endParaRPr lang="en-US" sz="1200" dirty="0"/>
+          </ns1:p>
+        </ns0:txBody>
+      </ns0:sp>
+    </ns0:spTree>
+  </ns0:cSld>
+  <ns0:clrMapOvr>
+    <ns1:masterClrMapping/>
+  </ns0:clrMapOvr>
+</ns0:sld>
 </file>
 
 <file path=ppt/slides/slide8.xml><?xml version="1.0" encoding="utf-8"?>
